--- a/presentations/m2-session-2-data-prep-and-feature-engineering.pptx
+++ b/presentations/m2-session-2-data-prep-and-feature-engineering.pptx
@@ -3491,7 +3491,7 @@
                 </a:solidFill>
                 <a:latin typeface="Arial"/>
               </a:rPr>
-              <a:t>FEATURE ENGINEERING: FAMILYSIZE</a:t>
+              <a:t>FEATURE ENGINEERING: TITLE</a:t>
             </a:r>
           </a:p>
         </p:txBody>
@@ -3531,7 +3531,7 @@
                 </a:solidFill>
                 <a:latin typeface="Arial"/>
               </a:rPr>
-              <a:t>FamilySize = SibSp + Parch + 1 - small families of 2 to 4 fared best</a:t>
+              <a:t>Title packs sex, age, and status into one column - and finds the boys</a:t>
             </a:r>
           </a:p>
         </p:txBody>
@@ -3618,7 +3618,7 @@
                 </a:solidFill>
                 <a:latin typeface="Arial"/>
               </a:rPr>
-              <a:t>FamilySize = SibSp + Parch + 1: everyone counts themselves</a:t>
+              <a:t>Regex " ([A-Za-z]+)\." grabs the word before the period - the title</a:t>
             </a:r>
           </a:p>
           <a:p>
@@ -3638,7 +3638,7 @@
                 </a:solidFill>
                 <a:latin typeface="Arial"/>
               </a:rPr>
-              <a:t>Owen: SibSp 1, Parch 0 -&gt; FamilySize 2. Frankie: SibSp 0, Parch 2 -&gt; FamilySize 3</a:t>
+              <a:t>"Cumings, Mrs. John Bradley" yields Mrs for Florence; 14 raw titles group into 5 buckets: Mr, Miss, Mrs, Master, Rare</a:t>
             </a:r>
           </a:p>
           <a:p>
@@ -3658,7 +3658,7 @@
                 </a:solidFill>
                 <a:latin typeface="Arial"/>
               </a:rPr>
-              <a:t>IsAlone = 1 when FamilySize is 1: 434 of 712 training passengers - none of our three</a:t>
+              <a:t>Frankie, age 9, is a "Master" - the old title for young boys, secretly encoding "male child"</a:t>
             </a:r>
           </a:p>
           <a:p>
@@ -3678,7 +3678,7 @@
                 </a:solidFill>
                 <a:latin typeface="Arial"/>
               </a:rPr>
-              <a:t>Notebook charts: solo travelers and very large families fared badly; small families of 2 to 4 did best</a:t>
+              <a:t>To the Sex column, Owen (22) and Frankie (9) are both just male - Title tells the man from the boy</a:t>
             </a:r>
           </a:p>
           <a:p>
@@ -3698,14 +3698,14 @@
                 </a:solidFill>
                 <a:latin typeface="Arial"/>
               </a:rPr>
-              <a:t>More features is not automatically better - always check for signal</a:t>
+              <a:t>Signal check: Mrs and Miss survived far more often than Mr; Master sits well above adult men</a:t>
             </a:r>
           </a:p>
         </p:txBody>
       </p:sp>
       <p:pic>
         <p:nvPicPr>
-          <p:cNvPr id="8" name="Picture 7" descr="fig_family.png"/>
+          <p:cNvPr id="8" name="Picture 7" descr="fig_titles.png"/>
           <p:cNvPicPr>
             <a:picLocks noChangeAspect="1"/>
           </p:cNvPicPr>
@@ -3720,7 +3720,7 @@
         <p:spPr>
           <a:xfrm>
             <a:off x="5120640" y="1874519"/>
-            <a:ext cx="6492240" cy="3381653"/>
+            <a:ext cx="6492240" cy="3379340"/>
           </a:xfrm>
           <a:prstGeom prst="rect">
             <a:avLst/>
@@ -3762,7 +3762,7 @@
                 </a:solidFill>
                 <a:latin typeface="Arial"/>
               </a:rPr>
-              <a:t>FamilySize distribution, training set. Module 2, notebook 1.</a:t>
+              <a:t>Grouped Title counts, training set (712 rows). Module 2, notebook 1.</a:t>
             </a:r>
           </a:p>
         </p:txBody>
@@ -3988,7 +3988,7 @@
                 </a:solidFill>
                 <a:latin typeface="Arial"/>
               </a:rPr>
-              <a:t>FEATURE ENGINEERING, ATTRIBUTED</a:t>
+              <a:t>FEATURE ENGINEERING: FAMILYSIZE</a:t>
             </a:r>
           </a:p>
         </p:txBody>
@@ -4028,7 +4028,7 @@
                 </a:solidFill>
                 <a:latin typeface="Arial"/>
               </a:rPr>
-              <a:t>Multiply two weak columns and you can get one strong feature - Ng's area example</a:t>
+              <a:t>FamilySize = SibSp + Parch + 1 - small families of 2 to 4 fared best</a:t>
             </a:r>
           </a:p>
         </p:txBody>
@@ -4079,58 +4079,14 @@
       </p:sp>
       <p:sp>
         <p:nvSpPr>
-          <p:cNvPr id="7" name="Rectangle 6"/>
-          <p:cNvSpPr/>
+          <p:cNvPr id="7" name="TextBox 6"/>
+          <p:cNvSpPr txBox="1"/>
           <p:nvPr/>
         </p:nvSpPr>
         <p:spPr>
           <a:xfrm>
             <a:off x="548640" y="1874519"/>
-            <a:ext cx="5394960" cy="3977639"/>
-          </a:xfrm>
-          <a:prstGeom prst="rect">
-            <a:avLst/>
-          </a:prstGeom>
-          <a:solidFill>
-            <a:srgbClr val="EEF3FD"/>
-          </a:solidFill>
-          <a:ln>
-            <a:noFill/>
-          </a:ln>
-          <a:effectLst/>
-        </p:spPr>
-        <p:style>
-          <a:lnRef idx="1">
-            <a:schemeClr val="accent1"/>
-          </a:lnRef>
-          <a:fillRef idx="3">
-            <a:schemeClr val="accent1"/>
-          </a:fillRef>
-          <a:effectRef idx="2">
-            <a:schemeClr val="accent1"/>
-          </a:effectRef>
-          <a:fontRef idx="minor">
-            <a:schemeClr val="lt1"/>
-          </a:fontRef>
-        </p:style>
-        <p:txBody>
-          <a:bodyPr rtlCol="0" anchor="ctr"/>
-          <a:lstStyle/>
-          <a:p>
-            <a:pPr algn="ctr"/>
-          </a:p>
-        </p:txBody>
-      </p:sp>
-      <p:sp>
-        <p:nvSpPr>
-          <p:cNvPr id="8" name="TextBox 7"/>
-          <p:cNvSpPr txBox="1"/>
-          <p:nvPr/>
-        </p:nvSpPr>
-        <p:spPr>
-          <a:xfrm>
-            <a:off x="777240" y="2039111"/>
-            <a:ext cx="4937760" cy="365760"/>
+            <a:ext cx="4297680" cy="4206240"/>
           </a:xfrm>
           <a:prstGeom prst="rect">
             <a:avLst/>
@@ -4143,49 +4099,9 @@
           </a:bodyPr>
           <a:lstStyle/>
           <a:p>
-            <a:pPr algn="l">
-              <a:spcAft>
-                <a:spcPts val="600"/>
-              </a:spcAft>
-              <a:buNone/>
-            </a:pPr>
-            <a:r>
-              <a:rPr sz="1500" b="1">
-                <a:solidFill>
-                  <a:srgbClr val="0A2540"/>
-                </a:solidFill>
-                <a:latin typeface="Arial"/>
-              </a:rPr>
-              <a:t>Andrew Ng - Machine Learning Specialization</a:t>
-            </a:r>
-          </a:p>
-        </p:txBody>
-      </p:sp>
-      <p:sp>
-        <p:nvSpPr>
-          <p:cNvPr id="9" name="TextBox 8"/>
-          <p:cNvSpPr txBox="1"/>
-          <p:nvPr/>
-        </p:nvSpPr>
-        <p:spPr>
-          <a:xfrm>
-            <a:off x="777240" y="2441447"/>
-            <a:ext cx="4937760" cy="3246119"/>
-          </a:xfrm>
-          <a:prstGeom prst="rect">
-            <a:avLst/>
-          </a:prstGeom>
-          <a:noFill/>
-        </p:spPr>
-        <p:txBody>
-          <a:bodyPr wrap="square">
-            <a:spAutoFit/>
-          </a:bodyPr>
-          <a:lstStyle/>
-          <a:p>
             <a:pPr algn="l" indent="-228600" marL="228600">
               <a:spcAft>
-                <a:spcPts val="600"/>
+                <a:spcPts val="800"/>
               </a:spcAft>
               <a:buClr>
                 <a:srgbClr val="1E5EF3"/>
@@ -4193,19 +4109,19 @@
               <a:buChar char="—"/>
             </a:pPr>
             <a:r>
-              <a:rPr sz="1300" b="0">
+              <a:rPr sz="1450" b="0">
                 <a:solidFill>
                   <a:srgbClr val="202B38"/>
                 </a:solidFill>
                 <a:latin typeface="Arial"/>
               </a:rPr>
-              <a:t>A house lot has frontage (x1) and depth (x2)</a:t>
+              <a:t>FamilySize = SibSp + Parch + 1: everyone counts themselves</a:t>
             </a:r>
           </a:p>
           <a:p>
             <a:pPr algn="l" indent="-228600" marL="228600">
               <a:spcAft>
-                <a:spcPts val="600"/>
+                <a:spcPts val="800"/>
               </a:spcAft>
               <a:buClr>
                 <a:srgbClr val="1E5EF3"/>
@@ -4213,19 +4129,19 @@
               <a:buChar char="—"/>
             </a:pPr>
             <a:r>
-              <a:rPr sz="1300" b="0">
+              <a:rPr sz="1450" b="0">
                 <a:solidFill>
                   <a:srgbClr val="202B38"/>
                 </a:solidFill>
                 <a:latin typeface="Arial"/>
               </a:rPr>
-              <a:t>New feature: x3 = x1 * x2 = lot area</a:t>
+              <a:t>Owen: SibSp 1, Parch 0 -&gt; FamilySize 2. Frankie: SibSp 0, Parch 2 -&gt; FamilySize 3</a:t>
             </a:r>
           </a:p>
           <a:p>
             <a:pPr algn="l" indent="-228600" marL="228600">
               <a:spcAft>
-                <a:spcPts val="600"/>
+                <a:spcPts val="800"/>
               </a:spcAft>
               <a:buClr>
                 <a:srgbClr val="1E5EF3"/>
@@ -4233,19 +4149,19 @@
               <a:buChar char="—"/>
             </a:pPr>
             <a:r>
-              <a:rPr sz="1300" b="0">
+              <a:rPr sz="1450" b="0">
                 <a:solidFill>
                   <a:srgbClr val="202B38"/>
                 </a:solidFill>
                 <a:latin typeface="Arial"/>
               </a:rPr>
-              <a:t>Area is often more predictive than either raw column</a:t>
+              <a:t>IsAlone = 1 when FamilySize is 1: 434 of 712 training passengers - none of our three</a:t>
             </a:r>
           </a:p>
           <a:p>
             <a:pPr algn="l" indent="-228600" marL="228600">
               <a:spcAft>
-                <a:spcPts val="600"/>
+                <a:spcPts val="800"/>
               </a:spcAft>
               <a:buClr>
                 <a:srgbClr val="1E5EF3"/>
@@ -4253,126 +4169,19 @@
               <a:buChar char="—"/>
             </a:pPr>
             <a:r>
-              <a:rPr sz="1300" b="0">
+              <a:rPr sz="1450" b="0">
                 <a:solidFill>
                   <a:srgbClr val="202B38"/>
                 </a:solidFill>
                 <a:latin typeface="Arial"/>
               </a:rPr>
-              <a:t>One multiplication - no new data collected</a:t>
-            </a:r>
-          </a:p>
-        </p:txBody>
-      </p:sp>
-      <p:sp>
-        <p:nvSpPr>
-          <p:cNvPr id="10" name="Rectangle 9"/>
-          <p:cNvSpPr/>
-          <p:nvPr/>
-        </p:nvSpPr>
-        <p:spPr>
-          <a:xfrm>
-            <a:off x="6245352" y="1874519"/>
-            <a:ext cx="5394960" cy="3977639"/>
-          </a:xfrm>
-          <a:prstGeom prst="rect">
-            <a:avLst/>
-          </a:prstGeom>
-          <a:solidFill>
-            <a:srgbClr val="EEF3FD"/>
-          </a:solidFill>
-          <a:ln>
-            <a:noFill/>
-          </a:ln>
-          <a:effectLst/>
-        </p:spPr>
-        <p:style>
-          <a:lnRef idx="1">
-            <a:schemeClr val="accent1"/>
-          </a:lnRef>
-          <a:fillRef idx="3">
-            <a:schemeClr val="accent1"/>
-          </a:fillRef>
-          <a:effectRef idx="2">
-            <a:schemeClr val="accent1"/>
-          </a:effectRef>
-          <a:fontRef idx="minor">
-            <a:schemeClr val="lt1"/>
-          </a:fontRef>
-        </p:style>
-        <p:txBody>
-          <a:bodyPr rtlCol="0" anchor="ctr"/>
-          <a:lstStyle/>
-          <a:p>
-            <a:pPr algn="ctr"/>
-          </a:p>
-        </p:txBody>
-      </p:sp>
-      <p:sp>
-        <p:nvSpPr>
-          <p:cNvPr id="11" name="TextBox 10"/>
-          <p:cNvSpPr txBox="1"/>
-          <p:nvPr/>
-        </p:nvSpPr>
-        <p:spPr>
-          <a:xfrm>
-            <a:off x="6473952" y="2039111"/>
-            <a:ext cx="4937760" cy="365760"/>
-          </a:xfrm>
-          <a:prstGeom prst="rect">
-            <a:avLst/>
-          </a:prstGeom>
-          <a:noFill/>
-        </p:spPr>
-        <p:txBody>
-          <a:bodyPr wrap="square">
-            <a:spAutoFit/>
-          </a:bodyPr>
-          <a:lstStyle/>
-          <a:p>
-            <a:pPr algn="l">
-              <a:spcAft>
-                <a:spcPts val="600"/>
-              </a:spcAft>
-              <a:buNone/>
-            </a:pPr>
-            <a:r>
-              <a:rPr sz="1500" b="1">
-                <a:solidFill>
-                  <a:srgbClr val="0A2540"/>
-                </a:solidFill>
-                <a:latin typeface="Arial"/>
-              </a:rPr>
-              <a:t>The same move on the Titanic</a:t>
-            </a:r>
-          </a:p>
-        </p:txBody>
-      </p:sp>
-      <p:sp>
-        <p:nvSpPr>
-          <p:cNvPr id="12" name="TextBox 11"/>
-          <p:cNvSpPr txBox="1"/>
-          <p:nvPr/>
-        </p:nvSpPr>
-        <p:spPr>
-          <a:xfrm>
-            <a:off x="6473952" y="2441447"/>
-            <a:ext cx="4937760" cy="3246119"/>
-          </a:xfrm>
-          <a:prstGeom prst="rect">
-            <a:avLst/>
-          </a:prstGeom>
-          <a:noFill/>
-        </p:spPr>
-        <p:txBody>
-          <a:bodyPr wrap="square">
-            <a:spAutoFit/>
-          </a:bodyPr>
-          <a:lstStyle/>
+              <a:t>Notebook charts: solo travelers and very large families fared badly; small families of 2 to 4 did best</a:t>
+            </a:r>
+          </a:p>
           <a:p>
             <a:pPr algn="l" indent="-228600" marL="228600">
               <a:spcAft>
-                <a:spcPts val="600"/>
+                <a:spcPts val="800"/>
               </a:spcAft>
               <a:buClr>
                 <a:srgbClr val="1E5EF3"/>
@@ -4380,87 +4189,51 @@
               <a:buChar char="—"/>
             </a:pPr>
             <a:r>
-              <a:rPr sz="1300" b="0">
+              <a:rPr sz="1450" b="0">
                 <a:solidFill>
                   <a:srgbClr val="202B38"/>
                 </a:solidFill>
                 <a:latin typeface="Arial"/>
               </a:rPr>
-              <a:t>SibSp + Parch + 1 = FamilySize: one column beats two</a:t>
-            </a:r>
-          </a:p>
-          <a:p>
-            <a:pPr algn="l" indent="-228600" marL="228600">
-              <a:spcAft>
-                <a:spcPts val="600"/>
-              </a:spcAft>
-              <a:buClr>
-                <a:srgbClr val="1E5EF3"/>
-              </a:buClr>
-              <a:buChar char="—"/>
-            </a:pPr>
-            <a:r>
-              <a:rPr sz="1300" b="0">
-                <a:solidFill>
-                  <a:srgbClr val="202B38"/>
-                </a:solidFill>
-                <a:latin typeface="Arial"/>
-              </a:rPr>
-              <a:t>Name -&gt; Title: sex, age, and status compressed into one</a:t>
-            </a:r>
-          </a:p>
-          <a:p>
-            <a:pPr algn="l" indent="-228600" marL="228600">
-              <a:spcAft>
-                <a:spcPts val="600"/>
-              </a:spcAft>
-              <a:buClr>
-                <a:srgbClr val="1E5EF3"/>
-              </a:buClr>
-              <a:buChar char="—"/>
-            </a:pPr>
-            <a:r>
-              <a:rPr sz="1300" b="0">
-                <a:solidFill>
-                  <a:srgbClr val="202B38"/>
-                </a:solidFill>
-                <a:latin typeface="Arial"/>
-              </a:rPr>
-              <a:t>Master = young boy: a signal Sex and Age only hint at</a:t>
-            </a:r>
-          </a:p>
-          <a:p>
-            <a:pPr algn="l" indent="-228600" marL="228600">
-              <a:spcAft>
-                <a:spcPts val="600"/>
-              </a:spcAft>
-              <a:buClr>
-                <a:srgbClr val="1E5EF3"/>
-              </a:buClr>
-              <a:buChar char="—"/>
-            </a:pPr>
-            <a:r>
-              <a:rPr sz="1300" b="0">
-                <a:solidFill>
-                  <a:srgbClr val="202B38"/>
-                </a:solidFill>
-                <a:latin typeface="Arial"/>
-              </a:rPr>
-              <a:t>Good features often improve a model more than a fancier algorithm</a:t>
-            </a:r>
-          </a:p>
-        </p:txBody>
-      </p:sp>
-      <p:sp>
-        <p:nvSpPr>
-          <p:cNvPr id="13" name="TextBox 12"/>
+              <a:t>More features is not automatically better - always check for signal</a:t>
+            </a:r>
+          </a:p>
+        </p:txBody>
+      </p:sp>
+      <p:pic>
+        <p:nvPicPr>
+          <p:cNvPr id="8" name="Picture 7" descr="fig_family.png"/>
+          <p:cNvPicPr>
+            <a:picLocks noChangeAspect="1"/>
+          </p:cNvPicPr>
+          <p:nvPr/>
+        </p:nvPicPr>
+        <p:blipFill>
+          <a:blip r:embed="rId2"/>
+          <a:stretch>
+            <a:fillRect/>
+          </a:stretch>
+        </p:blipFill>
+        <p:spPr>
+          <a:xfrm>
+            <a:off x="5120640" y="1874519"/>
+            <a:ext cx="6492240" cy="3381653"/>
+          </a:xfrm>
+          <a:prstGeom prst="rect">
+            <a:avLst/>
+          </a:prstGeom>
+        </p:spPr>
+      </p:pic>
+      <p:sp>
+        <p:nvSpPr>
+          <p:cNvPr id="9" name="TextBox 8"/>
           <p:cNvSpPr txBox="1"/>
           <p:nvPr/>
         </p:nvSpPr>
         <p:spPr>
           <a:xfrm>
-            <a:off x="548640" y="6053328"/>
-            <a:ext cx="11091672" cy="502920"/>
+            <a:off x="5120640" y="6062471"/>
+            <a:ext cx="6492240" cy="365760"/>
           </a:xfrm>
           <a:prstGeom prst="rect">
             <a:avLst/>
@@ -4473,27 +4246,27 @@
           </a:bodyPr>
           <a:lstStyle/>
           <a:p>
-            <a:pPr algn="l">
+            <a:pPr algn="ctr">
               <a:spcAft>
                 <a:spcPts val="600"/>
               </a:spcAft>
               <a:buNone/>
             </a:pPr>
             <a:r>
-              <a:rPr sz="1200" b="0">
-                <a:solidFill>
-                  <a:srgbClr val="1E5EF3"/>
-                </a:solidFill>
-                <a:latin typeface="Arial"/>
-              </a:rPr>
-              <a:t>Ng's rule for inventing features: "use knowledge or intuition about the problem to design new features."</a:t>
-            </a:r>
-          </a:p>
-        </p:txBody>
-      </p:sp>
-      <p:sp>
-        <p:nvSpPr>
-          <p:cNvPr id="14" name="TextBox 13"/>
+              <a:rPr sz="1100" b="0">
+                <a:solidFill>
+                  <a:srgbClr val="5B6774"/>
+                </a:solidFill>
+                <a:latin typeface="Arial"/>
+              </a:rPr>
+              <a:t>FamilySize distribution, training set. Module 2, notebook 1.</a:t>
+            </a:r>
+          </a:p>
+        </p:txBody>
+      </p:sp>
+      <p:sp>
+        <p:nvSpPr>
+          <p:cNvPr id="10" name="TextBox 9"/>
           <p:cNvSpPr txBox="1"/>
           <p:nvPr/>
         </p:nvSpPr>
@@ -4533,7 +4306,7 @@
       </p:sp>
       <p:sp>
         <p:nvSpPr>
-          <p:cNvPr id="15" name="TextBox 14"/>
+          <p:cNvPr id="11" name="TextBox 10"/>
           <p:cNvSpPr txBox="1"/>
           <p:nvPr/>
         </p:nvSpPr>
@@ -4712,7 +4485,7 @@
                 </a:solidFill>
                 <a:latin typeface="Arial"/>
               </a:rPr>
-              <a:t>ENGINEERING IN ACTION</a:t>
+              <a:t>FEATURE ENGINEERING, ATTRIBUTED</a:t>
             </a:r>
           </a:p>
         </p:txBody>
@@ -4752,7 +4525,7 @@
                 </a:solidFill>
                 <a:latin typeface="Arial"/>
               </a:rPr>
-              <a:t>The engineered row says what the raw row only hints: Frankie is a boy traveling with family</a:t>
+              <a:t>Multiply two weak columns and you can get one strong feature - Ng's area example</a:t>
             </a:r>
           </a:p>
         </p:txBody>
@@ -4801,30 +4574,50 @@
           </a:p>
         </p:txBody>
       </p:sp>
-      <p:pic>
-        <p:nvPicPr>
-          <p:cNvPr id="7" name="Picture 6" descr="s2_row_transform.png"/>
-          <p:cNvPicPr>
-            <a:picLocks noChangeAspect="1"/>
-          </p:cNvPicPr>
-          <p:nvPr/>
-        </p:nvPicPr>
-        <p:blipFill>
-          <a:blip r:embed="rId2"/>
-          <a:stretch>
-            <a:fillRect/>
-          </a:stretch>
-        </p:blipFill>
-        <p:spPr>
-          <a:xfrm>
-            <a:off x="1554480" y="1874519"/>
-            <a:ext cx="9052560" cy="3886439"/>
-          </a:xfrm>
-          <a:prstGeom prst="rect">
-            <a:avLst/>
-          </a:prstGeom>
-        </p:spPr>
-      </p:pic>
+      <p:sp>
+        <p:nvSpPr>
+          <p:cNvPr id="7" name="Rectangle 6"/>
+          <p:cNvSpPr/>
+          <p:nvPr/>
+        </p:nvSpPr>
+        <p:spPr>
+          <a:xfrm>
+            <a:off x="548640" y="1874519"/>
+            <a:ext cx="5394960" cy="3977639"/>
+          </a:xfrm>
+          <a:prstGeom prst="rect">
+            <a:avLst/>
+          </a:prstGeom>
+          <a:solidFill>
+            <a:srgbClr val="EEF3FD"/>
+          </a:solidFill>
+          <a:ln>
+            <a:noFill/>
+          </a:ln>
+          <a:effectLst/>
+        </p:spPr>
+        <p:style>
+          <a:lnRef idx="1">
+            <a:schemeClr val="accent1"/>
+          </a:lnRef>
+          <a:fillRef idx="3">
+            <a:schemeClr val="accent1"/>
+          </a:fillRef>
+          <a:effectRef idx="2">
+            <a:schemeClr val="accent1"/>
+          </a:effectRef>
+          <a:fontRef idx="minor">
+            <a:schemeClr val="lt1"/>
+          </a:fontRef>
+        </p:style>
+        <p:txBody>
+          <a:bodyPr rtlCol="0" anchor="ctr"/>
+          <a:lstStyle/>
+          <a:p>
+            <a:pPr algn="ctr"/>
+          </a:p>
+        </p:txBody>
+      </p:sp>
       <p:sp>
         <p:nvSpPr>
           <p:cNvPr id="8" name="TextBox 7"/>
@@ -4833,8 +4626,8 @@
         </p:nvSpPr>
         <p:spPr>
           <a:xfrm>
-            <a:off x="1554480" y="6062471"/>
-            <a:ext cx="9052560" cy="365760"/>
+            <a:off x="777240" y="2039111"/>
+            <a:ext cx="4937760" cy="365760"/>
           </a:xfrm>
           <a:prstGeom prst="rect">
             <a:avLst/>
@@ -4847,20 +4640,20 @@
           </a:bodyPr>
           <a:lstStyle/>
           <a:p>
-            <a:pPr algn="ctr">
+            <a:pPr algn="l">
               <a:spcAft>
                 <a:spcPts val="600"/>
               </a:spcAft>
               <a:buNone/>
             </a:pPr>
             <a:r>
-              <a:rPr sz="1100" b="0">
-                <a:solidFill>
-                  <a:srgbClr val="5B6774"/>
-                </a:solidFill>
-                <a:latin typeface="Arial"/>
-              </a:rPr>
-              <a:t>PassengerId 166, raw fields verbatim from the dataset. Module 2, notebook 1.</a:t>
+              <a:rPr sz="1500" b="1">
+                <a:solidFill>
+                  <a:srgbClr val="0A2540"/>
+                </a:solidFill>
+                <a:latin typeface="Arial"/>
+              </a:rPr>
+              <a:t>Andrew Ng - Machine Learning Specialization</a:t>
             </a:r>
           </a:p>
         </p:txBody>
@@ -4873,8 +4666,8 @@
         </p:nvSpPr>
         <p:spPr>
           <a:xfrm>
-            <a:off x="548640" y="6473952"/>
-            <a:ext cx="7315200" cy="292608"/>
+            <a:off x="777240" y="2441447"/>
+            <a:ext cx="4937760" cy="3246119"/>
           </a:xfrm>
           <a:prstGeom prst="rect">
             <a:avLst/>
@@ -4887,6 +4680,153 @@
           </a:bodyPr>
           <a:lstStyle/>
           <a:p>
+            <a:pPr algn="l" indent="-228600" marL="228600">
+              <a:spcAft>
+                <a:spcPts val="600"/>
+              </a:spcAft>
+              <a:buClr>
+                <a:srgbClr val="1E5EF3"/>
+              </a:buClr>
+              <a:buChar char="—"/>
+            </a:pPr>
+            <a:r>
+              <a:rPr sz="1300" b="0">
+                <a:solidFill>
+                  <a:srgbClr val="202B38"/>
+                </a:solidFill>
+                <a:latin typeface="Arial"/>
+              </a:rPr>
+              <a:t>A house lot has frontage (x1) and depth (x2)</a:t>
+            </a:r>
+          </a:p>
+          <a:p>
+            <a:pPr algn="l" indent="-228600" marL="228600">
+              <a:spcAft>
+                <a:spcPts val="600"/>
+              </a:spcAft>
+              <a:buClr>
+                <a:srgbClr val="1E5EF3"/>
+              </a:buClr>
+              <a:buChar char="—"/>
+            </a:pPr>
+            <a:r>
+              <a:rPr sz="1300" b="0">
+                <a:solidFill>
+                  <a:srgbClr val="202B38"/>
+                </a:solidFill>
+                <a:latin typeface="Arial"/>
+              </a:rPr>
+              <a:t>New feature: x3 = x1 * x2 = lot area</a:t>
+            </a:r>
+          </a:p>
+          <a:p>
+            <a:pPr algn="l" indent="-228600" marL="228600">
+              <a:spcAft>
+                <a:spcPts val="600"/>
+              </a:spcAft>
+              <a:buClr>
+                <a:srgbClr val="1E5EF3"/>
+              </a:buClr>
+              <a:buChar char="—"/>
+            </a:pPr>
+            <a:r>
+              <a:rPr sz="1300" b="0">
+                <a:solidFill>
+                  <a:srgbClr val="202B38"/>
+                </a:solidFill>
+                <a:latin typeface="Arial"/>
+              </a:rPr>
+              <a:t>Area is often more predictive than either raw column</a:t>
+            </a:r>
+          </a:p>
+          <a:p>
+            <a:pPr algn="l" indent="-228600" marL="228600">
+              <a:spcAft>
+                <a:spcPts val="600"/>
+              </a:spcAft>
+              <a:buClr>
+                <a:srgbClr val="1E5EF3"/>
+              </a:buClr>
+              <a:buChar char="—"/>
+            </a:pPr>
+            <a:r>
+              <a:rPr sz="1300" b="0">
+                <a:solidFill>
+                  <a:srgbClr val="202B38"/>
+                </a:solidFill>
+                <a:latin typeface="Arial"/>
+              </a:rPr>
+              <a:t>One multiplication - no new data collected</a:t>
+            </a:r>
+          </a:p>
+        </p:txBody>
+      </p:sp>
+      <p:sp>
+        <p:nvSpPr>
+          <p:cNvPr id="10" name="Rectangle 9"/>
+          <p:cNvSpPr/>
+          <p:nvPr/>
+        </p:nvSpPr>
+        <p:spPr>
+          <a:xfrm>
+            <a:off x="6245352" y="1874519"/>
+            <a:ext cx="5394960" cy="3977639"/>
+          </a:xfrm>
+          <a:prstGeom prst="rect">
+            <a:avLst/>
+          </a:prstGeom>
+          <a:solidFill>
+            <a:srgbClr val="EEF3FD"/>
+          </a:solidFill>
+          <a:ln>
+            <a:noFill/>
+          </a:ln>
+          <a:effectLst/>
+        </p:spPr>
+        <p:style>
+          <a:lnRef idx="1">
+            <a:schemeClr val="accent1"/>
+          </a:lnRef>
+          <a:fillRef idx="3">
+            <a:schemeClr val="accent1"/>
+          </a:fillRef>
+          <a:effectRef idx="2">
+            <a:schemeClr val="accent1"/>
+          </a:effectRef>
+          <a:fontRef idx="minor">
+            <a:schemeClr val="lt1"/>
+          </a:fontRef>
+        </p:style>
+        <p:txBody>
+          <a:bodyPr rtlCol="0" anchor="ctr"/>
+          <a:lstStyle/>
+          <a:p>
+            <a:pPr algn="ctr"/>
+          </a:p>
+        </p:txBody>
+      </p:sp>
+      <p:sp>
+        <p:nvSpPr>
+          <p:cNvPr id="11" name="TextBox 10"/>
+          <p:cNvSpPr txBox="1"/>
+          <p:nvPr/>
+        </p:nvSpPr>
+        <p:spPr>
+          <a:xfrm>
+            <a:off x="6473952" y="2039111"/>
+            <a:ext cx="4937760" cy="365760"/>
+          </a:xfrm>
+          <a:prstGeom prst="rect">
+            <a:avLst/>
+          </a:prstGeom>
+          <a:noFill/>
+        </p:spPr>
+        <p:txBody>
+          <a:bodyPr wrap="square">
+            <a:spAutoFit/>
+          </a:bodyPr>
+          <a:lstStyle/>
+          <a:p>
             <a:pPr algn="l">
               <a:spcAft>
                 <a:spcPts val="600"/>
@@ -4894,6 +4834,189 @@
               <a:buNone/>
             </a:pPr>
             <a:r>
+              <a:rPr sz="1500" b="1">
+                <a:solidFill>
+                  <a:srgbClr val="0A2540"/>
+                </a:solidFill>
+                <a:latin typeface="Arial"/>
+              </a:rPr>
+              <a:t>The same move on the Titanic</a:t>
+            </a:r>
+          </a:p>
+        </p:txBody>
+      </p:sp>
+      <p:sp>
+        <p:nvSpPr>
+          <p:cNvPr id="12" name="TextBox 11"/>
+          <p:cNvSpPr txBox="1"/>
+          <p:nvPr/>
+        </p:nvSpPr>
+        <p:spPr>
+          <a:xfrm>
+            <a:off x="6473952" y="2441447"/>
+            <a:ext cx="4937760" cy="3246119"/>
+          </a:xfrm>
+          <a:prstGeom prst="rect">
+            <a:avLst/>
+          </a:prstGeom>
+          <a:noFill/>
+        </p:spPr>
+        <p:txBody>
+          <a:bodyPr wrap="square">
+            <a:spAutoFit/>
+          </a:bodyPr>
+          <a:lstStyle/>
+          <a:p>
+            <a:pPr algn="l" indent="-228600" marL="228600">
+              <a:spcAft>
+                <a:spcPts val="600"/>
+              </a:spcAft>
+              <a:buClr>
+                <a:srgbClr val="1E5EF3"/>
+              </a:buClr>
+              <a:buChar char="—"/>
+            </a:pPr>
+            <a:r>
+              <a:rPr sz="1300" b="0">
+                <a:solidFill>
+                  <a:srgbClr val="202B38"/>
+                </a:solidFill>
+                <a:latin typeface="Arial"/>
+              </a:rPr>
+              <a:t>SibSp + Parch + 1 = FamilySize: one column beats two</a:t>
+            </a:r>
+          </a:p>
+          <a:p>
+            <a:pPr algn="l" indent="-228600" marL="228600">
+              <a:spcAft>
+                <a:spcPts val="600"/>
+              </a:spcAft>
+              <a:buClr>
+                <a:srgbClr val="1E5EF3"/>
+              </a:buClr>
+              <a:buChar char="—"/>
+            </a:pPr>
+            <a:r>
+              <a:rPr sz="1300" b="0">
+                <a:solidFill>
+                  <a:srgbClr val="202B38"/>
+                </a:solidFill>
+                <a:latin typeface="Arial"/>
+              </a:rPr>
+              <a:t>Name -&gt; Title: sex, age, and status compressed into one</a:t>
+            </a:r>
+          </a:p>
+          <a:p>
+            <a:pPr algn="l" indent="-228600" marL="228600">
+              <a:spcAft>
+                <a:spcPts val="600"/>
+              </a:spcAft>
+              <a:buClr>
+                <a:srgbClr val="1E5EF3"/>
+              </a:buClr>
+              <a:buChar char="—"/>
+            </a:pPr>
+            <a:r>
+              <a:rPr sz="1300" b="0">
+                <a:solidFill>
+                  <a:srgbClr val="202B38"/>
+                </a:solidFill>
+                <a:latin typeface="Arial"/>
+              </a:rPr>
+              <a:t>Master = young boy: a signal Sex and Age only hint at</a:t>
+            </a:r>
+          </a:p>
+          <a:p>
+            <a:pPr algn="l" indent="-228600" marL="228600">
+              <a:spcAft>
+                <a:spcPts val="600"/>
+              </a:spcAft>
+              <a:buClr>
+                <a:srgbClr val="1E5EF3"/>
+              </a:buClr>
+              <a:buChar char="—"/>
+            </a:pPr>
+            <a:r>
+              <a:rPr sz="1300" b="0">
+                <a:solidFill>
+                  <a:srgbClr val="202B38"/>
+                </a:solidFill>
+                <a:latin typeface="Arial"/>
+              </a:rPr>
+              <a:t>Good features often improve a model more than a fancier algorithm</a:t>
+            </a:r>
+          </a:p>
+        </p:txBody>
+      </p:sp>
+      <p:sp>
+        <p:nvSpPr>
+          <p:cNvPr id="13" name="TextBox 12"/>
+          <p:cNvSpPr txBox="1"/>
+          <p:nvPr/>
+        </p:nvSpPr>
+        <p:spPr>
+          <a:xfrm>
+            <a:off x="548640" y="6053328"/>
+            <a:ext cx="11091672" cy="502920"/>
+          </a:xfrm>
+          <a:prstGeom prst="rect">
+            <a:avLst/>
+          </a:prstGeom>
+          <a:noFill/>
+        </p:spPr>
+        <p:txBody>
+          <a:bodyPr wrap="square">
+            <a:spAutoFit/>
+          </a:bodyPr>
+          <a:lstStyle/>
+          <a:p>
+            <a:pPr algn="l">
+              <a:spcAft>
+                <a:spcPts val="600"/>
+              </a:spcAft>
+              <a:buNone/>
+            </a:pPr>
+            <a:r>
+              <a:rPr sz="1200" b="0">
+                <a:solidFill>
+                  <a:srgbClr val="1E5EF3"/>
+                </a:solidFill>
+                <a:latin typeface="Arial"/>
+              </a:rPr>
+              <a:t>Ng's rule for inventing features: "use knowledge or intuition about the problem to design new features."</a:t>
+            </a:r>
+          </a:p>
+        </p:txBody>
+      </p:sp>
+      <p:sp>
+        <p:nvSpPr>
+          <p:cNvPr id="14" name="TextBox 13"/>
+          <p:cNvSpPr txBox="1"/>
+          <p:nvPr/>
+        </p:nvSpPr>
+        <p:spPr>
+          <a:xfrm>
+            <a:off x="548640" y="6473952"/>
+            <a:ext cx="7315200" cy="292608"/>
+          </a:xfrm>
+          <a:prstGeom prst="rect">
+            <a:avLst/>
+          </a:prstGeom>
+          <a:noFill/>
+        </p:spPr>
+        <p:txBody>
+          <a:bodyPr wrap="square">
+            <a:spAutoFit/>
+          </a:bodyPr>
+          <a:lstStyle/>
+          <a:p>
+            <a:pPr algn="l">
+              <a:spcAft>
+                <a:spcPts val="600"/>
+              </a:spcAft>
+              <a:buNone/>
+            </a:pPr>
+            <a:r>
               <a:rPr sz="900" b="0">
                 <a:solidFill>
                   <a:srgbClr val="5B6774"/>
@@ -4907,7 +5030,7 @@
       </p:sp>
       <p:sp>
         <p:nvSpPr>
-          <p:cNvPr id="10" name="TextBox 9"/>
+          <p:cNvPr id="15" name="TextBox 14"/>
           <p:cNvSpPr txBox="1"/>
           <p:nvPr/>
         </p:nvSpPr>
@@ -5086,7 +5209,7 @@
                 </a:solidFill>
                 <a:latin typeface="Arial"/>
               </a:rPr>
-              <a:t>PUTTING IT ALL TOGETHER</a:t>
+              <a:t>FEATURE ENGINEERING: THE GEOMETRY</a:t>
             </a:r>
           </a:p>
         </p:txBody>
@@ -5126,7 +5249,7 @@
                 </a:solidFill>
                 <a:latin typeface="Arial"/>
               </a:rPr>
-              <a:t>One Pipeline remembers every step - leakage and forgotten steps become impossible</a:t>
+              <a:t>New features bend the space: four points no line can split become splittable</a:t>
             </a:r>
           </a:p>
         </p:txBody>
@@ -5213,7 +5336,7 @@
                 </a:solidFill>
                 <a:latin typeface="Arial"/>
               </a:rPr>
-              <a:t>Numeric (Age, Fare, SibSp, Parch, FamilySize): impute median, then StandardScaler</a:t>
+              <a:t>Four points at (+1 or -1, +1 or -1); diagonal corners share a class - no straight line can separate them, ever</a:t>
             </a:r>
           </a:p>
           <a:p>
@@ -5233,7 +5356,7 @@
                 </a:solidFill>
                 <a:latin typeface="Arial"/>
               </a:rPr>
-              <a:t>Categorical (Pclass, Sex, Embarked, Title): impute most frequent, then OneHotEncoder(handle_unknown="ignore")</a:t>
+              <a:t>Add one engineered column, x1 * x2: it is +1 for one class and -1 for the other - a single threshold now separates them perfectly</a:t>
             </a:r>
           </a:p>
           <a:p>
@@ -5253,7 +5376,7 @@
                 </a:solidFill>
                 <a:latin typeface="Arial"/>
               </a:rPr>
-              <a:t>Name, Ticket, Cabin, PassengerId: unlisted, dropped automatically</a:t>
+              <a:t>We did not change the model; we changed the space it looks at</a:t>
             </a:r>
           </a:p>
           <a:p>
@@ -5273,7 +5396,7 @@
                 </a:solidFill>
                 <a:latin typeface="Arial"/>
               </a:rPr>
-              <a:t>fit_transform(train) learns; transform(test) only applies</a:t>
+              <a:t>Titanic parallel: Title and FamilySize are our x1 * x2 - new axes that make patterns the raw columns only hint at linearly visible</a:t>
             </a:r>
           </a:p>
           <a:p>
@@ -5293,14 +5416,14 @@
                 </a:solidFill>
                 <a:latin typeface="Arial"/>
               </a:rPr>
-              <a:t>Three reasons: no leakage, no forgotten steps, portability</a:t>
+              <a:t>A linear model on transformed features is a non-linear model in the original space - feature engineering IS model power</a:t>
             </a:r>
           </a:p>
         </p:txBody>
       </p:sp>
       <p:pic>
         <p:nvPicPr>
-          <p:cNvPr id="8" name="Picture 7" descr="s2_pipeline_flow.png"/>
+          <p:cNvPr id="8" name="Picture 7" descr="fig_xor_features.png"/>
           <p:cNvPicPr>
             <a:picLocks noChangeAspect="1"/>
           </p:cNvPicPr>
@@ -5315,7 +5438,7 @@
         <p:spPr>
           <a:xfrm>
             <a:off x="5120640" y="1874519"/>
-            <a:ext cx="6492240" cy="2543793"/>
+            <a:ext cx="6492240" cy="3162774"/>
           </a:xfrm>
           <a:prstGeom prst="rect">
             <a:avLst/>
@@ -5357,7 +5480,7 @@
                 </a:solidFill>
                 <a:latin typeface="Arial"/>
               </a:rPr>
-              <a:t>The canonical prep, reused verbatim by Sessions 3 and 4. Module 2, notebook 1.</a:t>
+              <a:t>Illustration - the classic XOR construction. MIT 6.390, ch. 5.</a:t>
             </a:r>
           </a:p>
         </p:txBody>
@@ -5583,7 +5706,7 @@
                 </a:solidFill>
                 <a:latin typeface="Arial"/>
               </a:rPr>
-              <a:t>SANITY CHECKPOINT</a:t>
+              <a:t>PUTTING IT ALL TOGETHER</a:t>
             </a:r>
           </a:p>
         </p:txBody>
@@ -5623,7 +5746,7 @@
                 </a:solidFill>
                 <a:latin typeface="Arial"/>
               </a:rPr>
-              <a:t>The smoke test passes: a plain Logistic Regression scores 0.838 on unseen data</a:t>
+              <a:t>Frankie walks the pipeline: raw row in, 18 leak-proof numbers out</a:t>
             </a:r>
           </a:p>
         </p:txBody>
@@ -5680,8 +5803,8 @@
         </p:nvSpPr>
         <p:spPr>
           <a:xfrm>
-            <a:off x="1371600" y="2286000"/>
-            <a:ext cx="9418320" cy="2011680"/>
+            <a:off x="548640" y="1874519"/>
+            <a:ext cx="4297680" cy="4206240"/>
           </a:xfrm>
           <a:prstGeom prst="rect">
             <a:avLst/>
@@ -5694,34 +5817,121 @@
           </a:bodyPr>
           <a:lstStyle/>
           <a:p>
-            <a:pPr algn="ctr">
-              <a:spcAft>
-                <a:spcPts val="600"/>
-              </a:spcAft>
-              <a:buNone/>
-            </a:pPr>
-            <a:r>
-              <a:rPr sz="9600" b="1">
-                <a:solidFill>
-                  <a:srgbClr val="1E5EF3"/>
-                </a:solidFill>
-                <a:latin typeface="Arial"/>
-              </a:rPr>
-              <a:t>0.838</a:t>
-            </a:r>
-          </a:p>
-        </p:txBody>
-      </p:sp>
-      <p:sp>
-        <p:nvSpPr>
-          <p:cNvPr id="8" name="TextBox 7"/>
+            <a:pPr algn="l" indent="-228600" marL="228600">
+              <a:spcAft>
+                <a:spcPts val="800"/>
+              </a:spcAft>
+              <a:buClr>
+                <a:srgbClr val="1E5EF3"/>
+              </a:buClr>
+              <a:buChar char="—"/>
+            </a:pPr>
+            <a:r>
+              <a:rPr sz="1450" b="0">
+                <a:solidFill>
+                  <a:srgbClr val="202B38"/>
+                </a:solidFill>
+                <a:latin typeface="Arial"/>
+              </a:rPr>
+              <a:t>fit_transform(train) learns every step's values; transform(test) only applies them</a:t>
+            </a:r>
+          </a:p>
+          <a:p>
+            <a:pPr algn="l" indent="-228600" marL="228600">
+              <a:spcAft>
+                <a:spcPts val="800"/>
+              </a:spcAft>
+              <a:buClr>
+                <a:srgbClr val="1E5EF3"/>
+              </a:buClr>
+              <a:buChar char="—"/>
+            </a:pPr>
+            <a:r>
+              <a:rPr sz="1450" b="0">
+                <a:solidFill>
+                  <a:srgbClr val="202B38"/>
+                </a:solidFill>
+                <a:latin typeface="Arial"/>
+              </a:rPr>
+              <a:t>Numeric: impute median, then scale. Categorical: impute most frequent, then one-hot with handle_unknown="ignore"</a:t>
+            </a:r>
+          </a:p>
+          <a:p>
+            <a:pPr algn="l" indent="-228600" marL="228600">
+              <a:spcAft>
+                <a:spcPts val="800"/>
+              </a:spcAft>
+              <a:buClr>
+                <a:srgbClr val="1E5EF3"/>
+              </a:buClr>
+              <a:buChar char="—"/>
+            </a:pPr>
+            <a:r>
+              <a:rPr sz="1450" b="0">
+                <a:solidFill>
+                  <a:srgbClr val="202B38"/>
+                </a:solidFill>
+                <a:latin typeface="Arial"/>
+              </a:rPr>
+              <a:t>Three reasons for a Pipeline: no leakage, no forgotten steps, portability</a:t>
+            </a:r>
+          </a:p>
+          <a:p>
+            <a:pPr algn="l" indent="-228600" marL="228600">
+              <a:spcAft>
+                <a:spcPts val="800"/>
+              </a:spcAft>
+              <a:buClr>
+                <a:srgbClr val="1E5EF3"/>
+              </a:buClr>
+              <a:buChar char="—"/>
+            </a:pPr>
+            <a:r>
+              <a:rPr sz="1450" b="0">
+                <a:solidFill>
+                  <a:srgbClr val="202B38"/>
+                </a:solidFill>
+                <a:latin typeface="Arial"/>
+              </a:rPr>
+              <a:t>IsAlone is computed for every row but not on the model's feature list - the ColumnTransformer keeps only listed columns</a:t>
+            </a:r>
+          </a:p>
+        </p:txBody>
+      </p:sp>
+      <p:pic>
+        <p:nvPicPr>
+          <p:cNvPr id="8" name="Picture 7" descr="s2_pipeline_frankie.png"/>
+          <p:cNvPicPr>
+            <a:picLocks noChangeAspect="1"/>
+          </p:cNvPicPr>
+          <p:nvPr/>
+        </p:nvPicPr>
+        <p:blipFill>
+          <a:blip r:embed="rId2"/>
+          <a:stretch>
+            <a:fillRect/>
+          </a:stretch>
+        </p:blipFill>
+        <p:spPr>
+          <a:xfrm>
+            <a:off x="5149927" y="1874519"/>
+            <a:ext cx="6433666" cy="4114800"/>
+          </a:xfrm>
+          <a:prstGeom prst="rect">
+            <a:avLst/>
+          </a:prstGeom>
+        </p:spPr>
+      </p:pic>
+      <p:sp>
+        <p:nvSpPr>
+          <p:cNvPr id="9" name="TextBox 8"/>
           <p:cNvSpPr txBox="1"/>
           <p:nvPr/>
         </p:nvSpPr>
         <p:spPr>
           <a:xfrm>
-            <a:off x="1371600" y="4434840"/>
-            <a:ext cx="9418320" cy="731520"/>
+            <a:off x="5120640" y="6062471"/>
+            <a:ext cx="6492240" cy="365760"/>
           </a:xfrm>
           <a:prstGeom prst="rect">
             <a:avLst/>
@@ -5741,53 +5951,13 @@
               <a:buNone/>
             </a:pPr>
             <a:r>
-              <a:rPr sz="1800" b="0">
-                <a:solidFill>
-                  <a:srgbClr val="0A2540"/>
-                </a:solidFill>
-                <a:latin typeface="Arial"/>
-              </a:rPr>
-              <a:t>Test accuracy on the 179 held-out passengers - train accuracy 0.829, so no memorization gap</a:t>
-            </a:r>
-          </a:p>
-        </p:txBody>
-      </p:sp>
-      <p:sp>
-        <p:nvSpPr>
-          <p:cNvPr id="9" name="TextBox 8"/>
-          <p:cNvSpPr txBox="1"/>
-          <p:nvPr/>
-        </p:nvSpPr>
-        <p:spPr>
-          <a:xfrm>
-            <a:off x="1371600" y="5257800"/>
-            <a:ext cx="9418320" cy="640080"/>
-          </a:xfrm>
-          <a:prstGeom prst="rect">
-            <a:avLst/>
-          </a:prstGeom>
-          <a:noFill/>
-        </p:spPr>
-        <p:txBody>
-          <a:bodyPr wrap="square">
-            <a:spAutoFit/>
-          </a:bodyPr>
-          <a:lstStyle/>
-          <a:p>
-            <a:pPr algn="ctr">
-              <a:spcAft>
-                <a:spcPts val="600"/>
-              </a:spcAft>
-              <a:buNone/>
-            </a:pPr>
-            <a:r>
-              <a:rPr sz="1250" b="0">
+              <a:rPr sz="1100" b="0">
                 <a:solidFill>
                   <a:srgbClr val="5B6774"/>
                 </a:solidFill>
                 <a:latin typeface="Arial"/>
               </a:rPr>
-              <a:t>Input: the 712 x 18 prepared matrix. Just a smoke test - choosing the best model is next session's whole job. Module 2, notebook 1.</a:t>
+              <a:t>PassengerId 166, raw fields verbatim from the dataset. The canonical prep, reused verbatim by Sessions 3 and 4. Module 2, notebook 1.</a:t>
             </a:r>
           </a:p>
         </p:txBody>
@@ -6032,7 +6202,7 @@
                 </a:solidFill>
                 <a:latin typeface="Arial"/>
               </a:rPr>
-              <a:t>Fit on train only: imputers, encoders, and scalers learn from the 712 training rows</a:t>
+              <a:t>Fit on train only - the FIT band of the bar: imputers, encoders, and scalers learn from the 712 training rows</a:t>
             </a:r>
           </a:p>
           <a:p>
@@ -6072,7 +6242,47 @@
                 </a:solidFill>
                 <a:latin typeface="Arial"/>
               </a:rPr>
-              <a:t>Good features often improve a model more than a fancier algorithm does</a:t>
+              <a:t>Missingness has species - MCAR, MAR, MNAR - and the data can't tell you which</a:t>
+            </a:r>
+          </a:p>
+          <a:p>
+            <a:pPr algn="l" indent="-228600" marL="228600">
+              <a:spcAft>
+                <a:spcPts val="1000"/>
+              </a:spcAft>
+              <a:buClr>
+                <a:srgbClr val="1E5EF3"/>
+              </a:buClr>
+              <a:buChar char="—"/>
+            </a:pPr>
+            <a:r>
+              <a:rPr sz="1600" b="0">
+                <a:solidFill>
+                  <a:srgbClr val="B9D0FA"/>
+                </a:solidFill>
+                <a:latin typeface="Arial"/>
+              </a:rPr>
+              <a:t>Features change the geometry: good columns beat fancier algorithms (Ng's area, MIT's XOR)</a:t>
+            </a:r>
+          </a:p>
+          <a:p>
+            <a:pPr algn="l" indent="-228600" marL="228600">
+              <a:spcAft>
+                <a:spcPts val="1000"/>
+              </a:spcAft>
+              <a:buClr>
+                <a:srgbClr val="1E5EF3"/>
+              </a:buClr>
+              <a:buChar char="—"/>
+            </a:pPr>
+            <a:r>
+              <a:rPr sz="1600" b="0">
+                <a:solidFill>
+                  <a:srgbClr val="B9D0FA"/>
+                </a:solidFill>
+                <a:latin typeface="Arial"/>
+              </a:rPr>
+              <a:t>Proof it works: a plain Logistic Regression scores 0.838 on the 179 unseen passengers - train 0.829, no memorization gap; choosing the best model is Session 3's whole job</a:t>
             </a:r>
           </a:p>
           <a:p>
@@ -6398,7 +6608,7 @@
                 </a:solidFill>
                 <a:latin typeface="Arial"/>
               </a:rPr>
-              <a:t>Last session we split first - today we build everything else on that rule</a:t>
+              <a:t>One bar rules the module: FIT on train, CHOOSE by validation, REPORT on test - once</a:t>
             </a:r>
           </a:p>
         </p:txBody>
@@ -6456,7 +6666,7 @@
         <p:spPr>
           <a:xfrm>
             <a:off x="548640" y="1874519"/>
-            <a:ext cx="11091672" cy="4206240"/>
+            <a:ext cx="4297680" cy="4206240"/>
           </a:xfrm>
           <a:prstGeom prst="rect">
             <a:avLst/>
@@ -6479,33 +6689,13 @@
               <a:buChar char="—"/>
             </a:pPr>
             <a:r>
-              <a:rPr sz="1600" b="0">
+              <a:rPr sz="1450" b="0">
                 <a:solidFill>
                   <a:srgbClr val="202B38"/>
                 </a:solidFill>
                 <a:latin typeface="Arial"/>
               </a:rPr>
-              <a:t>Where we left off: 891 names on the manifest - Owen, Florence, Frankie and 888 more - split 80/20 into 712 train / 179 test</a:t>
-            </a:r>
-          </a:p>
-          <a:p>
-            <a:pPr algn="l" lvl="1" indent="-228600" marL="514350">
-              <a:spcAft>
-                <a:spcPts val="600"/>
-              </a:spcAft>
-              <a:buClr>
-                <a:srgbClr val="1E5EF3"/>
-              </a:buClr>
-              <a:buChar char="·"/>
-            </a:pPr>
-            <a:r>
-              <a:rPr sz="1350" b="0">
-                <a:solidFill>
-                  <a:srgbClr val="5B6774"/>
-                </a:solidFill>
-                <a:latin typeface="Arial"/>
-              </a:rPr>
-              <a:t>Stratified with random_state=42: both halves keep roughly 38% survivors (0.383 / 0.385)</a:t>
+              <a:t>Where we left off: 891 manifest rows, split 80/20 into 712 train / 179 test - stratified, seed 42</a:t>
             </a:r>
           </a:p>
           <a:p>
@@ -6519,13 +6709,13 @@
               <a:buChar char="—"/>
             </a:pPr>
             <a:r>
-              <a:rPr sz="1600" b="0">
+              <a:rPr sz="1450" b="0">
                 <a:solidFill>
                   <a:srgbClr val="202B38"/>
                 </a:solidFill>
                 <a:latin typeface="Arial"/>
               </a:rPr>
-              <a:t>Golden rule: the model must never see the test data during preparation</a:t>
+              <a:t>Golden rule restated: the model never sees test data during preparation - anything learned FROM data (an imputation value, a scaler) is part of the model</a:t>
             </a:r>
           </a:p>
           <a:p>
@@ -6539,33 +6729,13 @@
               <a:buChar char="—"/>
             </a:pPr>
             <a:r>
-              <a:rPr sz="1600" b="0">
+              <a:rPr sz="1450" b="0">
                 <a:solidFill>
                   <a:srgbClr val="202B38"/>
                 </a:solidFill>
                 <a:latin typeface="Arial"/>
               </a:rPr>
-              <a:t>Data leakage = information from the test set sneaking into training</a:t>
-            </a:r>
-          </a:p>
-          <a:p>
-            <a:pPr algn="l" lvl="1" indent="-228600" marL="514350">
-              <a:spcAft>
-                <a:spcPts val="600"/>
-              </a:spcAft>
-              <a:buClr>
-                <a:srgbClr val="1E5EF3"/>
-              </a:buClr>
-              <a:buChar char="·"/>
-            </a:pPr>
-            <a:r>
-              <a:rPr sz="1350" b="0">
-                <a:solidFill>
-                  <a:srgbClr val="5B6774"/>
-                </a:solidFill>
-                <a:latin typeface="Arial"/>
-              </a:rPr>
-              <a:t>The test set is the final exam: seeing the questions while studying inflates the score and predicts nothing</a:t>
+              <a:t>The bar: FIT on the training band; CHOOSE models and settings in a validation band - Session 3 builds it with cross-validation; REPORT on the test band, opened once</a:t>
             </a:r>
           </a:p>
           <a:p>
@@ -6579,87 +6749,51 @@
               <a:buChar char="—"/>
             </a:pPr>
             <a:r>
-              <a:rPr sz="1600" b="0">
+              <a:rPr sz="1450" b="0">
                 <a:solidFill>
                   <a:srgbClr val="202B38"/>
                 </a:solidFill>
                 <a:latin typeface="Arial"/>
               </a:rPr>
-              <a:t>Leakage bites professionals too: the KDD Cup 2008 breast-cancer challenge</a:t>
-            </a:r>
-          </a:p>
-          <a:p>
-            <a:pPr algn="l" lvl="1" indent="-228600" marL="514350">
-              <a:spcAft>
-                <a:spcPts val="600"/>
-              </a:spcAft>
-              <a:buClr>
-                <a:srgbClr val="1E5EF3"/>
-              </a:buClr>
-              <a:buChar char="·"/>
-            </a:pPr>
-            <a:r>
-              <a:rPr sz="1350" b="0">
-                <a:solidFill>
-                  <a:srgbClr val="5B6774"/>
-                </a:solidFill>
-                <a:latin typeface="Arial"/>
-              </a:rPr>
-              <a:t>Patient ID 'predicted' cancer - IDs traced to cancer-heavy hospitals (Kaufman, Rosset and Perlich, KDD 2011)</a:t>
-            </a:r>
-          </a:p>
-          <a:p>
-            <a:pPr algn="l" indent="-228600" marL="228600">
-              <a:spcAft>
-                <a:spcPts val="800"/>
-              </a:spcAft>
-              <a:buClr>
-                <a:srgbClr val="1E5EF3"/>
-              </a:buClr>
-              <a:buChar char="—"/>
-            </a:pPr>
-            <a:r>
-              <a:rPr sz="1600" b="0">
-                <a:solidFill>
-                  <a:srgbClr val="202B38"/>
-                </a:solidFill>
-                <a:latin typeface="Arial"/>
-              </a:rPr>
-              <a:t>Today's route: gaps to fill, text to numbers, scales to align, new features to invent</a:t>
-            </a:r>
-          </a:p>
-          <a:p>
-            <a:pPr algn="l" lvl="1" indent="-228600" marL="514350">
-              <a:spcAft>
-                <a:spcPts val="600"/>
-              </a:spcAft>
-              <a:buClr>
-                <a:srgbClr val="1E5EF3"/>
-              </a:buClr>
-              <a:buChar char="·"/>
-            </a:pPr>
-            <a:r>
-              <a:rPr sz="1350" b="0">
-                <a:solidFill>
-                  <a:srgbClr val="5B6774"/>
-                </a:solidFill>
-                <a:latin typeface="Arial"/>
-              </a:rPr>
-              <a:t>Then one Pipeline that does all of it in the right order, every time</a:t>
-            </a:r>
-          </a:p>
-        </p:txBody>
-      </p:sp>
-      <p:sp>
-        <p:nvSpPr>
-          <p:cNvPr id="8" name="TextBox 7"/>
+              <a:t>Everything today happens inside the FIT band only</a:t>
+            </a:r>
+          </a:p>
+        </p:txBody>
+      </p:sp>
+      <p:pic>
+        <p:nvPicPr>
+          <p:cNvPr id="8" name="Picture 7" descr="frame_c_bar_s2.png"/>
+          <p:cNvPicPr>
+            <a:picLocks noChangeAspect="1"/>
+          </p:cNvPicPr>
+          <p:nvPr/>
+        </p:nvPicPr>
+        <p:blipFill>
+          <a:blip r:embed="rId2"/>
+          <a:stretch>
+            <a:fillRect/>
+          </a:stretch>
+        </p:blipFill>
+        <p:spPr>
+          <a:xfrm>
+            <a:off x="5120640" y="1874519"/>
+            <a:ext cx="6492240" cy="1668970"/>
+          </a:xfrm>
+          <a:prstGeom prst="rect">
+            <a:avLst/>
+          </a:prstGeom>
+        </p:spPr>
+      </p:pic>
+      <p:sp>
+        <p:nvSpPr>
+          <p:cNvPr id="9" name="TextBox 8"/>
           <p:cNvSpPr txBox="1"/>
           <p:nvPr/>
         </p:nvSpPr>
         <p:spPr>
           <a:xfrm>
-            <a:off x="548640" y="5989320"/>
-            <a:ext cx="11091672" cy="502920"/>
+            <a:off x="5120640" y="6062471"/>
+            <a:ext cx="6492240" cy="365760"/>
           </a:xfrm>
           <a:prstGeom prst="rect">
             <a:avLst/>
@@ -6672,27 +6806,27 @@
           </a:bodyPr>
           <a:lstStyle/>
           <a:p>
-            <a:pPr algn="l">
+            <a:pPr algn="ctr">
               <a:spcAft>
                 <a:spcPts val="600"/>
               </a:spcAft>
               <a:buNone/>
             </a:pPr>
             <a:r>
-              <a:rPr sz="1200" b="0">
-                <a:solidFill>
-                  <a:srgbClr val="1E5EF3"/>
-                </a:solidFill>
-                <a:latin typeface="Arial"/>
-              </a:rPr>
-              <a:t>Split first, prepare after. Splits and counts: Module 2, notebook 1.</a:t>
-            </a:r>
-          </a:p>
-        </p:txBody>
-      </p:sp>
-      <p:sp>
-        <p:nvSpPr>
-          <p:cNvPr id="9" name="TextBox 8"/>
+              <a:rPr sz="1100" b="0">
+                <a:solidFill>
+                  <a:srgbClr val="5B6774"/>
+                </a:solidFill>
+                <a:latin typeface="Arial"/>
+              </a:rPr>
+              <a:t>The bar every session returns to. Harvard CS109A / ISLR ch. 5 (model selection vs model assessment).</a:t>
+            </a:r>
+          </a:p>
+        </p:txBody>
+      </p:sp>
+      <p:sp>
+        <p:nvSpPr>
+          <p:cNvPr id="10" name="TextBox 9"/>
           <p:cNvSpPr txBox="1"/>
           <p:nvPr/>
         </p:nvSpPr>
@@ -6732,7 +6866,7 @@
       </p:sp>
       <p:sp>
         <p:nvSpPr>
-          <p:cNvPr id="10" name="TextBox 9"/>
+          <p:cNvPr id="11" name="TextBox 10"/>
           <p:cNvSpPr txBox="1"/>
           <p:nvPr/>
         </p:nvSpPr>
@@ -7406,7 +7540,7 @@
                 </a:solidFill>
                 <a:latin typeface="Arial"/>
               </a:rPr>
-              <a:t>Why so picky? A model sees each passenger as a point in space, one axis per column - words and gaps have no place on an axis. Impute = fill a gap with a learned substitute. Harvard's CS109A gives missing data its own lecture (Fall 2021). Counts: Module 2, notebook 1.</a:t>
+              <a:t>Why so picky? A model sees each passenger as a point in space, one axis per column - words and gaps have no place on an axis. Impute = fill a gap with a learned substitute. Counts: Module 2, notebook 1.</a:t>
             </a:r>
           </a:p>
         </p:txBody>
@@ -7419,8 +7553,8 @@
         </p:nvSpPr>
         <p:spPr>
           <a:xfrm>
-            <a:off x="548640" y="6473952"/>
-            <a:ext cx="7315200" cy="292608"/>
+            <a:off x="548640" y="5440680"/>
+            <a:ext cx="11091672" cy="502920"/>
           </a:xfrm>
           <a:prstGeom prst="rect">
             <a:avLst/>
@@ -7440,6 +7574,46 @@
               <a:buNone/>
             </a:pPr>
             <a:r>
+              <a:rPr sz="1200" b="0">
+                <a:solidFill>
+                  <a:srgbClr val="0A2540"/>
+                </a:solidFill>
+                <a:latin typeface="Arial"/>
+              </a:rPr>
+              <a:t>MIT gives feature representation its own chapter: how you represent the data usually matters more than which algorithm you run - a simple model on good features routinely beats a fancy model on raw ones. MIT 6.390, ch. 5 "Feature representation".</a:t>
+            </a:r>
+          </a:p>
+        </p:txBody>
+      </p:sp>
+      <p:sp>
+        <p:nvSpPr>
+          <p:cNvPr id="10" name="TextBox 9"/>
+          <p:cNvSpPr txBox="1"/>
+          <p:nvPr/>
+        </p:nvSpPr>
+        <p:spPr>
+          <a:xfrm>
+            <a:off x="548640" y="6473952"/>
+            <a:ext cx="7315200" cy="292608"/>
+          </a:xfrm>
+          <a:prstGeom prst="rect">
+            <a:avLst/>
+          </a:prstGeom>
+          <a:noFill/>
+        </p:spPr>
+        <p:txBody>
+          <a:bodyPr wrap="square">
+            <a:spAutoFit/>
+          </a:bodyPr>
+          <a:lstStyle/>
+          <a:p>
+            <a:pPr algn="l">
+              <a:spcAft>
+                <a:spcPts val="600"/>
+              </a:spcAft>
+              <a:buNone/>
+            </a:pPr>
+            <a:r>
               <a:rPr sz="900" b="0">
                 <a:solidFill>
                   <a:srgbClr val="5B6774"/>
@@ -7453,7 +7627,7 @@
       </p:sp>
       <p:sp>
         <p:nvSpPr>
-          <p:cNvPr id="10" name="TextBox 9"/>
+          <p:cNvPr id="11" name="TextBox 10"/>
           <p:cNvSpPr txBox="1"/>
           <p:nvPr/>
         </p:nvSpPr>
@@ -8129,7 +8303,7 @@
                 </a:solidFill>
                 <a:latin typeface="Arial"/>
               </a:rPr>
-              <a:t>ENCODING CATEGORICAL FEATURES</a:t>
+              <a:t>MISSING VALUES: THE THEORY</a:t>
             </a:r>
           </a:p>
         </p:txBody>
@@ -8169,7 +8343,464 @@
                 </a:solidFill>
                 <a:latin typeface="Arial"/>
               </a:rPr>
-              <a:t>One-hot gives each category its own 0/1 column - exactly one is hot per row</a:t>
+              <a:t>Missing values come in three species - and the data cannot tell you which</a:t>
+            </a:r>
+          </a:p>
+        </p:txBody>
+      </p:sp>
+      <p:sp>
+        <p:nvSpPr>
+          <p:cNvPr id="6" name="Rectangle 5"/>
+          <p:cNvSpPr/>
+          <p:nvPr/>
+        </p:nvSpPr>
+        <p:spPr>
+          <a:xfrm>
+            <a:off x="548640" y="1664208"/>
+            <a:ext cx="11091672" cy="12801"/>
+          </a:xfrm>
+          <a:prstGeom prst="rect">
+            <a:avLst/>
+          </a:prstGeom>
+          <a:solidFill>
+            <a:srgbClr val="B9D0FA"/>
+          </a:solidFill>
+          <a:ln>
+            <a:noFill/>
+          </a:ln>
+          <a:effectLst/>
+        </p:spPr>
+        <p:style>
+          <a:lnRef idx="1">
+            <a:schemeClr val="accent1"/>
+          </a:lnRef>
+          <a:fillRef idx="3">
+            <a:schemeClr val="accent1"/>
+          </a:fillRef>
+          <a:effectRef idx="2">
+            <a:schemeClr val="accent1"/>
+          </a:effectRef>
+          <a:fontRef idx="minor">
+            <a:schemeClr val="lt1"/>
+          </a:fontRef>
+        </p:style>
+        <p:txBody>
+          <a:bodyPr rtlCol="0" anchor="ctr"/>
+          <a:lstStyle/>
+          <a:p>
+            <a:pPr algn="ctr"/>
+          </a:p>
+        </p:txBody>
+      </p:sp>
+      <p:sp>
+        <p:nvSpPr>
+          <p:cNvPr id="7" name="TextBox 6"/>
+          <p:cNvSpPr txBox="1"/>
+          <p:nvPr/>
+        </p:nvSpPr>
+        <p:spPr>
+          <a:xfrm>
+            <a:off x="548640" y="1874519"/>
+            <a:ext cx="4297680" cy="4206240"/>
+          </a:xfrm>
+          <a:prstGeom prst="rect">
+            <a:avLst/>
+          </a:prstGeom>
+          <a:noFill/>
+        </p:spPr>
+        <p:txBody>
+          <a:bodyPr wrap="square">
+            <a:spAutoFit/>
+          </a:bodyPr>
+          <a:lstStyle/>
+          <a:p>
+            <a:pPr algn="l" indent="-228600" marL="228600">
+              <a:spcAft>
+                <a:spcPts val="800"/>
+              </a:spcAft>
+              <a:buClr>
+                <a:srgbClr val="1E5EF3"/>
+              </a:buClr>
+              <a:buChar char="—"/>
+            </a:pPr>
+            <a:r>
+              <a:rPr sz="1450" b="0">
+                <a:solidFill>
+                  <a:srgbClr val="202B38"/>
+                </a:solidFill>
+                <a:latin typeface="Arial"/>
+              </a:rPr>
+              <a:t>Three species: MCAR (random holes), MAR (holes explained by other columns), MNAR (holes caused by the hidden value itself)</a:t>
+            </a:r>
+          </a:p>
+          <a:p>
+            <a:pPr algn="l" indent="-228600" marL="228600">
+              <a:spcAft>
+                <a:spcPts val="800"/>
+              </a:spcAft>
+              <a:buClr>
+                <a:srgbClr val="1E5EF3"/>
+              </a:buClr>
+              <a:buChar char="—"/>
+            </a:pPr>
+            <a:r>
+              <a:rPr sz="1450" b="0">
+                <a:solidFill>
+                  <a:srgbClr val="202B38"/>
+                </a:solidFill>
+                <a:latin typeface="Arial"/>
+              </a:rPr>
+              <a:t>The punchline: the deciding variables are unobserved by definition - the data alone can never tell you the type; you must reason about the world</a:t>
+            </a:r>
+          </a:p>
+          <a:p>
+            <a:pPr algn="l" indent="-228600" marL="228600">
+              <a:spcAft>
+                <a:spcPts val="800"/>
+              </a:spcAft>
+              <a:buClr>
+                <a:srgbClr val="1E5EF3"/>
+              </a:buClr>
+              <a:buChar char="—"/>
+            </a:pPr>
+            <a:r>
+              <a:rPr sz="1450" b="0">
+                <a:solidFill>
+                  <a:srgbClr val="202B38"/>
+                </a:solidFill>
+                <a:latin typeface="Arial"/>
+              </a:rPr>
+              <a:t>Discuss: which species could the Titanic's 177 missing ages be? Argue it - the table cannot</a:t>
+            </a:r>
+          </a:p>
+        </p:txBody>
+      </p:sp>
+      <p:pic>
+        <p:nvPicPr>
+          <p:cNvPr id="8" name="Picture 7" descr="fig_missingness_cards.png"/>
+          <p:cNvPicPr>
+            <a:picLocks noChangeAspect="1"/>
+          </p:cNvPicPr>
+          <p:nvPr/>
+        </p:nvPicPr>
+        <p:blipFill>
+          <a:blip r:embed="rId2"/>
+          <a:stretch>
+            <a:fillRect/>
+          </a:stretch>
+        </p:blipFill>
+        <p:spPr>
+          <a:xfrm>
+            <a:off x="5120640" y="1874519"/>
+            <a:ext cx="6492240" cy="4063887"/>
+          </a:xfrm>
+          <a:prstGeom prst="rect">
+            <a:avLst/>
+          </a:prstGeom>
+        </p:spPr>
+      </p:pic>
+      <p:sp>
+        <p:nvSpPr>
+          <p:cNvPr id="9" name="TextBox 8"/>
+          <p:cNvSpPr txBox="1"/>
+          <p:nvPr/>
+        </p:nvSpPr>
+        <p:spPr>
+          <a:xfrm>
+            <a:off x="5120640" y="6062471"/>
+            <a:ext cx="6492240" cy="365760"/>
+          </a:xfrm>
+          <a:prstGeom prst="rect">
+            <a:avLst/>
+          </a:prstGeom>
+          <a:noFill/>
+        </p:spPr>
+        <p:txBody>
+          <a:bodyPr wrap="square">
+            <a:spAutoFit/>
+          </a:bodyPr>
+          <a:lstStyle/>
+          <a:p>
+            <a:pPr algn="ctr">
+              <a:spcAft>
+                <a:spcPts val="600"/>
+              </a:spcAft>
+              <a:buNone/>
+            </a:pPr>
+            <a:r>
+              <a:rPr sz="1100" b="0">
+                <a:solidFill>
+                  <a:srgbClr val="5B6774"/>
+                </a:solidFill>
+                <a:latin typeface="Arial"/>
+              </a:rPr>
+              <a:t>Each Titanic story is plausible, not asserted. Harvard CS109A, Missing Data lecture (2020, L19).</a:t>
+            </a:r>
+          </a:p>
+        </p:txBody>
+      </p:sp>
+      <p:sp>
+        <p:nvSpPr>
+          <p:cNvPr id="10" name="TextBox 9"/>
+          <p:cNvSpPr txBox="1"/>
+          <p:nvPr/>
+        </p:nvSpPr>
+        <p:spPr>
+          <a:xfrm>
+            <a:off x="548640" y="6473952"/>
+            <a:ext cx="7315200" cy="292608"/>
+          </a:xfrm>
+          <a:prstGeom prst="rect">
+            <a:avLst/>
+          </a:prstGeom>
+          <a:noFill/>
+        </p:spPr>
+        <p:txBody>
+          <a:bodyPr wrap="square">
+            <a:spAutoFit/>
+          </a:bodyPr>
+          <a:lstStyle/>
+          <a:p>
+            <a:pPr algn="l">
+              <a:spcAft>
+                <a:spcPts val="600"/>
+              </a:spcAft>
+              <a:buNone/>
+            </a:pPr>
+            <a:r>
+              <a:rPr sz="900" b="0">
+                <a:solidFill>
+                  <a:srgbClr val="5B6774"/>
+                </a:solidFill>
+                <a:latin typeface="Arial"/>
+              </a:rPr>
+              <a:t>M2 Session 2 - Data Prep and Feature Engineering</a:t>
+            </a:r>
+          </a:p>
+        </p:txBody>
+      </p:sp>
+      <p:sp>
+        <p:nvSpPr>
+          <p:cNvPr id="11" name="TextBox 10"/>
+          <p:cNvSpPr txBox="1"/>
+          <p:nvPr/>
+        </p:nvSpPr>
+        <p:spPr>
+          <a:xfrm>
+            <a:off x="11292840" y="6473952"/>
+            <a:ext cx="548640" cy="292608"/>
+          </a:xfrm>
+          <a:prstGeom prst="rect">
+            <a:avLst/>
+          </a:prstGeom>
+          <a:noFill/>
+        </p:spPr>
+        <p:txBody>
+          <a:bodyPr wrap="square">
+            <a:spAutoFit/>
+          </a:bodyPr>
+          <a:lstStyle/>
+          <a:p>
+            <a:pPr algn="r">
+              <a:spcAft>
+                <a:spcPts val="600"/>
+              </a:spcAft>
+              <a:buNone/>
+            </a:pPr>
+            <a:r>
+              <a:rPr sz="900" b="0">
+                <a:solidFill>
+                  <a:srgbClr val="5B6774"/>
+                </a:solidFill>
+                <a:latin typeface="Arial"/>
+              </a:rPr>
+              <a:t>5</a:t>
+            </a:r>
+          </a:p>
+        </p:txBody>
+      </p:sp>
+    </p:spTree>
+  </p:cSld>
+  <p:clrMapOvr>
+    <a:masterClrMapping/>
+  </p:clrMapOvr>
+</p:sld>
+</file>
+
+<file path=ppt/slides/slide6.xml><?xml version="1.0" encoding="utf-8"?>
+<p:sld xmlns:a="http://schemas.openxmlformats.org/drawingml/2006/main" xmlns:p="http://schemas.openxmlformats.org/presentationml/2006/main" xmlns:r="http://schemas.openxmlformats.org/officeDocument/2006/relationships">
+  <p:cSld>
+    <p:spTree>
+      <p:nvGrpSpPr>
+        <p:cNvPr id="1" name=""/>
+        <p:cNvGrpSpPr/>
+        <p:nvPr/>
+      </p:nvGrpSpPr>
+      <p:grpSpPr/>
+      <p:sp>
+        <p:nvSpPr>
+          <p:cNvPr id="2" name="Rectangle 1"/>
+          <p:cNvSpPr/>
+          <p:nvPr/>
+        </p:nvSpPr>
+        <p:spPr>
+          <a:xfrm>
+            <a:off x="0" y="0"/>
+            <a:ext cx="12191695" cy="6858000"/>
+          </a:xfrm>
+          <a:prstGeom prst="rect">
+            <a:avLst/>
+          </a:prstGeom>
+          <a:solidFill>
+            <a:srgbClr val="FFFFFF"/>
+          </a:solidFill>
+          <a:ln>
+            <a:noFill/>
+          </a:ln>
+          <a:effectLst/>
+        </p:spPr>
+        <p:style>
+          <a:lnRef idx="1">
+            <a:schemeClr val="accent1"/>
+          </a:lnRef>
+          <a:fillRef idx="3">
+            <a:schemeClr val="accent1"/>
+          </a:fillRef>
+          <a:effectRef idx="2">
+            <a:schemeClr val="accent1"/>
+          </a:effectRef>
+          <a:fontRef idx="minor">
+            <a:schemeClr val="lt1"/>
+          </a:fontRef>
+        </p:style>
+        <p:txBody>
+          <a:bodyPr rtlCol="0" anchor="ctr"/>
+          <a:lstStyle/>
+          <a:p>
+            <a:pPr algn="ctr"/>
+          </a:p>
+        </p:txBody>
+      </p:sp>
+      <p:sp>
+        <p:nvSpPr>
+          <p:cNvPr id="3" name="Rectangle 2"/>
+          <p:cNvSpPr/>
+          <p:nvPr/>
+        </p:nvSpPr>
+        <p:spPr>
+          <a:xfrm>
+            <a:off x="548640" y="475488"/>
+            <a:ext cx="457200" cy="54864"/>
+          </a:xfrm>
+          <a:prstGeom prst="rect">
+            <a:avLst/>
+          </a:prstGeom>
+          <a:solidFill>
+            <a:srgbClr val="1E5EF3"/>
+          </a:solidFill>
+          <a:ln>
+            <a:noFill/>
+          </a:ln>
+          <a:effectLst/>
+        </p:spPr>
+        <p:style>
+          <a:lnRef idx="1">
+            <a:schemeClr val="accent1"/>
+          </a:lnRef>
+          <a:fillRef idx="3">
+            <a:schemeClr val="accent1"/>
+          </a:fillRef>
+          <a:effectRef idx="2">
+            <a:schemeClr val="accent1"/>
+          </a:effectRef>
+          <a:fontRef idx="minor">
+            <a:schemeClr val="lt1"/>
+          </a:fontRef>
+        </p:style>
+        <p:txBody>
+          <a:bodyPr rtlCol="0" anchor="ctr"/>
+          <a:lstStyle/>
+          <a:p>
+            <a:pPr algn="ctr"/>
+          </a:p>
+        </p:txBody>
+      </p:sp>
+      <p:sp>
+        <p:nvSpPr>
+          <p:cNvPr id="4" name="TextBox 3"/>
+          <p:cNvSpPr txBox="1"/>
+          <p:nvPr/>
+        </p:nvSpPr>
+        <p:spPr>
+          <a:xfrm>
+            <a:off x="548640" y="603504"/>
+            <a:ext cx="11091672" cy="274320"/>
+          </a:xfrm>
+          <a:prstGeom prst="rect">
+            <a:avLst/>
+          </a:prstGeom>
+          <a:noFill/>
+        </p:spPr>
+        <p:txBody>
+          <a:bodyPr wrap="square">
+            <a:spAutoFit/>
+          </a:bodyPr>
+          <a:lstStyle/>
+          <a:p>
+            <a:pPr algn="l">
+              <a:spcAft>
+                <a:spcPts val="600"/>
+              </a:spcAft>
+              <a:buNone/>
+            </a:pPr>
+            <a:r>
+              <a:rPr sz="1100" b="1">
+                <a:solidFill>
+                  <a:srgbClr val="1E5EF3"/>
+                </a:solidFill>
+                <a:latin typeface="Arial"/>
+              </a:rPr>
+              <a:t>ENCODING CATEGORICAL FEATURES</a:t>
+            </a:r>
+          </a:p>
+        </p:txBody>
+      </p:sp>
+      <p:sp>
+        <p:nvSpPr>
+          <p:cNvPr id="5" name="TextBox 4"/>
+          <p:cNvSpPr txBox="1"/>
+          <p:nvPr/>
+        </p:nvSpPr>
+        <p:spPr>
+          <a:xfrm>
+            <a:off x="548640" y="868680"/>
+            <a:ext cx="11091672" cy="777240"/>
+          </a:xfrm>
+          <a:prstGeom prst="rect">
+            <a:avLst/>
+          </a:prstGeom>
+          <a:noFill/>
+        </p:spPr>
+        <p:txBody>
+          <a:bodyPr wrap="square">
+            <a:spAutoFit/>
+          </a:bodyPr>
+          <a:lstStyle/>
+          <a:p>
+            <a:pPr algn="l">
+              <a:spcAft>
+                <a:spcPts val="0"/>
+              </a:spcAft>
+              <a:buNone/>
+            </a:pPr>
+            <a:r>
+              <a:rPr sz="2600" b="1">
+                <a:solidFill>
+                  <a:srgbClr val="0A2540"/>
+                </a:solidFill>
+                <a:latin typeface="Arial"/>
+              </a:rPr>
+              <a:t>One-hot gives each category its own 0/1 column - and the training set fixes the columns once</a:t>
             </a:r>
           </a:p>
         </p:txBody>
@@ -8992,7 +9623,7 @@
                 </a:solidFill>
                 <a:latin typeface="Arial"/>
               </a:rPr>
-              <a:t>Encoding = translating words into coordinates the model can plot. Why not C=1, Q=2, S=3? That would tell the model S is "three times" C - and models will try to use it. A fake order lies about distance. Module 2, notebook 1.</a:t>
+              <a:t>Why not C=1, Q=2, S=3? That would tell the model S is "three times" C - and models will try to use it. A fake order lies about distance. Module 2, notebook 1.</a:t>
             </a:r>
           </a:p>
         </p:txBody>
@@ -9005,402 +9636,8 @@
         </p:nvSpPr>
         <p:spPr>
           <a:xfrm>
-            <a:off x="548640" y="6473952"/>
-            <a:ext cx="7315200" cy="292608"/>
-          </a:xfrm>
-          <a:prstGeom prst="rect">
-            <a:avLst/>
-          </a:prstGeom>
-          <a:noFill/>
-        </p:spPr>
-        <p:txBody>
-          <a:bodyPr wrap="square">
-            <a:spAutoFit/>
-          </a:bodyPr>
-          <a:lstStyle/>
-          <a:p>
-            <a:pPr algn="l">
-              <a:spcAft>
-                <a:spcPts val="600"/>
-              </a:spcAft>
-              <a:buNone/>
-            </a:pPr>
-            <a:r>
-              <a:rPr sz="900" b="0">
-                <a:solidFill>
-                  <a:srgbClr val="5B6774"/>
-                </a:solidFill>
-                <a:latin typeface="Arial"/>
-              </a:rPr>
-              <a:t>M2 Session 2 - Data Prep and Feature Engineering</a:t>
-            </a:r>
-          </a:p>
-        </p:txBody>
-      </p:sp>
-      <p:sp>
-        <p:nvSpPr>
-          <p:cNvPr id="10" name="TextBox 9"/>
-          <p:cNvSpPr txBox="1"/>
-          <p:nvPr/>
-        </p:nvSpPr>
-        <p:spPr>
-          <a:xfrm>
-            <a:off x="11292840" y="6473952"/>
-            <a:ext cx="548640" cy="292608"/>
-          </a:xfrm>
-          <a:prstGeom prst="rect">
-            <a:avLst/>
-          </a:prstGeom>
-          <a:noFill/>
-        </p:spPr>
-        <p:txBody>
-          <a:bodyPr wrap="square">
-            <a:spAutoFit/>
-          </a:bodyPr>
-          <a:lstStyle/>
-          <a:p>
-            <a:pPr algn="r">
-              <a:spcAft>
-                <a:spcPts val="600"/>
-              </a:spcAft>
-              <a:buNone/>
-            </a:pPr>
-            <a:r>
-              <a:rPr sz="900" b="0">
-                <a:solidFill>
-                  <a:srgbClr val="5B6774"/>
-                </a:solidFill>
-                <a:latin typeface="Arial"/>
-              </a:rPr>
-              <a:t>5</a:t>
-            </a:r>
-          </a:p>
-        </p:txBody>
-      </p:sp>
-    </p:spTree>
-  </p:cSld>
-  <p:clrMapOvr>
-    <a:masterClrMapping/>
-  </p:clrMapOvr>
-</p:sld>
-</file>
-
-<file path=ppt/slides/slide6.xml><?xml version="1.0" encoding="utf-8"?>
-<p:sld xmlns:a="http://schemas.openxmlformats.org/drawingml/2006/main" xmlns:p="http://schemas.openxmlformats.org/presentationml/2006/main" xmlns:r="http://schemas.openxmlformats.org/officeDocument/2006/relationships">
-  <p:cSld>
-    <p:spTree>
-      <p:nvGrpSpPr>
-        <p:cNvPr id="1" name=""/>
-        <p:cNvGrpSpPr/>
-        <p:nvPr/>
-      </p:nvGrpSpPr>
-      <p:grpSpPr/>
-      <p:sp>
-        <p:nvSpPr>
-          <p:cNvPr id="2" name="Rectangle 1"/>
-          <p:cNvSpPr/>
-          <p:nvPr/>
-        </p:nvSpPr>
-        <p:spPr>
-          <a:xfrm>
-            <a:off x="0" y="0"/>
-            <a:ext cx="12191695" cy="6858000"/>
-          </a:xfrm>
-          <a:prstGeom prst="rect">
-            <a:avLst/>
-          </a:prstGeom>
-          <a:solidFill>
-            <a:srgbClr val="FFFFFF"/>
-          </a:solidFill>
-          <a:ln>
-            <a:noFill/>
-          </a:ln>
-          <a:effectLst/>
-        </p:spPr>
-        <p:style>
-          <a:lnRef idx="1">
-            <a:schemeClr val="accent1"/>
-          </a:lnRef>
-          <a:fillRef idx="3">
-            <a:schemeClr val="accent1"/>
-          </a:fillRef>
-          <a:effectRef idx="2">
-            <a:schemeClr val="accent1"/>
-          </a:effectRef>
-          <a:fontRef idx="minor">
-            <a:schemeClr val="lt1"/>
-          </a:fontRef>
-        </p:style>
-        <p:txBody>
-          <a:bodyPr rtlCol="0" anchor="ctr"/>
-          <a:lstStyle/>
-          <a:p>
-            <a:pPr algn="ctr"/>
-          </a:p>
-        </p:txBody>
-      </p:sp>
-      <p:sp>
-        <p:nvSpPr>
-          <p:cNvPr id="3" name="Rectangle 2"/>
-          <p:cNvSpPr/>
-          <p:nvPr/>
-        </p:nvSpPr>
-        <p:spPr>
-          <a:xfrm>
-            <a:off x="548640" y="475488"/>
-            <a:ext cx="457200" cy="54864"/>
-          </a:xfrm>
-          <a:prstGeom prst="rect">
-            <a:avLst/>
-          </a:prstGeom>
-          <a:solidFill>
-            <a:srgbClr val="1E5EF3"/>
-          </a:solidFill>
-          <a:ln>
-            <a:noFill/>
-          </a:ln>
-          <a:effectLst/>
-        </p:spPr>
-        <p:style>
-          <a:lnRef idx="1">
-            <a:schemeClr val="accent1"/>
-          </a:lnRef>
-          <a:fillRef idx="3">
-            <a:schemeClr val="accent1"/>
-          </a:fillRef>
-          <a:effectRef idx="2">
-            <a:schemeClr val="accent1"/>
-          </a:effectRef>
-          <a:fontRef idx="minor">
-            <a:schemeClr val="lt1"/>
-          </a:fontRef>
-        </p:style>
-        <p:txBody>
-          <a:bodyPr rtlCol="0" anchor="ctr"/>
-          <a:lstStyle/>
-          <a:p>
-            <a:pPr algn="ctr"/>
-          </a:p>
-        </p:txBody>
-      </p:sp>
-      <p:sp>
-        <p:nvSpPr>
-          <p:cNvPr id="4" name="TextBox 3"/>
-          <p:cNvSpPr txBox="1"/>
-          <p:nvPr/>
-        </p:nvSpPr>
-        <p:spPr>
-          <a:xfrm>
-            <a:off x="548640" y="603504"/>
-            <a:ext cx="11091672" cy="274320"/>
-          </a:xfrm>
-          <a:prstGeom prst="rect">
-            <a:avLst/>
-          </a:prstGeom>
-          <a:noFill/>
-        </p:spPr>
-        <p:txBody>
-          <a:bodyPr wrap="square">
-            <a:spAutoFit/>
-          </a:bodyPr>
-          <a:lstStyle/>
-          <a:p>
-            <a:pPr algn="l">
-              <a:spcAft>
-                <a:spcPts val="600"/>
-              </a:spcAft>
-              <a:buNone/>
-            </a:pPr>
-            <a:r>
-              <a:rPr sz="1100" b="1">
-                <a:solidFill>
-                  <a:srgbClr val="1E5EF3"/>
-                </a:solidFill>
-                <a:latin typeface="Arial"/>
-              </a:rPr>
-              <a:t>ENCODING CATEGORICAL FEATURES</a:t>
-            </a:r>
-          </a:p>
-        </p:txBody>
-      </p:sp>
-      <p:sp>
-        <p:nvSpPr>
-          <p:cNvPr id="5" name="TextBox 4"/>
-          <p:cNvSpPr txBox="1"/>
-          <p:nvPr/>
-        </p:nvSpPr>
-        <p:spPr>
-          <a:xfrm>
-            <a:off x="548640" y="868680"/>
-            <a:ext cx="11091672" cy="777240"/>
-          </a:xfrm>
-          <a:prstGeom prst="rect">
-            <a:avLst/>
-          </a:prstGeom>
-          <a:noFill/>
-        </p:spPr>
-        <p:txBody>
-          <a:bodyPr wrap="square">
-            <a:spAutoFit/>
-          </a:bodyPr>
-          <a:lstStyle/>
-          <a:p>
-            <a:pPr algn="l">
-              <a:spcAft>
-                <a:spcPts val="0"/>
-              </a:spcAft>
-              <a:buNone/>
-            </a:pPr>
-            <a:r>
-              <a:rPr sz="2600" b="1">
-                <a:solidFill>
-                  <a:srgbClr val="0A2540"/>
-                </a:solidFill>
-                <a:latin typeface="Arial"/>
-              </a:rPr>
-              <a:t>sklearn encoders remember the training columns - pd.get_dummies does not</a:t>
-            </a:r>
-          </a:p>
-        </p:txBody>
-      </p:sp>
-      <p:sp>
-        <p:nvSpPr>
-          <p:cNvPr id="6" name="Rectangle 5"/>
-          <p:cNvSpPr/>
-          <p:nvPr/>
-        </p:nvSpPr>
-        <p:spPr>
-          <a:xfrm>
-            <a:off x="548640" y="1664208"/>
-            <a:ext cx="11091672" cy="12801"/>
-          </a:xfrm>
-          <a:prstGeom prst="rect">
-            <a:avLst/>
-          </a:prstGeom>
-          <a:solidFill>
-            <a:srgbClr val="B9D0FA"/>
-          </a:solidFill>
-          <a:ln>
-            <a:noFill/>
-          </a:ln>
-          <a:effectLst/>
-        </p:spPr>
-        <p:style>
-          <a:lnRef idx="1">
-            <a:schemeClr val="accent1"/>
-          </a:lnRef>
-          <a:fillRef idx="3">
-            <a:schemeClr val="accent1"/>
-          </a:fillRef>
-          <a:effectRef idx="2">
-            <a:schemeClr val="accent1"/>
-          </a:effectRef>
-          <a:fontRef idx="minor">
-            <a:schemeClr val="lt1"/>
-          </a:fontRef>
-        </p:style>
-        <p:txBody>
-          <a:bodyPr rtlCol="0" anchor="ctr"/>
-          <a:lstStyle/>
-          <a:p>
-            <a:pPr algn="ctr"/>
-          </a:p>
-        </p:txBody>
-      </p:sp>
-      <p:sp>
-        <p:nvSpPr>
-          <p:cNvPr id="7" name="Rectangle 6"/>
-          <p:cNvSpPr/>
-          <p:nvPr/>
-        </p:nvSpPr>
-        <p:spPr>
-          <a:xfrm>
-            <a:off x="548640" y="1874519"/>
-            <a:ext cx="5394960" cy="3977639"/>
-          </a:xfrm>
-          <a:prstGeom prst="rect">
-            <a:avLst/>
-          </a:prstGeom>
-          <a:solidFill>
-            <a:srgbClr val="EEF3FD"/>
-          </a:solidFill>
-          <a:ln>
-            <a:noFill/>
-          </a:ln>
-          <a:effectLst/>
-        </p:spPr>
-        <p:style>
-          <a:lnRef idx="1">
-            <a:schemeClr val="accent1"/>
-          </a:lnRef>
-          <a:fillRef idx="3">
-            <a:schemeClr val="accent1"/>
-          </a:fillRef>
-          <a:effectRef idx="2">
-            <a:schemeClr val="accent1"/>
-          </a:effectRef>
-          <a:fontRef idx="minor">
-            <a:schemeClr val="lt1"/>
-          </a:fontRef>
-        </p:style>
-        <p:txBody>
-          <a:bodyPr rtlCol="0" anchor="ctr"/>
-          <a:lstStyle/>
-          <a:p>
-            <a:pPr algn="ctr"/>
-          </a:p>
-        </p:txBody>
-      </p:sp>
-      <p:sp>
-        <p:nvSpPr>
-          <p:cNvPr id="8" name="TextBox 7"/>
-          <p:cNvSpPr txBox="1"/>
-          <p:nvPr/>
-        </p:nvSpPr>
-        <p:spPr>
-          <a:xfrm>
-            <a:off x="777240" y="2039111"/>
-            <a:ext cx="4937760" cy="365760"/>
-          </a:xfrm>
-          <a:prstGeom prst="rect">
-            <a:avLst/>
-          </a:prstGeom>
-          <a:noFill/>
-        </p:spPr>
-        <p:txBody>
-          <a:bodyPr wrap="square">
-            <a:spAutoFit/>
-          </a:bodyPr>
-          <a:lstStyle/>
-          <a:p>
-            <a:pPr algn="l">
-              <a:spcAft>
-                <a:spcPts val="600"/>
-              </a:spcAft>
-              <a:buNone/>
-            </a:pPr>
-            <a:r>
-              <a:rPr sz="1500" b="1">
-                <a:solidFill>
-                  <a:srgbClr val="0A2540"/>
-                </a:solidFill>
-                <a:latin typeface="Arial"/>
-              </a:rPr>
-              <a:t>pd.get_dummies: columns drift</a:t>
-            </a:r>
-          </a:p>
-        </p:txBody>
-      </p:sp>
-      <p:sp>
-        <p:nvSpPr>
-          <p:cNvPr id="9" name="TextBox 8"/>
-          <p:cNvSpPr txBox="1"/>
-          <p:nvPr/>
-        </p:nvSpPr>
-        <p:spPr>
-          <a:xfrm>
-            <a:off x="777240" y="2441447"/>
-            <a:ext cx="4937760" cy="3246119"/>
+            <a:off x="548640" y="4279392"/>
+            <a:ext cx="11091672" cy="1097280"/>
           </a:xfrm>
           <a:prstGeom prst="rect">
             <a:avLst/>
@@ -9423,13 +9660,13 @@
               <a:buChar char="—"/>
             </a:pPr>
             <a:r>
-              <a:rPr sz="1300" b="0">
+              <a:rPr sz="1350" b="0">
                 <a:solidFill>
                   <a:srgbClr val="202B38"/>
                 </a:solidFill>
                 <a:latin typeface="Arial"/>
               </a:rPr>
-              <a:t>Builds columns from whatever categories it happens to see</a:t>
+              <a:t>fit(train) memorizes the exact column layout; transform(test) always reproduces those same columns</a:t>
             </a:r>
           </a:p>
           <a:p>
@@ -9443,13 +9680,13 @@
               <a:buChar char="—"/>
             </a:pPr>
             <a:r>
-              <a:rPr sz="1300" b="0">
+              <a:rPr sz="1350" b="0">
                 <a:solidFill>
                   <a:srgbClr val="202B38"/>
                 </a:solidFill>
                 <a:latin typeface="Arial"/>
               </a:rPr>
-              <a:t>Train and test batches can end up with different columns</a:t>
+              <a:t>handle_unknown="ignore": an unseen category becomes all zeros - no crash</a:t>
             </a:r>
           </a:p>
           <a:p>
@@ -9463,91 +9700,27 @@
               <a:buChar char="—"/>
             </a:pPr>
             <a:r>
-              <a:rPr sz="1300" b="0">
+              <a:rPr sz="1350" b="0">
                 <a:solidFill>
                   <a:srgbClr val="202B38"/>
                 </a:solidFill>
                 <a:latin typeface="Arial"/>
               </a:rPr>
-              <a:t>Notebook demo: encoding train and test separately misaligns them</a:t>
-            </a:r>
-          </a:p>
-          <a:p>
-            <a:pPr algn="l" indent="-228600" marL="228600">
-              <a:spcAft>
-                <a:spcPts val="600"/>
-              </a:spcAft>
-              <a:buClr>
-                <a:srgbClr val="1E5EF3"/>
-              </a:buClr>
-              <a:buChar char="—"/>
-            </a:pPr>
-            <a:r>
-              <a:rPr sz="1300" b="0">
-                <a:solidFill>
-                  <a:srgbClr val="202B38"/>
-                </a:solidFill>
-                <a:latin typeface="Arial"/>
-              </a:rPr>
-              <a:t>The model then crashes - or silently misreads features</a:t>
-            </a:r>
-          </a:p>
-        </p:txBody>
-      </p:sp>
-      <p:sp>
-        <p:nvSpPr>
-          <p:cNvPr id="10" name="Rectangle 9"/>
-          <p:cNvSpPr/>
-          <p:nvPr/>
-        </p:nvSpPr>
-        <p:spPr>
-          <a:xfrm>
-            <a:off x="6245352" y="1874519"/>
-            <a:ext cx="5394960" cy="3977639"/>
-          </a:xfrm>
-          <a:prstGeom prst="rect">
-            <a:avLst/>
-          </a:prstGeom>
-          <a:solidFill>
-            <a:srgbClr val="EEF3FD"/>
-          </a:solidFill>
-          <a:ln>
-            <a:noFill/>
-          </a:ln>
-          <a:effectLst/>
-        </p:spPr>
-        <p:style>
-          <a:lnRef idx="1">
-            <a:schemeClr val="accent1"/>
-          </a:lnRef>
-          <a:fillRef idx="3">
-            <a:schemeClr val="accent1"/>
-          </a:fillRef>
-          <a:effectRef idx="2">
-            <a:schemeClr val="accent1"/>
-          </a:effectRef>
-          <a:fontRef idx="minor">
-            <a:schemeClr val="lt1"/>
-          </a:fontRef>
-        </p:style>
-        <p:txBody>
-          <a:bodyPr rtlCol="0" anchor="ctr"/>
-          <a:lstStyle/>
-          <a:p>
-            <a:pPr algn="ctr"/>
-          </a:p>
-        </p:txBody>
-      </p:sp>
-      <p:sp>
-        <p:nvSpPr>
-          <p:cNvPr id="11" name="TextBox 10"/>
+              <a:t>pd.get_dummies instead builds columns from whatever it happens to see - train and test drift apart (the notebook demo misaligns them)</a:t>
+            </a:r>
+          </a:p>
+        </p:txBody>
+      </p:sp>
+      <p:sp>
+        <p:nvSpPr>
+          <p:cNvPr id="10" name="TextBox 9"/>
           <p:cNvSpPr txBox="1"/>
           <p:nvPr/>
         </p:nvSpPr>
         <p:spPr>
           <a:xfrm>
-            <a:off x="6473952" y="2039111"/>
-            <a:ext cx="4937760" cy="365760"/>
+            <a:off x="548640" y="5468112"/>
+            <a:ext cx="11091672" cy="502920"/>
           </a:xfrm>
           <a:prstGeom prst="rect">
             <a:avLst/>
@@ -9567,27 +9740,27 @@
               <a:buNone/>
             </a:pPr>
             <a:r>
-              <a:rPr sz="1500" b="1">
+              <a:rPr sz="1200" b="0">
                 <a:solidFill>
                   <a:srgbClr val="0A2540"/>
                 </a:solidFill>
                 <a:latin typeface="Arial"/>
               </a:rPr>
-              <a:t>OneHotEncoder: train fixes the columns once</a:t>
-            </a:r>
-          </a:p>
-        </p:txBody>
-      </p:sp>
-      <p:sp>
-        <p:nvSpPr>
-          <p:cNvPr id="12" name="TextBox 11"/>
+              <a:t>MIT's encoding menu: true quantity -&gt; numeric; ordered -&gt; thermometer code; otherwise -&gt; one-hot - never arbitrary integer codes: the model learns from the lie. MIT 6.390, ch. 5.</a:t>
+            </a:r>
+          </a:p>
+        </p:txBody>
+      </p:sp>
+      <p:sp>
+        <p:nvSpPr>
+          <p:cNvPr id="11" name="TextBox 10"/>
           <p:cNvSpPr txBox="1"/>
           <p:nvPr/>
         </p:nvSpPr>
         <p:spPr>
           <a:xfrm>
-            <a:off x="6473952" y="2441447"/>
-            <a:ext cx="4937760" cy="3246119"/>
+            <a:off x="548640" y="6473952"/>
+            <a:ext cx="7315200" cy="292608"/>
           </a:xfrm>
           <a:prstGeom prst="rect">
             <a:avLst/>
@@ -9600,153 +9773,10 @@
           </a:bodyPr>
           <a:lstStyle/>
           <a:p>
-            <a:pPr algn="l" indent="-228600" marL="228600">
+            <a:pPr algn="l">
               <a:spcAft>
                 <a:spcPts val="600"/>
               </a:spcAft>
-              <a:buClr>
-                <a:srgbClr val="1E5EF3"/>
-              </a:buClr>
-              <a:buChar char="—"/>
-            </a:pPr>
-            <a:r>
-              <a:rPr sz="1300" b="0">
-                <a:solidFill>
-                  <a:srgbClr val="202B38"/>
-                </a:solidFill>
-                <a:latin typeface="Arial"/>
-              </a:rPr>
-              <a:t>fit(train) memorizes the exact column layout</a:t>
-            </a:r>
-          </a:p>
-          <a:p>
-            <a:pPr algn="l" indent="-228600" marL="228600">
-              <a:spcAft>
-                <a:spcPts val="600"/>
-              </a:spcAft>
-              <a:buClr>
-                <a:srgbClr val="1E5EF3"/>
-              </a:buClr>
-              <a:buChar char="—"/>
-            </a:pPr>
-            <a:r>
-              <a:rPr sz="1300" b="0">
-                <a:solidFill>
-                  <a:srgbClr val="202B38"/>
-                </a:solidFill>
-                <a:latin typeface="Arial"/>
-              </a:rPr>
-              <a:t>transform(test) always produces those same columns</a:t>
-            </a:r>
-          </a:p>
-          <a:p>
-            <a:pPr algn="l" indent="-228600" marL="228600">
-              <a:spcAft>
-                <a:spcPts val="600"/>
-              </a:spcAft>
-              <a:buClr>
-                <a:srgbClr val="1E5EF3"/>
-              </a:buClr>
-              <a:buChar char="—"/>
-            </a:pPr>
-            <a:r>
-              <a:rPr sz="1300" b="0">
-                <a:solidFill>
-                  <a:srgbClr val="202B38"/>
-                </a:solidFill>
-                <a:latin typeface="Arial"/>
-              </a:rPr>
-              <a:t>handle_unknown="ignore": unseen category = all zeros, no crash</a:t>
-            </a:r>
-          </a:p>
-          <a:p>
-            <a:pPr algn="l" indent="-228600" marL="228600">
-              <a:spcAft>
-                <a:spcPts val="600"/>
-              </a:spcAft>
-              <a:buClr>
-                <a:srgbClr val="1E5EF3"/>
-              </a:buClr>
-              <a:buChar char="—"/>
-            </a:pPr>
-            <a:r>
-              <a:rPr sz="1300" b="0">
-                <a:solidFill>
-                  <a:srgbClr val="202B38"/>
-                </a:solidFill>
-                <a:latin typeface="Arial"/>
-              </a:rPr>
-              <a:t>Same contract as the imputer: learn on train, apply everywhere</a:t>
-            </a:r>
-          </a:p>
-        </p:txBody>
-      </p:sp>
-      <p:sp>
-        <p:nvSpPr>
-          <p:cNvPr id="13" name="TextBox 12"/>
-          <p:cNvSpPr txBox="1"/>
-          <p:nvPr/>
-        </p:nvSpPr>
-        <p:spPr>
-          <a:xfrm>
-            <a:off x="548640" y="6053328"/>
-            <a:ext cx="11091672" cy="502920"/>
-          </a:xfrm>
-          <a:prstGeom prst="rect">
-            <a:avLst/>
-          </a:prstGeom>
-          <a:noFill/>
-        </p:spPr>
-        <p:txBody>
-          <a:bodyPr wrap="square">
-            <a:spAutoFit/>
-          </a:bodyPr>
-          <a:lstStyle/>
-          <a:p>
-            <a:pPr algn="l">
-              <a:spcAft>
-                <a:spcPts val="600"/>
-              </a:spcAft>
-              <a:buNone/>
-            </a:pPr>
-            <a:r>
-              <a:rPr sz="1200" b="0">
-                <a:solidFill>
-                  <a:srgbClr val="1E5EF3"/>
-                </a:solidFill>
-                <a:latin typeface="Arial"/>
-              </a:rPr>
-              <a:t>Rule of thumb: real order (shirt sizes S &lt; M &lt; L) -&gt; OrdinalEncoder; no real order -&gt; OneHotEncoder; when in doubt, one-hot. A fake order hurts more than a few extra columns.</a:t>
-            </a:r>
-          </a:p>
-        </p:txBody>
-      </p:sp>
-      <p:sp>
-        <p:nvSpPr>
-          <p:cNvPr id="14" name="TextBox 13"/>
-          <p:cNvSpPr txBox="1"/>
-          <p:nvPr/>
-        </p:nvSpPr>
-        <p:spPr>
-          <a:xfrm>
-            <a:off x="548640" y="6473952"/>
-            <a:ext cx="7315200" cy="292608"/>
-          </a:xfrm>
-          <a:prstGeom prst="rect">
-            <a:avLst/>
-          </a:prstGeom>
-          <a:noFill/>
-        </p:spPr>
-        <p:txBody>
-          <a:bodyPr wrap="square">
-            <a:spAutoFit/>
-          </a:bodyPr>
-          <a:lstStyle/>
-          <a:p>
-            <a:pPr algn="l">
-              <a:spcAft>
-                <a:spcPts val="600"/>
-              </a:spcAft>
               <a:buNone/>
             </a:pPr>
             <a:r>
@@ -9763,7 +9793,7 @@
       </p:sp>
       <p:sp>
         <p:nvSpPr>
-          <p:cNvPr id="15" name="TextBox 14"/>
+          <p:cNvPr id="12" name="TextBox 11"/>
           <p:cNvSpPr txBox="1"/>
           <p:nvPr/>
         </p:nvSpPr>
@@ -10149,7 +10179,7 @@
                 </a:solidFill>
                 <a:latin typeface="Arial"/>
               </a:rPr>
-              <a:t>The histogram shape does not change - only the numbers on the axis do</a:t>
+              <a:t>The histogram shape does not change - only the numbers on the axis do. So why do equation models care? Next slide</a:t>
             </a:r>
           </a:p>
         </p:txBody>
@@ -10331,7 +10361,7 @@
             <a:avLst/>
           </a:prstGeom>
           <a:solidFill>
-            <a:srgbClr val="0A2540"/>
+            <a:srgbClr val="FFFFFF"/>
           </a:solidFill>
           <a:ln>
             <a:noFill/>
@@ -10362,14 +10392,58 @@
       </p:sp>
       <p:sp>
         <p:nvSpPr>
-          <p:cNvPr id="3" name="TextBox 2"/>
+          <p:cNvPr id="3" name="Rectangle 2"/>
+          <p:cNvSpPr/>
+          <p:nvPr/>
+        </p:nvSpPr>
+        <p:spPr>
+          <a:xfrm>
+            <a:off x="548640" y="475488"/>
+            <a:ext cx="457200" cy="54864"/>
+          </a:xfrm>
+          <a:prstGeom prst="rect">
+            <a:avLst/>
+          </a:prstGeom>
+          <a:solidFill>
+            <a:srgbClr val="1E5EF3"/>
+          </a:solidFill>
+          <a:ln>
+            <a:noFill/>
+          </a:ln>
+          <a:effectLst/>
+        </p:spPr>
+        <p:style>
+          <a:lnRef idx="1">
+            <a:schemeClr val="accent1"/>
+          </a:lnRef>
+          <a:fillRef idx="3">
+            <a:schemeClr val="accent1"/>
+          </a:fillRef>
+          <a:effectRef idx="2">
+            <a:schemeClr val="accent1"/>
+          </a:effectRef>
+          <a:fontRef idx="minor">
+            <a:schemeClr val="lt1"/>
+          </a:fontRef>
+        </p:style>
+        <p:txBody>
+          <a:bodyPr rtlCol="0" anchor="ctr"/>
+          <a:lstStyle/>
+          <a:p>
+            <a:pPr algn="ctr"/>
+          </a:p>
+        </p:txBody>
+      </p:sp>
+      <p:sp>
+        <p:nvSpPr>
+          <p:cNvPr id="4" name="TextBox 3"/>
           <p:cNvSpPr txBox="1"/>
           <p:nvPr/>
         </p:nvSpPr>
         <p:spPr>
           <a:xfrm>
-            <a:off x="822960" y="1463040"/>
-            <a:ext cx="3657600" cy="2011680"/>
+            <a:off x="548640" y="603504"/>
+            <a:ext cx="11091672" cy="274320"/>
           </a:xfrm>
           <a:prstGeom prst="rect">
             <a:avLst/>
@@ -10389,27 +10463,27 @@
               <a:buNone/>
             </a:pPr>
             <a:r>
-              <a:rPr sz="11000" b="1">
+              <a:rPr sz="1100" b="1">
                 <a:solidFill>
                   <a:srgbClr val="1E5EF3"/>
                 </a:solidFill>
                 <a:latin typeface="Arial"/>
               </a:rPr>
-              <a:t>02</a:t>
-            </a:r>
-          </a:p>
-        </p:txBody>
-      </p:sp>
-      <p:sp>
-        <p:nvSpPr>
-          <p:cNvPr id="4" name="TextBox 3"/>
+              <a:t>FEATURE SCALING: THE WHY</a:t>
+            </a:r>
+          </a:p>
+        </p:txBody>
+      </p:sp>
+      <p:sp>
+        <p:nvSpPr>
+          <p:cNvPr id="5" name="TextBox 4"/>
           <p:cNvSpPr txBox="1"/>
           <p:nvPr/>
         </p:nvSpPr>
         <p:spPr>
           <a:xfrm>
-            <a:off x="868680" y="3566160"/>
-            <a:ext cx="10424160" cy="1280160"/>
+            <a:off x="548640" y="868680"/>
+            <a:ext cx="11091672" cy="777240"/>
           </a:xfrm>
           <a:prstGeom prst="rect">
             <a:avLst/>
@@ -10424,32 +10498,76 @@
           <a:p>
             <a:pPr algn="l">
               <a:spcAft>
-                <a:spcPts val="600"/>
-              </a:spcAft>
-              <a:buNone/>
-            </a:pPr>
-            <a:r>
-              <a:rPr sz="3400" b="1">
-                <a:solidFill>
-                  <a:srgbClr val="FFFFFF"/>
-                </a:solidFill>
-                <a:latin typeface="Arial"/>
-              </a:rPr>
-              <a:t>Feature engineering</a:t>
-            </a:r>
-          </a:p>
-        </p:txBody>
-      </p:sp>
-      <p:sp>
-        <p:nvSpPr>
-          <p:cNvPr id="5" name="TextBox 4"/>
+                <a:spcPts val="0"/>
+              </a:spcAft>
+              <a:buNone/>
+            </a:pPr>
+            <a:r>
+              <a:rPr sz="2600" b="1">
+                <a:solidFill>
+                  <a:srgbClr val="0A2540"/>
+                </a:solidFill>
+                <a:latin typeface="Arial"/>
+              </a:rPr>
+              <a:t>Scaling does not change the destination - it straightens the road to it</a:t>
+            </a:r>
+          </a:p>
+        </p:txBody>
+      </p:sp>
+      <p:sp>
+        <p:nvSpPr>
+          <p:cNvPr id="6" name="Rectangle 5"/>
+          <p:cNvSpPr/>
+          <p:nvPr/>
+        </p:nvSpPr>
+        <p:spPr>
+          <a:xfrm>
+            <a:off x="548640" y="1664208"/>
+            <a:ext cx="11091672" cy="12801"/>
+          </a:xfrm>
+          <a:prstGeom prst="rect">
+            <a:avLst/>
+          </a:prstGeom>
+          <a:solidFill>
+            <a:srgbClr val="B9D0FA"/>
+          </a:solidFill>
+          <a:ln>
+            <a:noFill/>
+          </a:ln>
+          <a:effectLst/>
+        </p:spPr>
+        <p:style>
+          <a:lnRef idx="1">
+            <a:schemeClr val="accent1"/>
+          </a:lnRef>
+          <a:fillRef idx="3">
+            <a:schemeClr val="accent1"/>
+          </a:fillRef>
+          <a:effectRef idx="2">
+            <a:schemeClr val="accent1"/>
+          </a:effectRef>
+          <a:fontRef idx="minor">
+            <a:schemeClr val="lt1"/>
+          </a:fontRef>
+        </p:style>
+        <p:txBody>
+          <a:bodyPr rtlCol="0" anchor="ctr"/>
+          <a:lstStyle/>
+          <a:p>
+            <a:pPr algn="ctr"/>
+          </a:p>
+        </p:txBody>
+      </p:sp>
+      <p:sp>
+        <p:nvSpPr>
+          <p:cNvPr id="7" name="TextBox 6"/>
           <p:cNvSpPr txBox="1"/>
           <p:nvPr/>
         </p:nvSpPr>
         <p:spPr>
           <a:xfrm>
-            <a:off x="868680" y="4709160"/>
-            <a:ext cx="10058400" cy="914400"/>
+            <a:off x="548640" y="1874519"/>
+            <a:ext cx="4297680" cy="4206240"/>
           </a:xfrm>
           <a:prstGeom prst="rect">
             <a:avLst/>
@@ -10462,34 +10580,121 @@
           </a:bodyPr>
           <a:lstStyle/>
           <a:p>
-            <a:pPr algn="l">
-              <a:spcAft>
-                <a:spcPts val="600"/>
-              </a:spcAft>
-              <a:buNone/>
-            </a:pPr>
-            <a:r>
-              <a:rPr sz="1600" b="0">
-                <a:solidFill>
-                  <a:srgbClr val="B9D0FA"/>
-                </a:solidFill>
-                <a:latin typeface="Arial"/>
-              </a:rPr>
-              <a:t>Where humans still beat machines: the manifest already knows Frankie is a boy and Owen is not alone - our job is to put that into columns</a:t>
-            </a:r>
-          </a:p>
-        </p:txBody>
-      </p:sp>
-      <p:sp>
-        <p:nvSpPr>
-          <p:cNvPr id="6" name="TextBox 5"/>
+            <a:pPr algn="l" indent="-228600" marL="228600">
+              <a:spcAft>
+                <a:spcPts val="800"/>
+              </a:spcAft>
+              <a:buClr>
+                <a:srgbClr val="1E5EF3"/>
+              </a:buClr>
+              <a:buChar char="—"/>
+            </a:pPr>
+            <a:r>
+              <a:rPr sz="1450" b="0">
+                <a:solidFill>
+                  <a:srgbClr val="202B38"/>
+                </a:solidFill>
+                <a:latin typeface="Arial"/>
+              </a:rPr>
+              <a:t>Training walks downhill on the cost surface: nudge the weights in whichever direction lowers the average miss fastest</a:t>
+            </a:r>
+          </a:p>
+          <a:p>
+            <a:pPr algn="l" indent="-228600" marL="228600">
+              <a:spcAft>
+                <a:spcPts val="800"/>
+              </a:spcAft>
+              <a:buClr>
+                <a:srgbClr val="1E5EF3"/>
+              </a:buClr>
+              <a:buChar char="—"/>
+            </a:pPr>
+            <a:r>
+              <a:rPr sz="1450" b="0">
+                <a:solidFill>
+                  <a:srgbClr val="202B38"/>
+                </a:solidFill>
+                <a:latin typeface="Arial"/>
+              </a:rPr>
+              <a:t>With Fare 0-512 next to Age 0-80, the bowl becomes a long skinny valley - the downhill walk zigzags across the narrow direction and crawls</a:t>
+            </a:r>
+          </a:p>
+          <a:p>
+            <a:pPr algn="l" indent="-228600" marL="228600">
+              <a:spcAft>
+                <a:spcPts val="800"/>
+              </a:spcAft>
+              <a:buClr>
+                <a:srgbClr val="1E5EF3"/>
+              </a:buClr>
+              <a:buChar char="—"/>
+            </a:pPr>
+            <a:r>
+              <a:rPr sz="1450" b="0">
+                <a:solidFill>
+                  <a:srgbClr val="202B38"/>
+                </a:solidFill>
+                <a:latin typeface="Arial"/>
+              </a:rPr>
+              <a:t>Rescale to comparable ranges and the contours turn nearly circular - the walk heads straight for the minimum</a:t>
+            </a:r>
+          </a:p>
+          <a:p>
+            <a:pPr algn="l" indent="-228600" marL="228600">
+              <a:spcAft>
+                <a:spcPts val="800"/>
+              </a:spcAft>
+              <a:buClr>
+                <a:srgbClr val="1E5EF3"/>
+              </a:buClr>
+              <a:buChar char="—"/>
+            </a:pPr>
+            <a:r>
+              <a:rPr sz="1450" b="0">
+                <a:solidFill>
+                  <a:srgbClr val="202B38"/>
+                </a:solidFill>
+                <a:latin typeface="Arial"/>
+              </a:rPr>
+              <a:t>Scaling changes nothing about what the best model predicts - only how fast and reliably you find it: same destination, very different trip</a:t>
+            </a:r>
+          </a:p>
+        </p:txBody>
+      </p:sp>
+      <p:pic>
+        <p:nvPicPr>
+          <p:cNvPr id="8" name="Picture 7" descr="fig_contours_scaling.png"/>
+          <p:cNvPicPr>
+            <a:picLocks noChangeAspect="1"/>
+          </p:cNvPicPr>
+          <p:nvPr/>
+        </p:nvPicPr>
+        <p:blipFill>
+          <a:blip r:embed="rId2"/>
+          <a:stretch>
+            <a:fillRect/>
+          </a:stretch>
+        </p:blipFill>
+        <p:spPr>
+          <a:xfrm>
+            <a:off x="5120640" y="1874519"/>
+            <a:ext cx="6492240" cy="3417199"/>
+          </a:xfrm>
+          <a:prstGeom prst="rect">
+            <a:avLst/>
+          </a:prstGeom>
+        </p:spPr>
+      </p:pic>
+      <p:sp>
+        <p:nvSpPr>
+          <p:cNvPr id="9" name="TextBox 8"/>
           <p:cNvSpPr txBox="1"/>
           <p:nvPr/>
         </p:nvSpPr>
         <p:spPr>
           <a:xfrm>
-            <a:off x="548640" y="6473952"/>
-            <a:ext cx="7315200" cy="292608"/>
+            <a:off x="5120640" y="6062471"/>
+            <a:ext cx="6492240" cy="365760"/>
           </a:xfrm>
           <a:prstGeom prst="rect">
             <a:avLst/>
@@ -10502,34 +10707,34 @@
           </a:bodyPr>
           <a:lstStyle/>
           <a:p>
-            <a:pPr algn="l">
+            <a:pPr algn="ctr">
               <a:spcAft>
                 <a:spcPts val="600"/>
               </a:spcAft>
               <a:buNone/>
             </a:pPr>
             <a:r>
-              <a:rPr sz="900" b="0">
-                <a:solidFill>
-                  <a:srgbClr val="B9D0FA"/>
-                </a:solidFill>
-                <a:latin typeface="Arial"/>
-              </a:rPr>
-              <a:t>M2 Session 2 - Data Prep and Feature Engineering</a:t>
-            </a:r>
-          </a:p>
-        </p:txBody>
-      </p:sp>
-      <p:sp>
-        <p:nvSpPr>
-          <p:cNvPr id="7" name="TextBox 6"/>
+              <a:rPr sz="1100" b="0">
+                <a:solidFill>
+                  <a:srgbClr val="5B6774"/>
+                </a:solidFill>
+                <a:latin typeface="Arial"/>
+              </a:rPr>
+              <a:t>Illustration - schematic cost surface, not course data. Ng, Machine Learning Specialization C1W2.</a:t>
+            </a:r>
+          </a:p>
+        </p:txBody>
+      </p:sp>
+      <p:sp>
+        <p:nvSpPr>
+          <p:cNvPr id="10" name="TextBox 9"/>
           <p:cNvSpPr txBox="1"/>
           <p:nvPr/>
         </p:nvSpPr>
         <p:spPr>
           <a:xfrm>
-            <a:off x="11292840" y="6473952"/>
-            <a:ext cx="548640" cy="292608"/>
+            <a:off x="548640" y="6473952"/>
+            <a:ext cx="7315200" cy="292608"/>
           </a:xfrm>
           <a:prstGeom prst="rect">
             <a:avLst/>
@@ -10542,6 +10747,46 @@
           </a:bodyPr>
           <a:lstStyle/>
           <a:p>
+            <a:pPr algn="l">
+              <a:spcAft>
+                <a:spcPts val="600"/>
+              </a:spcAft>
+              <a:buNone/>
+            </a:pPr>
+            <a:r>
+              <a:rPr sz="900" b="0">
+                <a:solidFill>
+                  <a:srgbClr val="5B6774"/>
+                </a:solidFill>
+                <a:latin typeface="Arial"/>
+              </a:rPr>
+              <a:t>M2 Session 2 - Data Prep and Feature Engineering</a:t>
+            </a:r>
+          </a:p>
+        </p:txBody>
+      </p:sp>
+      <p:sp>
+        <p:nvSpPr>
+          <p:cNvPr id="11" name="TextBox 10"/>
+          <p:cNvSpPr txBox="1"/>
+          <p:nvPr/>
+        </p:nvSpPr>
+        <p:spPr>
+          <a:xfrm>
+            <a:off x="11292840" y="6473952"/>
+            <a:ext cx="548640" cy="292608"/>
+          </a:xfrm>
+          <a:prstGeom prst="rect">
+            <a:avLst/>
+          </a:prstGeom>
+          <a:noFill/>
+        </p:spPr>
+        <p:txBody>
+          <a:bodyPr wrap="square">
+            <a:spAutoFit/>
+          </a:bodyPr>
+          <a:lstStyle/>
+          <a:p>
             <a:pPr algn="r">
               <a:spcAft>
                 <a:spcPts val="600"/>
@@ -10551,7 +10796,7 @@
             <a:r>
               <a:rPr sz="900" b="0">
                 <a:solidFill>
-                  <a:srgbClr val="B9D0FA"/>
+                  <a:srgbClr val="5B6774"/>
                 </a:solidFill>
                 <a:latin typeface="Arial"/>
               </a:rPr>
@@ -10593,7 +10838,7 @@
             <a:avLst/>
           </a:prstGeom>
           <a:solidFill>
-            <a:srgbClr val="FFFFFF"/>
+            <a:srgbClr val="0A2540"/>
           </a:solidFill>
           <a:ln>
             <a:noFill/>
@@ -10624,58 +10869,14 @@
       </p:sp>
       <p:sp>
         <p:nvSpPr>
-          <p:cNvPr id="3" name="Rectangle 2"/>
-          <p:cNvSpPr/>
-          <p:nvPr/>
-        </p:nvSpPr>
-        <p:spPr>
-          <a:xfrm>
-            <a:off x="548640" y="475488"/>
-            <a:ext cx="457200" cy="54864"/>
-          </a:xfrm>
-          <a:prstGeom prst="rect">
-            <a:avLst/>
-          </a:prstGeom>
-          <a:solidFill>
-            <a:srgbClr val="1E5EF3"/>
-          </a:solidFill>
-          <a:ln>
-            <a:noFill/>
-          </a:ln>
-          <a:effectLst/>
-        </p:spPr>
-        <p:style>
-          <a:lnRef idx="1">
-            <a:schemeClr val="accent1"/>
-          </a:lnRef>
-          <a:fillRef idx="3">
-            <a:schemeClr val="accent1"/>
-          </a:fillRef>
-          <a:effectRef idx="2">
-            <a:schemeClr val="accent1"/>
-          </a:effectRef>
-          <a:fontRef idx="minor">
-            <a:schemeClr val="lt1"/>
-          </a:fontRef>
-        </p:style>
-        <p:txBody>
-          <a:bodyPr rtlCol="0" anchor="ctr"/>
-          <a:lstStyle/>
-          <a:p>
-            <a:pPr algn="ctr"/>
-          </a:p>
-        </p:txBody>
-      </p:sp>
-      <p:sp>
-        <p:nvSpPr>
-          <p:cNvPr id="4" name="TextBox 3"/>
+          <p:cNvPr id="3" name="TextBox 2"/>
           <p:cNvSpPr txBox="1"/>
           <p:nvPr/>
         </p:nvSpPr>
         <p:spPr>
           <a:xfrm>
-            <a:off x="548640" y="603504"/>
-            <a:ext cx="11091672" cy="274320"/>
+            <a:off x="822960" y="1463040"/>
+            <a:ext cx="3657600" cy="2011680"/>
           </a:xfrm>
           <a:prstGeom prst="rect">
             <a:avLst/>
@@ -10695,27 +10896,27 @@
               <a:buNone/>
             </a:pPr>
             <a:r>
-              <a:rPr sz="1100" b="1">
+              <a:rPr sz="11000" b="1">
                 <a:solidFill>
                   <a:srgbClr val="1E5EF3"/>
                 </a:solidFill>
                 <a:latin typeface="Arial"/>
               </a:rPr>
-              <a:t>FEATURE ENGINEERING: TITLE</a:t>
-            </a:r>
-          </a:p>
-        </p:txBody>
-      </p:sp>
-      <p:sp>
-        <p:nvSpPr>
-          <p:cNvPr id="5" name="TextBox 4"/>
+              <a:t>02</a:t>
+            </a:r>
+          </a:p>
+        </p:txBody>
+      </p:sp>
+      <p:sp>
+        <p:nvSpPr>
+          <p:cNvPr id="4" name="TextBox 3"/>
           <p:cNvSpPr txBox="1"/>
           <p:nvPr/>
         </p:nvSpPr>
         <p:spPr>
           <a:xfrm>
-            <a:off x="548640" y="868680"/>
-            <a:ext cx="11091672" cy="777240"/>
+            <a:off x="868680" y="3566160"/>
+            <a:ext cx="10424160" cy="1280160"/>
           </a:xfrm>
           <a:prstGeom prst="rect">
             <a:avLst/>
@@ -10730,76 +10931,32 @@
           <a:p>
             <a:pPr algn="l">
               <a:spcAft>
-                <a:spcPts val="0"/>
-              </a:spcAft>
-              <a:buNone/>
-            </a:pPr>
-            <a:r>
-              <a:rPr sz="2600" b="1">
-                <a:solidFill>
-                  <a:srgbClr val="0A2540"/>
-                </a:solidFill>
-                <a:latin typeface="Arial"/>
-              </a:rPr>
-              <a:t>Title packs sex, age, and status into one column - and finds the boys</a:t>
-            </a:r>
-          </a:p>
-        </p:txBody>
-      </p:sp>
-      <p:sp>
-        <p:nvSpPr>
-          <p:cNvPr id="6" name="Rectangle 5"/>
-          <p:cNvSpPr/>
-          <p:nvPr/>
-        </p:nvSpPr>
-        <p:spPr>
-          <a:xfrm>
-            <a:off x="548640" y="1664208"/>
-            <a:ext cx="11091672" cy="12801"/>
-          </a:xfrm>
-          <a:prstGeom prst="rect">
-            <a:avLst/>
-          </a:prstGeom>
-          <a:solidFill>
-            <a:srgbClr val="B9D0FA"/>
-          </a:solidFill>
-          <a:ln>
-            <a:noFill/>
-          </a:ln>
-          <a:effectLst/>
-        </p:spPr>
-        <p:style>
-          <a:lnRef idx="1">
-            <a:schemeClr val="accent1"/>
-          </a:lnRef>
-          <a:fillRef idx="3">
-            <a:schemeClr val="accent1"/>
-          </a:fillRef>
-          <a:effectRef idx="2">
-            <a:schemeClr val="accent1"/>
-          </a:effectRef>
-          <a:fontRef idx="minor">
-            <a:schemeClr val="lt1"/>
-          </a:fontRef>
-        </p:style>
-        <p:txBody>
-          <a:bodyPr rtlCol="0" anchor="ctr"/>
-          <a:lstStyle/>
-          <a:p>
-            <a:pPr algn="ctr"/>
-          </a:p>
-        </p:txBody>
-      </p:sp>
-      <p:sp>
-        <p:nvSpPr>
-          <p:cNvPr id="7" name="TextBox 6"/>
+                <a:spcPts val="600"/>
+              </a:spcAft>
+              <a:buNone/>
+            </a:pPr>
+            <a:r>
+              <a:rPr sz="3400" b="1">
+                <a:solidFill>
+                  <a:srgbClr val="FFFFFF"/>
+                </a:solidFill>
+                <a:latin typeface="Arial"/>
+              </a:rPr>
+              <a:t>Feature engineering</a:t>
+            </a:r>
+          </a:p>
+        </p:txBody>
+      </p:sp>
+      <p:sp>
+        <p:nvSpPr>
+          <p:cNvPr id="5" name="TextBox 4"/>
           <p:cNvSpPr txBox="1"/>
           <p:nvPr/>
         </p:nvSpPr>
         <p:spPr>
           <a:xfrm>
-            <a:off x="548640" y="1874519"/>
-            <a:ext cx="4297680" cy="4206240"/>
+            <a:off x="868680" y="4709160"/>
+            <a:ext cx="10058400" cy="914400"/>
           </a:xfrm>
           <a:prstGeom prst="rect">
             <a:avLst/>
@@ -10812,141 +10969,34 @@
           </a:bodyPr>
           <a:lstStyle/>
           <a:p>
-            <a:pPr algn="l" indent="-228600" marL="228600">
-              <a:spcAft>
-                <a:spcPts val="800"/>
-              </a:spcAft>
-              <a:buClr>
-                <a:srgbClr val="1E5EF3"/>
-              </a:buClr>
-              <a:buChar char="—"/>
-            </a:pPr>
-            <a:r>
-              <a:rPr sz="1450" b="0">
-                <a:solidFill>
-                  <a:srgbClr val="202B38"/>
-                </a:solidFill>
-                <a:latin typeface="Arial"/>
-              </a:rPr>
-              <a:t>Regex " ([A-Za-z]+)\." grabs the word before the period - the title</a:t>
-            </a:r>
-          </a:p>
-          <a:p>
-            <a:pPr algn="l" indent="-228600" marL="228600">
-              <a:spcAft>
-                <a:spcPts val="800"/>
-              </a:spcAft>
-              <a:buClr>
-                <a:srgbClr val="1E5EF3"/>
-              </a:buClr>
-              <a:buChar char="—"/>
-            </a:pPr>
-            <a:r>
-              <a:rPr sz="1450" b="0">
-                <a:solidFill>
-                  <a:srgbClr val="202B38"/>
-                </a:solidFill>
-                <a:latin typeface="Arial"/>
-              </a:rPr>
-              <a:t>"Cumings, Mrs. John Bradley" yields Mrs for Florence; 14 raw titles group into 5 buckets: Mr, Miss, Mrs, Master, Rare</a:t>
-            </a:r>
-          </a:p>
-          <a:p>
-            <a:pPr algn="l" indent="-228600" marL="228600">
-              <a:spcAft>
-                <a:spcPts val="800"/>
-              </a:spcAft>
-              <a:buClr>
-                <a:srgbClr val="1E5EF3"/>
-              </a:buClr>
-              <a:buChar char="—"/>
-            </a:pPr>
-            <a:r>
-              <a:rPr sz="1450" b="0">
-                <a:solidFill>
-                  <a:srgbClr val="202B38"/>
-                </a:solidFill>
-                <a:latin typeface="Arial"/>
-              </a:rPr>
-              <a:t>Frankie, age 9, is a "Master" - the old title for young boys, secretly encoding "male child"</a:t>
-            </a:r>
-          </a:p>
-          <a:p>
-            <a:pPr algn="l" indent="-228600" marL="228600">
-              <a:spcAft>
-                <a:spcPts val="800"/>
-              </a:spcAft>
-              <a:buClr>
-                <a:srgbClr val="1E5EF3"/>
-              </a:buClr>
-              <a:buChar char="—"/>
-            </a:pPr>
-            <a:r>
-              <a:rPr sz="1450" b="0">
-                <a:solidFill>
-                  <a:srgbClr val="202B38"/>
-                </a:solidFill>
-                <a:latin typeface="Arial"/>
-              </a:rPr>
-              <a:t>To the Sex column, Owen (22) and Frankie (9) are both just male - Title tells the man from the boy</a:t>
-            </a:r>
-          </a:p>
-          <a:p>
-            <a:pPr algn="l" indent="-228600" marL="228600">
-              <a:spcAft>
-                <a:spcPts val="800"/>
-              </a:spcAft>
-              <a:buClr>
-                <a:srgbClr val="1E5EF3"/>
-              </a:buClr>
-              <a:buChar char="—"/>
-            </a:pPr>
-            <a:r>
-              <a:rPr sz="1450" b="0">
-                <a:solidFill>
-                  <a:srgbClr val="202B38"/>
-                </a:solidFill>
-                <a:latin typeface="Arial"/>
-              </a:rPr>
-              <a:t>Signal check: Mrs and Miss survived far more often than Mr; Master sits well above adult men</a:t>
-            </a:r>
-          </a:p>
-        </p:txBody>
-      </p:sp>
-      <p:pic>
-        <p:nvPicPr>
-          <p:cNvPr id="8" name="Picture 7" descr="fig_titles.png"/>
-          <p:cNvPicPr>
-            <a:picLocks noChangeAspect="1"/>
-          </p:cNvPicPr>
-          <p:nvPr/>
-        </p:nvPicPr>
-        <p:blipFill>
-          <a:blip r:embed="rId2"/>
-          <a:stretch>
-            <a:fillRect/>
-          </a:stretch>
-        </p:blipFill>
-        <p:spPr>
-          <a:xfrm>
-            <a:off x="5120640" y="1874519"/>
-            <a:ext cx="6492240" cy="3379340"/>
-          </a:xfrm>
-          <a:prstGeom prst="rect">
-            <a:avLst/>
-          </a:prstGeom>
-        </p:spPr>
-      </p:pic>
-      <p:sp>
-        <p:nvSpPr>
-          <p:cNvPr id="9" name="TextBox 8"/>
+            <a:pPr algn="l">
+              <a:spcAft>
+                <a:spcPts val="600"/>
+              </a:spcAft>
+              <a:buNone/>
+            </a:pPr>
+            <a:r>
+              <a:rPr sz="1600" b="0">
+                <a:solidFill>
+                  <a:srgbClr val="B9D0FA"/>
+                </a:solidFill>
+                <a:latin typeface="Arial"/>
+              </a:rPr>
+              <a:t>Where humans still beat machines: the manifest already knows Frankie is a boy and Owen is not alone - our job is to put that into columns</a:t>
+            </a:r>
+          </a:p>
+        </p:txBody>
+      </p:sp>
+      <p:sp>
+        <p:nvSpPr>
+          <p:cNvPr id="6" name="TextBox 5"/>
           <p:cNvSpPr txBox="1"/>
           <p:nvPr/>
         </p:nvSpPr>
         <p:spPr>
           <a:xfrm>
-            <a:off x="5120640" y="6062471"/>
-            <a:ext cx="6492240" cy="365760"/>
+            <a:off x="548640" y="6473952"/>
+            <a:ext cx="7315200" cy="292608"/>
           </a:xfrm>
           <a:prstGeom prst="rect">
             <a:avLst/>
@@ -10959,34 +11009,34 @@
           </a:bodyPr>
           <a:lstStyle/>
           <a:p>
-            <a:pPr algn="ctr">
+            <a:pPr algn="l">
               <a:spcAft>
                 <a:spcPts val="600"/>
               </a:spcAft>
               <a:buNone/>
             </a:pPr>
             <a:r>
-              <a:rPr sz="1100" b="0">
-                <a:solidFill>
-                  <a:srgbClr val="5B6774"/>
-                </a:solidFill>
-                <a:latin typeface="Arial"/>
-              </a:rPr>
-              <a:t>Grouped Title counts, training set (712 rows). Module 2, notebook 1.</a:t>
-            </a:r>
-          </a:p>
-        </p:txBody>
-      </p:sp>
-      <p:sp>
-        <p:nvSpPr>
-          <p:cNvPr id="10" name="TextBox 9"/>
+              <a:rPr sz="900" b="0">
+                <a:solidFill>
+                  <a:srgbClr val="B9D0FA"/>
+                </a:solidFill>
+                <a:latin typeface="Arial"/>
+              </a:rPr>
+              <a:t>M2 Session 2 - Data Prep and Feature Engineering</a:t>
+            </a:r>
+          </a:p>
+        </p:txBody>
+      </p:sp>
+      <p:sp>
+        <p:nvSpPr>
+          <p:cNvPr id="7" name="TextBox 6"/>
           <p:cNvSpPr txBox="1"/>
           <p:nvPr/>
         </p:nvSpPr>
         <p:spPr>
           <a:xfrm>
-            <a:off x="548640" y="6473952"/>
-            <a:ext cx="7315200" cy="292608"/>
+            <a:off x="11292840" y="6473952"/>
+            <a:ext cx="548640" cy="292608"/>
           </a:xfrm>
           <a:prstGeom prst="rect">
             <a:avLst/>
@@ -10999,7 +11049,7 @@
           </a:bodyPr>
           <a:lstStyle/>
           <a:p>
-            <a:pPr algn="l">
+            <a:pPr algn="r">
               <a:spcAft>
                 <a:spcPts val="600"/>
               </a:spcAft>
@@ -11008,47 +11058,7 @@
             <a:r>
               <a:rPr sz="900" b="0">
                 <a:solidFill>
-                  <a:srgbClr val="5B6774"/>
-                </a:solidFill>
-                <a:latin typeface="Arial"/>
-              </a:rPr>
-              <a:t>M2 Session 2 - Data Prep and Feature Engineering</a:t>
-            </a:r>
-          </a:p>
-        </p:txBody>
-      </p:sp>
-      <p:sp>
-        <p:nvSpPr>
-          <p:cNvPr id="11" name="TextBox 10"/>
-          <p:cNvSpPr txBox="1"/>
-          <p:nvPr/>
-        </p:nvSpPr>
-        <p:spPr>
-          <a:xfrm>
-            <a:off x="11292840" y="6473952"/>
-            <a:ext cx="548640" cy="292608"/>
-          </a:xfrm>
-          <a:prstGeom prst="rect">
-            <a:avLst/>
-          </a:prstGeom>
-          <a:noFill/>
-        </p:spPr>
-        <p:txBody>
-          <a:bodyPr wrap="square">
-            <a:spAutoFit/>
-          </a:bodyPr>
-          <a:lstStyle/>
-          <a:p>
-            <a:pPr algn="r">
-              <a:spcAft>
-                <a:spcPts val="600"/>
-              </a:spcAft>
-              <a:buNone/>
-            </a:pPr>
-            <a:r>
-              <a:rPr sz="900" b="0">
-                <a:solidFill>
-                  <a:srgbClr val="5B6774"/>
+                  <a:srgbClr val="B9D0FA"/>
                 </a:solidFill>
                 <a:latin typeface="Arial"/>
               </a:rPr>

--- a/presentations/m2-session-2-data-prep-and-feature-engineering.pptx
+++ b/presentations/m2-session-2-data-prep-and-feature-engineering.pptx
@@ -7,23 +7,23 @@
   <p:sldIdLst>
     <p:sldId id="256" r:id="rId7"/>
     <p:sldId id="257" r:id="rId8"/>
-    <p:sldId id="258" r:id="rId9"/>
-    <p:sldId id="259" r:id="rId10"/>
-    <p:sldId id="260" r:id="rId11"/>
-    <p:sldId id="261" r:id="rId12"/>
-    <p:sldId id="262" r:id="rId13"/>
-    <p:sldId id="263" r:id="rId14"/>
-    <p:sldId id="264" r:id="rId15"/>
-    <p:sldId id="265" r:id="rId16"/>
-    <p:sldId id="266" r:id="rId17"/>
-    <p:sldId id="267" r:id="rId18"/>
-    <p:sldId id="268" r:id="rId19"/>
-    <p:sldId id="269" r:id="rId20"/>
-    <p:sldId id="270" r:id="rId21"/>
-    <p:sldId id="271" r:id="rId22"/>
-    <p:sldId id="272" r:id="rId23"/>
-    <p:sldId id="273" r:id="rId24"/>
-    <p:sldId id="274" r:id="rId25"/>
+    <p:sldId id="258" r:id="rId10"/>
+    <p:sldId id="259" r:id="rId11"/>
+    <p:sldId id="260" r:id="rId12"/>
+    <p:sldId id="261" r:id="rId13"/>
+    <p:sldId id="262" r:id="rId14"/>
+    <p:sldId id="263" r:id="rId15"/>
+    <p:sldId id="264" r:id="rId16"/>
+    <p:sldId id="265" r:id="rId17"/>
+    <p:sldId id="266" r:id="rId18"/>
+    <p:sldId id="267" r:id="rId19"/>
+    <p:sldId id="268" r:id="rId20"/>
+    <p:sldId id="269" r:id="rId21"/>
+    <p:sldId id="270" r:id="rId22"/>
+    <p:sldId id="271" r:id="rId23"/>
+    <p:sldId id="272" r:id="rId24"/>
+    <p:sldId id="273" r:id="rId25"/>
+    <p:sldId id="274" r:id="rId26"/>
   </p:sldIdLst>
   <p:sldSz cx="12191695" cy="6858000" type="screen4x3"/>
   <p:notesSz cx="6858000" cy="9144000"/>
@@ -123,6 +123,916 @@
     </a:lvl9pPr>
   </p:defaultTextStyle>
 </p:presentation>
+</file>
+
+<file path=ppt/notesMasters/notesMaster1.xml><?xml version="1.0" encoding="utf-8"?>
+<p:notesMaster xmlns:a="http://schemas.openxmlformats.org/drawingml/2006/main" xmlns:p="http://schemas.openxmlformats.org/presentationml/2006/main" xmlns:r="http://schemas.openxmlformats.org/officeDocument/2006/relationships">
+  <p:cSld>
+    <p:bg>
+      <p:bgRef idx="1001">
+        <a:schemeClr val="bg1"/>
+      </p:bgRef>
+    </p:bg>
+    <p:spTree>
+      <p:nvGrpSpPr>
+        <p:cNvPr id="1" name=""/>
+        <p:cNvGrpSpPr/>
+        <p:nvPr/>
+      </p:nvGrpSpPr>
+      <p:grpSpPr>
+        <a:xfrm>
+          <a:off x="0" y="0"/>
+          <a:ext cx="0" cy="0"/>
+          <a:chOff x="0" y="0"/>
+          <a:chExt cx="0" cy="0"/>
+        </a:xfrm>
+      </p:grpSpPr>
+      <p:sp>
+        <p:nvSpPr>
+          <p:cNvPr id="2" name="Header Placeholder 1"/>
+          <p:cNvSpPr>
+            <a:spLocks noGrp="1"/>
+          </p:cNvSpPr>
+          <p:nvPr>
+            <p:ph type="hdr" sz="quarter"/>
+          </p:nvPr>
+        </p:nvSpPr>
+        <p:spPr>
+          <a:xfrm>
+            <a:off x="0" y="0"/>
+            <a:ext cx="2971800" cy="457200"/>
+          </a:xfrm>
+          <a:prstGeom prst="rect">
+            <a:avLst/>
+          </a:prstGeom>
+        </p:spPr>
+        <p:txBody>
+          <a:bodyPr vert="horz" lIns="91440" tIns="45720" rIns="91440" bIns="45720" rtlCol="0"/>
+          <a:lstStyle>
+            <a:lvl1pPr algn="l">
+              <a:defRPr sz="1200"/>
+            </a:lvl1pPr>
+          </a:lstStyle>
+          <a:p>
+            <a:endParaRPr lang="en-US"/>
+          </a:p>
+        </p:txBody>
+      </p:sp>
+      <p:sp>
+        <p:nvSpPr>
+          <p:cNvPr id="3" name="Date Placeholder 2"/>
+          <p:cNvSpPr>
+            <a:spLocks noGrp="1"/>
+          </p:cNvSpPr>
+          <p:nvPr>
+            <p:ph type="dt" idx="1"/>
+          </p:nvPr>
+        </p:nvSpPr>
+        <p:spPr>
+          <a:xfrm>
+            <a:off x="3884613" y="0"/>
+            <a:ext cx="2971800" cy="457200"/>
+          </a:xfrm>
+          <a:prstGeom prst="rect">
+            <a:avLst/>
+          </a:prstGeom>
+        </p:spPr>
+        <p:txBody>
+          <a:bodyPr vert="horz" lIns="91440" tIns="45720" rIns="91440" bIns="45720" rtlCol="0"/>
+          <a:lstStyle>
+            <a:lvl1pPr algn="r">
+              <a:defRPr sz="1200"/>
+            </a:lvl1pPr>
+          </a:lstStyle>
+          <a:p>
+            <a:fld id="{0F89C1C7-3DCD-1040-A9CF-14679D8B5DDD}" type="datetimeFigureOut">
+              <a:rPr lang="en-US" smtClean="0"/>
+              <a:t>10/17/16</a:t>
+            </a:fld>
+            <a:endParaRPr lang="en-US"/>
+          </a:p>
+        </p:txBody>
+      </p:sp>
+      <p:sp>
+        <p:nvSpPr>
+          <p:cNvPr id="4" name="Slide Image Placeholder 3"/>
+          <p:cNvSpPr>
+            <a:spLocks noGrp="1" noRot="1" noChangeAspect="1"/>
+          </p:cNvSpPr>
+          <p:nvPr>
+            <p:ph type="sldImg" idx="2"/>
+          </p:nvPr>
+        </p:nvSpPr>
+        <p:spPr>
+          <a:xfrm>
+            <a:off x="1143000" y="685800"/>
+            <a:ext cx="4572000" cy="3429000"/>
+          </a:xfrm>
+          <a:prstGeom prst="rect">
+            <a:avLst/>
+          </a:prstGeom>
+          <a:noFill/>
+          <a:ln w="12700">
+            <a:solidFill>
+              <a:prstClr val="black"/>
+            </a:solidFill>
+          </a:ln>
+        </p:spPr>
+        <p:txBody>
+          <a:bodyPr vert="horz" lIns="91440" tIns="45720" rIns="91440" bIns="45720" rtlCol="0" anchor="ctr"/>
+          <a:lstStyle/>
+          <a:p>
+            <a:endParaRPr lang="en-US"/>
+          </a:p>
+        </p:txBody>
+      </p:sp>
+      <p:sp>
+        <p:nvSpPr>
+          <p:cNvPr id="5" name="Notes Placeholder 4"/>
+          <p:cNvSpPr>
+            <a:spLocks noGrp="1"/>
+          </p:cNvSpPr>
+          <p:nvPr>
+            <p:ph type="body" sz="quarter" idx="3"/>
+          </p:nvPr>
+        </p:nvSpPr>
+        <p:spPr>
+          <a:xfrm>
+            <a:off x="685800" y="4343400"/>
+            <a:ext cx="5486400" cy="4114800"/>
+          </a:xfrm>
+          <a:prstGeom prst="rect">
+            <a:avLst/>
+          </a:prstGeom>
+        </p:spPr>
+        <p:txBody>
+          <a:bodyPr vert="horz" lIns="91440" tIns="45720" rIns="91440" bIns="45720" rtlCol="0"/>
+          <a:lstStyle/>
+          <a:p>
+            <a:pPr lvl="0"/>
+            <a:r>
+              <a:rPr lang="en-US" smtClean="0"/>
+              <a:t>Click to edit Master text styles</a:t>
+            </a:r>
+          </a:p>
+          <a:p>
+            <a:pPr lvl="1"/>
+            <a:r>
+              <a:rPr lang="en-US" smtClean="0"/>
+              <a:t>Second level</a:t>
+            </a:r>
+          </a:p>
+          <a:p>
+            <a:pPr lvl="2"/>
+            <a:r>
+              <a:rPr lang="en-US" smtClean="0"/>
+              <a:t>Third level</a:t>
+            </a:r>
+          </a:p>
+          <a:p>
+            <a:pPr lvl="3"/>
+            <a:r>
+              <a:rPr lang="en-US" smtClean="0"/>
+              <a:t>Fourth level</a:t>
+            </a:r>
+          </a:p>
+          <a:p>
+            <a:pPr lvl="4"/>
+            <a:r>
+              <a:rPr lang="en-US" smtClean="0"/>
+              <a:t>Fifth level</a:t>
+            </a:r>
+            <a:endParaRPr lang="en-US"/>
+          </a:p>
+        </p:txBody>
+      </p:sp>
+      <p:sp>
+        <p:nvSpPr>
+          <p:cNvPr id="6" name="Footer Placeholder 5"/>
+          <p:cNvSpPr>
+            <a:spLocks noGrp="1"/>
+          </p:cNvSpPr>
+          <p:nvPr>
+            <p:ph type="ftr" sz="quarter" idx="4"/>
+          </p:nvPr>
+        </p:nvSpPr>
+        <p:spPr>
+          <a:xfrm>
+            <a:off x="0" y="8685213"/>
+            <a:ext cx="2971800" cy="457200"/>
+          </a:xfrm>
+          <a:prstGeom prst="rect">
+            <a:avLst/>
+          </a:prstGeom>
+        </p:spPr>
+        <p:txBody>
+          <a:bodyPr vert="horz" lIns="91440" tIns="45720" rIns="91440" bIns="45720" rtlCol="0" anchor="b"/>
+          <a:lstStyle>
+            <a:lvl1pPr algn="l">
+              <a:defRPr sz="1200"/>
+            </a:lvl1pPr>
+          </a:lstStyle>
+          <a:p>
+            <a:endParaRPr lang="en-US"/>
+          </a:p>
+        </p:txBody>
+      </p:sp>
+      <p:sp>
+        <p:nvSpPr>
+          <p:cNvPr id="7" name="Slide Number Placeholder 6"/>
+          <p:cNvSpPr>
+            <a:spLocks noGrp="1"/>
+          </p:cNvSpPr>
+          <p:nvPr>
+            <p:ph type="sldNum" sz="quarter" idx="5"/>
+          </p:nvPr>
+        </p:nvSpPr>
+        <p:spPr>
+          <a:xfrm>
+            <a:off x="3884613" y="8685213"/>
+            <a:ext cx="2971800" cy="457200"/>
+          </a:xfrm>
+          <a:prstGeom prst="rect">
+            <a:avLst/>
+          </a:prstGeom>
+        </p:spPr>
+        <p:txBody>
+          <a:bodyPr vert="horz" lIns="91440" tIns="45720" rIns="91440" bIns="45720" rtlCol="0" anchor="b"/>
+          <a:lstStyle>
+            <a:lvl1pPr algn="r">
+              <a:defRPr sz="1200"/>
+            </a:lvl1pPr>
+          </a:lstStyle>
+          <a:p>
+            <a:fld id="{BB5E49A5-4136-284D-997B-48E1D791AD67}" type="slidenum">
+              <a:rPr lang="en-US" smtClean="0"/>
+              <a:t>‹#›</a:t>
+            </a:fld>
+            <a:endParaRPr lang="en-US"/>
+          </a:p>
+        </p:txBody>
+      </p:sp>
+    </p:spTree>
+    <p:extLst>
+      <p:ext uri="{BB962C8B-B14F-4D97-AF65-F5344CB8AC3E}">
+        <p14:creationId xmlns:p14="http://schemas.microsoft.com/office/powerpoint/2010/main" val="2623252185"/>
+      </p:ext>
+    </p:extLst>
+  </p:cSld>
+  <p:clrMap bg1="lt1" tx1="dk1" bg2="lt2" tx2="dk2" accent1="accent1" accent2="accent2" accent3="accent3" accent4="accent4" accent5="accent5" accent6="accent6" hlink="hlink" folHlink="folHlink"/>
+  <p:notesStyle>
+    <a:lvl1pPr marL="0" algn="l" defTabSz="457200" rtl="0" eaLnBrk="1" latinLnBrk="0" hangingPunct="1">
+      <a:defRPr sz="1200" kern="1200">
+        <a:solidFill>
+          <a:schemeClr val="tx1"/>
+        </a:solidFill>
+        <a:latin typeface="+mn-lt"/>
+        <a:ea typeface="+mn-ea"/>
+        <a:cs typeface="+mn-cs"/>
+      </a:defRPr>
+    </a:lvl1pPr>
+    <a:lvl2pPr marL="457200" algn="l" defTabSz="457200" rtl="0" eaLnBrk="1" latinLnBrk="0" hangingPunct="1">
+      <a:defRPr sz="1200" kern="1200">
+        <a:solidFill>
+          <a:schemeClr val="tx1"/>
+        </a:solidFill>
+        <a:latin typeface="+mn-lt"/>
+        <a:ea typeface="+mn-ea"/>
+        <a:cs typeface="+mn-cs"/>
+      </a:defRPr>
+    </a:lvl2pPr>
+    <a:lvl3pPr marL="914400" algn="l" defTabSz="457200" rtl="0" eaLnBrk="1" latinLnBrk="0" hangingPunct="1">
+      <a:defRPr sz="1200" kern="1200">
+        <a:solidFill>
+          <a:schemeClr val="tx1"/>
+        </a:solidFill>
+        <a:latin typeface="+mn-lt"/>
+        <a:ea typeface="+mn-ea"/>
+        <a:cs typeface="+mn-cs"/>
+      </a:defRPr>
+    </a:lvl3pPr>
+    <a:lvl4pPr marL="1371600" algn="l" defTabSz="457200" rtl="0" eaLnBrk="1" latinLnBrk="0" hangingPunct="1">
+      <a:defRPr sz="1200" kern="1200">
+        <a:solidFill>
+          <a:schemeClr val="tx1"/>
+        </a:solidFill>
+        <a:latin typeface="+mn-lt"/>
+        <a:ea typeface="+mn-ea"/>
+        <a:cs typeface="+mn-cs"/>
+      </a:defRPr>
+    </a:lvl4pPr>
+    <a:lvl5pPr marL="1828800" algn="l" defTabSz="457200" rtl="0" eaLnBrk="1" latinLnBrk="0" hangingPunct="1">
+      <a:defRPr sz="1200" kern="1200">
+        <a:solidFill>
+          <a:schemeClr val="tx1"/>
+        </a:solidFill>
+        <a:latin typeface="+mn-lt"/>
+        <a:ea typeface="+mn-ea"/>
+        <a:cs typeface="+mn-cs"/>
+      </a:defRPr>
+    </a:lvl5pPr>
+    <a:lvl6pPr marL="2286000" algn="l" defTabSz="457200" rtl="0" eaLnBrk="1" latinLnBrk="0" hangingPunct="1">
+      <a:defRPr sz="1200" kern="1200">
+        <a:solidFill>
+          <a:schemeClr val="tx1"/>
+        </a:solidFill>
+        <a:latin typeface="+mn-lt"/>
+        <a:ea typeface="+mn-ea"/>
+        <a:cs typeface="+mn-cs"/>
+      </a:defRPr>
+    </a:lvl6pPr>
+    <a:lvl7pPr marL="2743200" algn="l" defTabSz="457200" rtl="0" eaLnBrk="1" latinLnBrk="0" hangingPunct="1">
+      <a:defRPr sz="1200" kern="1200">
+        <a:solidFill>
+          <a:schemeClr val="tx1"/>
+        </a:solidFill>
+        <a:latin typeface="+mn-lt"/>
+        <a:ea typeface="+mn-ea"/>
+        <a:cs typeface="+mn-cs"/>
+      </a:defRPr>
+    </a:lvl7pPr>
+    <a:lvl8pPr marL="3200400" algn="l" defTabSz="457200" rtl="0" eaLnBrk="1" latinLnBrk="0" hangingPunct="1">
+      <a:defRPr sz="1200" kern="1200">
+        <a:solidFill>
+          <a:schemeClr val="tx1"/>
+        </a:solidFill>
+        <a:latin typeface="+mn-lt"/>
+        <a:ea typeface="+mn-ea"/>
+        <a:cs typeface="+mn-cs"/>
+      </a:defRPr>
+    </a:lvl8pPr>
+    <a:lvl9pPr marL="3657600" algn="l" defTabSz="457200" rtl="0" eaLnBrk="1" latinLnBrk="0" hangingPunct="1">
+      <a:defRPr sz="1200" kern="1200">
+        <a:solidFill>
+          <a:schemeClr val="tx1"/>
+        </a:solidFill>
+        <a:latin typeface="+mn-lt"/>
+        <a:ea typeface="+mn-ea"/>
+        <a:cs typeface="+mn-cs"/>
+      </a:defRPr>
+    </a:lvl9pPr>
+  </p:notesStyle>
+</p:notesMaster>
+</file>
+
+<file path=ppt/notesSlides/notesSlide1.xml><?xml version="1.0" encoding="utf-8"?>
+<p:notes xmlns:a="http://schemas.openxmlformats.org/drawingml/2006/main" xmlns:p="http://schemas.openxmlformats.org/presentationml/2006/main" xmlns:r="http://schemas.openxmlformats.org/officeDocument/2006/relationships">
+  <p:cSld>
+    <p:spTree>
+      <p:nvGrpSpPr>
+        <p:cNvPr id="1" name=""/>
+        <p:cNvGrpSpPr/>
+        <p:nvPr/>
+      </p:nvGrpSpPr>
+      <p:grpSpPr>
+        <a:xfrm>
+          <a:off x="0" y="0"/>
+          <a:ext cx="0" cy="0"/>
+          <a:chOff x="0" y="0"/>
+          <a:chExt cx="0" cy="0"/>
+        </a:xfrm>
+      </p:grpSpPr>
+      <p:sp>
+        <p:nvSpPr>
+          <p:cNvPr id="2" name="Slide Image Placeholder 1"/>
+          <p:cNvSpPr>
+            <a:spLocks noGrp="1"/>
+          </p:cNvSpPr>
+          <p:nvPr>
+            <p:ph type="sldImg" idx="2"/>
+          </p:nvPr>
+        </p:nvSpPr>
+        <p:spPr/>
+      </p:sp>
+      <p:sp>
+        <p:nvSpPr>
+          <p:cNvPr id="3" name="Notes Placeholder 2"/>
+          <p:cNvSpPr>
+            <a:spLocks noGrp="1"/>
+          </p:cNvSpPr>
+          <p:nvPr>
+            <p:ph type="body" idx="3" sz="quarter"/>
+          </p:nvPr>
+        </p:nvSpPr>
+        <p:spPr/>
+        <p:txBody>
+          <a:bodyPr/>
+          <a:lstStyle/>
+          <a:p>
+            <a:r>
+              <a:t>Re-anchor the exam metaphor before anything new: train rows are the study material, validation is the practice tests, the test set is the final you sit exactly once. Today never leaves the study material - every value we compute comes from the 712 training rows. Ask the class: why does even an average count as 'part of the model'?</a:t>
+            </a:r>
+          </a:p>
+        </p:txBody>
+      </p:sp>
+      <p:sp>
+        <p:nvSpPr>
+          <p:cNvPr id="4" name="Slide Number Placeholder 3"/>
+          <p:cNvSpPr>
+            <a:spLocks noGrp="1"/>
+          </p:cNvSpPr>
+          <p:nvPr>
+            <p:ph type="sldNum" idx="5" sz="quarter"/>
+          </p:nvPr>
+        </p:nvSpPr>
+        <p:spPr/>
+      </p:sp>
+    </p:spTree>
+  </p:cSld>
+  <p:clrMapOvr>
+    <a:masterClrMapping/>
+  </p:clrMapOvr>
+</p:notes>
+</file>
+
+<file path=ppt/notesSlides/notesSlide2.xml><?xml version="1.0" encoding="utf-8"?>
+<p:notes xmlns:a="http://schemas.openxmlformats.org/drawingml/2006/main" xmlns:p="http://schemas.openxmlformats.org/presentationml/2006/main" xmlns:r="http://schemas.openxmlformats.org/officeDocument/2006/relationships">
+  <p:cSld>
+    <p:spTree>
+      <p:nvGrpSpPr>
+        <p:cNvPr id="1" name=""/>
+        <p:cNvGrpSpPr/>
+        <p:nvPr/>
+      </p:nvGrpSpPr>
+      <p:grpSpPr>
+        <a:xfrm>
+          <a:off x="0" y="0"/>
+          <a:ext cx="0" cy="0"/>
+          <a:chOff x="0" y="0"/>
+          <a:chExt cx="0" cy="0"/>
+        </a:xfrm>
+      </p:grpSpPr>
+      <p:sp>
+        <p:nvSpPr>
+          <p:cNvPr id="2" name="Slide Image Placeholder 1"/>
+          <p:cNvSpPr>
+            <a:spLocks noGrp="1"/>
+          </p:cNvSpPr>
+          <p:nvPr>
+            <p:ph type="sldImg" idx="2"/>
+          </p:nvPr>
+        </p:nvSpPr>
+        <p:spPr/>
+      </p:sp>
+      <p:sp>
+        <p:nvSpPr>
+          <p:cNvPr id="3" name="Notes Placeholder 2"/>
+          <p:cNvSpPr>
+            <a:spLocks noGrp="1"/>
+          </p:cNvSpPr>
+          <p:nvPr>
+            <p:ph type="body" idx="3" sz="quarter"/>
+          </p:nvPr>
+        </p:nvSpPr>
+        <p:spPr/>
+        <p:txBody>
+          <a:bodyPr/>
+          <a:lstStyle/>
+          <a:p>
+            <a:r>
+              <a:t>The model never meets Frankie - it meets the row of numbers you built to stand for him, and that row is its entire world. Point at the two panels: the dots never move, only the axis changes, and suddenly a straight line fits. That is the whole chapter in one picture. Ask the class: if the model only sees the numbers, who is responsible when it sees the world wrongly?</a:t>
+            </a:r>
+          </a:p>
+        </p:txBody>
+      </p:sp>
+      <p:sp>
+        <p:nvSpPr>
+          <p:cNvPr id="4" name="Slide Number Placeholder 3"/>
+          <p:cNvSpPr>
+            <a:spLocks noGrp="1"/>
+          </p:cNvSpPr>
+          <p:nvPr>
+            <p:ph type="sldNum" idx="5" sz="quarter"/>
+          </p:nvPr>
+        </p:nvSpPr>
+        <p:spPr/>
+      </p:sp>
+    </p:spTree>
+  </p:cSld>
+  <p:clrMapOvr>
+    <a:masterClrMapping/>
+  </p:clrMapOvr>
+</p:notes>
+</file>
+
+<file path=ppt/notesSlides/notesSlide3.xml><?xml version="1.0" encoding="utf-8"?>
+<p:notes xmlns:a="http://schemas.openxmlformats.org/drawingml/2006/main" xmlns:p="http://schemas.openxmlformats.org/presentationml/2006/main" xmlns:r="http://schemas.openxmlformats.org/officeDocument/2006/relationships">
+  <p:cSld>
+    <p:spTree>
+      <p:nvGrpSpPr>
+        <p:cNvPr id="1" name=""/>
+        <p:cNvGrpSpPr/>
+        <p:nvPr/>
+      </p:nvGrpSpPr>
+      <p:grpSpPr>
+        <a:xfrm>
+          <a:off x="0" y="0"/>
+          <a:ext cx="0" cy="0"/>
+          <a:chOff x="0" y="0"/>
+          <a:chExt cx="0" cy="0"/>
+        </a:xfrm>
+      </p:grpSpPr>
+      <p:sp>
+        <p:nvSpPr>
+          <p:cNvPr id="2" name="Slide Image Placeholder 1"/>
+          <p:cNvSpPr>
+            <a:spLocks noGrp="1"/>
+          </p:cNvSpPr>
+          <p:nvPr>
+            <p:ph type="sldImg" idx="2"/>
+          </p:nvPr>
+        </p:nvSpPr>
+        <p:spPr/>
+      </p:sp>
+      <p:sp>
+        <p:nvSpPr>
+          <p:cNvPr id="3" name="Notes Placeholder 2"/>
+          <p:cNvSpPr>
+            <a:spLocks noGrp="1"/>
+          </p:cNvSpPr>
+          <p:nvPr>
+            <p:ph type="body" idx="3" sz="quarter"/>
+          </p:nvPr>
+        </p:nvSpPr>
+        <p:spPr/>
+        <p:txBody>
+          <a:bodyPr/>
+          <a:lstStyle/>
+          <a:p>
+            <a:r>
+              <a:t>The kitchen line: models are picky eaters - they only eat numbers, refuse plates with gaps, and complain when portions are on wildly different scales. Each row of the table is one complaint and its fix: encoding, imputation, scaling. Ask the class: what would the model make of the word 'Southampton' if we fed it raw?</a:t>
+            </a:r>
+          </a:p>
+        </p:txBody>
+      </p:sp>
+      <p:sp>
+        <p:nvSpPr>
+          <p:cNvPr id="4" name="Slide Number Placeholder 3"/>
+          <p:cNvSpPr>
+            <a:spLocks noGrp="1"/>
+          </p:cNvSpPr>
+          <p:nvPr>
+            <p:ph type="sldNum" idx="5" sz="quarter"/>
+          </p:nvPr>
+        </p:nvSpPr>
+        <p:spPr/>
+      </p:sp>
+    </p:spTree>
+  </p:cSld>
+  <p:clrMapOvr>
+    <a:masterClrMapping/>
+  </p:clrMapOvr>
+</p:notes>
+</file>
+
+<file path=ppt/notesSlides/notesSlide4.xml><?xml version="1.0" encoding="utf-8"?>
+<p:notes xmlns:a="http://schemas.openxmlformats.org/drawingml/2006/main" xmlns:p="http://schemas.openxmlformats.org/presentationml/2006/main" xmlns:r="http://schemas.openxmlformats.org/officeDocument/2006/relationships">
+  <p:cSld>
+    <p:spTree>
+      <p:nvGrpSpPr>
+        <p:cNvPr id="1" name=""/>
+        <p:cNvGrpSpPr/>
+        <p:nvPr/>
+      </p:nvGrpSpPr>
+      <p:grpSpPr>
+        <a:xfrm>
+          <a:off x="0" y="0"/>
+          <a:ext cx="0" cy="0"/>
+          <a:chOff x="0" y="0"/>
+          <a:chExt cx="0" cy="0"/>
+        </a:xfrm>
+      </p:grpSpPr>
+      <p:sp>
+        <p:nvSpPr>
+          <p:cNvPr id="2" name="Slide Image Placeholder 1"/>
+          <p:cNvSpPr>
+            <a:spLocks noGrp="1"/>
+          </p:cNvSpPr>
+          <p:nvPr>
+            <p:ph type="sldImg" idx="2"/>
+          </p:nvPr>
+        </p:nvSpPr>
+        <p:spPr/>
+      </p:sp>
+      <p:sp>
+        <p:nvSpPr>
+          <p:cNvPr id="3" name="Notes Placeholder 2"/>
+          <p:cNvSpPr>
+            <a:spLocks noGrp="1"/>
+          </p:cNvSpPr>
+          <p:nvPr>
+            <p:ph type="body" idx="3" sz="quarter"/>
+          </p:nvPr>
+        </p:nvSpPr>
+        <p:spPr/>
+        <p:txBody>
+          <a:bodyPr/>
+          <a:lstStyle/>
+          <a:p>
+            <a:r>
+              <a:t>Harvard's device: MCAR is poking holes in the table blindfolded - annoying but fair. MAR holes cluster where another visible column points, so ignoring them biases you. MNAR holes are caused by the very value that is missing - no fill can see that. The deciding information is missing by definition, so the table cannot settle it. Run the discussion: which species are our 177 missing ages? Any argued answer beats a certain one.</a:t>
+            </a:r>
+          </a:p>
+        </p:txBody>
+      </p:sp>
+      <p:sp>
+        <p:nvSpPr>
+          <p:cNvPr id="4" name="Slide Number Placeholder 3"/>
+          <p:cNvSpPr>
+            <a:spLocks noGrp="1"/>
+          </p:cNvSpPr>
+          <p:nvPr>
+            <p:ph type="sldNum" idx="5" sz="quarter"/>
+          </p:nvPr>
+        </p:nvSpPr>
+        <p:spPr/>
+      </p:sp>
+    </p:spTree>
+  </p:cSld>
+  <p:clrMapOvr>
+    <a:masterClrMapping/>
+  </p:clrMapOvr>
+</p:notes>
+</file>
+
+<file path=ppt/notesSlides/notesSlide5.xml><?xml version="1.0" encoding="utf-8"?>
+<p:notes xmlns:a="http://schemas.openxmlformats.org/drawingml/2006/main" xmlns:p="http://schemas.openxmlformats.org/presentationml/2006/main" xmlns:r="http://schemas.openxmlformats.org/officeDocument/2006/relationships">
+  <p:cSld>
+    <p:spTree>
+      <p:nvGrpSpPr>
+        <p:cNvPr id="1" name=""/>
+        <p:cNvGrpSpPr/>
+        <p:nvPr/>
+      </p:nvGrpSpPr>
+      <p:grpSpPr>
+        <a:xfrm>
+          <a:off x="0" y="0"/>
+          <a:ext cx="0" cy="0"/>
+          <a:chOff x="0" y="0"/>
+          <a:chExt cx="0" cy="0"/>
+        </a:xfrm>
+      </p:grpSpPr>
+      <p:sp>
+        <p:nvSpPr>
+          <p:cNvPr id="2" name="Slide Image Placeholder 1"/>
+          <p:cNvSpPr>
+            <a:spLocks noGrp="1"/>
+          </p:cNvSpPr>
+          <p:nvPr>
+            <p:ph type="sldImg" idx="2"/>
+          </p:nvPr>
+        </p:nvSpPr>
+        <p:spPr/>
+      </p:sp>
+      <p:sp>
+        <p:nvSpPr>
+          <p:cNvPr id="3" name="Notes Placeholder 2"/>
+          <p:cNvSpPr>
+            <a:spLocks noGrp="1"/>
+          </p:cNvSpPr>
+          <p:nvPr>
+            <p:ph type="body" idx="3" sz="quarter"/>
+          </p:nvPr>
+        </p:nvSpPr>
+        <p:spPr/>
+        <p:txBody>
+          <a:bodyPr/>
+          <a:lstStyle/>
+          <a:p>
+            <a:r>
+              <a:t>Frame encoding as translation into the only language the model speaks - numbers - and honesty as translating without adding claims. Coding red=1, blue=2 quietly tells the model blue is twice red; it will believe you. One-hot claims nothing, the thermometer claims only order, keeping a real number claims real distances. Ask the class: is T-shirt size S/M/L more like Embarked or more like Age?</a:t>
+            </a:r>
+          </a:p>
+        </p:txBody>
+      </p:sp>
+      <p:sp>
+        <p:nvSpPr>
+          <p:cNvPr id="4" name="Slide Number Placeholder 3"/>
+          <p:cNvSpPr>
+            <a:spLocks noGrp="1"/>
+          </p:cNvSpPr>
+          <p:nvPr>
+            <p:ph type="sldNum" idx="5" sz="quarter"/>
+          </p:nvPr>
+        </p:nvSpPr>
+        <p:spPr/>
+      </p:sp>
+    </p:spTree>
+  </p:cSld>
+  <p:clrMapOvr>
+    <a:masterClrMapping/>
+  </p:clrMapOvr>
+</p:notes>
+</file>
+
+<file path=ppt/notesSlides/notesSlide6.xml><?xml version="1.0" encoding="utf-8"?>
+<p:notes xmlns:a="http://schemas.openxmlformats.org/drawingml/2006/main" xmlns:p="http://schemas.openxmlformats.org/presentationml/2006/main" xmlns:r="http://schemas.openxmlformats.org/officeDocument/2006/relationships">
+  <p:cSld>
+    <p:spTree>
+      <p:nvGrpSpPr>
+        <p:cNvPr id="1" name=""/>
+        <p:cNvGrpSpPr/>
+        <p:nvPr/>
+      </p:nvGrpSpPr>
+      <p:grpSpPr>
+        <a:xfrm>
+          <a:off x="0" y="0"/>
+          <a:ext cx="0" cy="0"/>
+          <a:chOff x="0" y="0"/>
+          <a:chExt cx="0" cy="0"/>
+        </a:xfrm>
+      </p:grpSpPr>
+      <p:sp>
+        <p:nvSpPr>
+          <p:cNvPr id="2" name="Slide Image Placeholder 1"/>
+          <p:cNvSpPr>
+            <a:spLocks noGrp="1"/>
+          </p:cNvSpPr>
+          <p:nvPr>
+            <p:ph type="sldImg" idx="2"/>
+          </p:nvPr>
+        </p:nvSpPr>
+        <p:spPr/>
+      </p:sp>
+      <p:sp>
+        <p:nvSpPr>
+          <p:cNvPr id="3" name="Notes Placeholder 2"/>
+          <p:cNvSpPr>
+            <a:spLocks noGrp="1"/>
+          </p:cNvSpPr>
+          <p:nvPr>
+            <p:ph type="body" idx="3" sz="quarter"/>
+          </p:nvPr>
+        </p:nvSpPr>
+        <p:spPr/>
+        <p:txBody>
+          <a:bodyPr/>
+          <a:lstStyle/>
+          <a:p>
+            <a:r>
+              <a:t>Ng's contour story: the downhill walk from Session 1 happens on a landscape, and unequal scales stretch that landscape into a skinny valley - the walker zigzags and crawls. Rescale and the valley becomes a round bowl: straight to the bottom. The destination never moves, only the trip changes. Ask the class: which of our columns stretches the valley worst, Fare or Age?</a:t>
+            </a:r>
+          </a:p>
+        </p:txBody>
+      </p:sp>
+      <p:sp>
+        <p:nvSpPr>
+          <p:cNvPr id="4" name="Slide Number Placeholder 3"/>
+          <p:cNvSpPr>
+            <a:spLocks noGrp="1"/>
+          </p:cNvSpPr>
+          <p:nvPr>
+            <p:ph type="sldNum" idx="5" sz="quarter"/>
+          </p:nvPr>
+        </p:nvSpPr>
+        <p:spPr/>
+      </p:sp>
+    </p:spTree>
+  </p:cSld>
+  <p:clrMapOvr>
+    <a:masterClrMapping/>
+  </p:clrMapOvr>
+</p:notes>
+</file>
+
+<file path=ppt/notesSlides/notesSlide7.xml><?xml version="1.0" encoding="utf-8"?>
+<p:notes xmlns:a="http://schemas.openxmlformats.org/drawingml/2006/main" xmlns:p="http://schemas.openxmlformats.org/presentationml/2006/main" xmlns:r="http://schemas.openxmlformats.org/officeDocument/2006/relationships">
+  <p:cSld>
+    <p:spTree>
+      <p:nvGrpSpPr>
+        <p:cNvPr id="1" name=""/>
+        <p:cNvGrpSpPr/>
+        <p:nvPr/>
+      </p:nvGrpSpPr>
+      <p:grpSpPr>
+        <a:xfrm>
+          <a:off x="0" y="0"/>
+          <a:ext cx="0" cy="0"/>
+          <a:chOff x="0" y="0"/>
+          <a:chExt cx="0" cy="0"/>
+        </a:xfrm>
+      </p:grpSpPr>
+      <p:sp>
+        <p:nvSpPr>
+          <p:cNvPr id="2" name="Slide Image Placeholder 1"/>
+          <p:cNvSpPr>
+            <a:spLocks noGrp="1"/>
+          </p:cNvSpPr>
+          <p:nvPr>
+            <p:ph type="sldImg" idx="2"/>
+          </p:nvPr>
+        </p:nvSpPr>
+        <p:spPr/>
+      </p:sp>
+      <p:sp>
+        <p:nvSpPr>
+          <p:cNvPr id="3" name="Notes Placeholder 2"/>
+          <p:cNvSpPr>
+            <a:spLocks noGrp="1"/>
+          </p:cNvSpPr>
+          <p:nvPr>
+            <p:ph type="body" idx="3" sz="quarter"/>
+          </p:nvPr>
+        </p:nvSpPr>
+        <p:spPr/>
+        <p:txBody>
+          <a:bodyPr/>
+          <a:lstStyle/>
+          <a:p>
+            <a:r>
+              <a:t>Walk the picture slowly: four corner points, diagonal corners share a class, and no straight line will ever split them - let students try. Then multiply the two coordinates into one new column and the four points sort themselves onto two spots a single threshold separates. We never touched the model - we changed what it looks at. Ask the class: did the model get smarter, or did the world get simpler?</a:t>
+            </a:r>
+          </a:p>
+        </p:txBody>
+      </p:sp>
+      <p:sp>
+        <p:nvSpPr>
+          <p:cNvPr id="4" name="Slide Number Placeholder 3"/>
+          <p:cNvSpPr>
+            <a:spLocks noGrp="1"/>
+          </p:cNvSpPr>
+          <p:nvPr>
+            <p:ph type="sldNum" idx="5" sz="quarter"/>
+          </p:nvPr>
+        </p:nvSpPr>
+        <p:spPr/>
+      </p:sp>
+    </p:spTree>
+  </p:cSld>
+  <p:clrMapOvr>
+    <a:masterClrMapping/>
+  </p:clrMapOvr>
+</p:notes>
+</file>
+
+<file path=ppt/notesSlides/notesSlide8.xml><?xml version="1.0" encoding="utf-8"?>
+<p:notes xmlns:a="http://schemas.openxmlformats.org/drawingml/2006/main" xmlns:p="http://schemas.openxmlformats.org/presentationml/2006/main" xmlns:r="http://schemas.openxmlformats.org/officeDocument/2006/relationships">
+  <p:cSld>
+    <p:spTree>
+      <p:nvGrpSpPr>
+        <p:cNvPr id="1" name=""/>
+        <p:cNvGrpSpPr/>
+        <p:nvPr/>
+      </p:nvGrpSpPr>
+      <p:grpSpPr>
+        <a:xfrm>
+          <a:off x="0" y="0"/>
+          <a:ext cx="0" cy="0"/>
+          <a:chOff x="0" y="0"/>
+          <a:chExt cx="0" cy="0"/>
+        </a:xfrm>
+      </p:grpSpPr>
+      <p:sp>
+        <p:nvSpPr>
+          <p:cNvPr id="2" name="Slide Image Placeholder 1"/>
+          <p:cNvSpPr>
+            <a:spLocks noGrp="1"/>
+          </p:cNvSpPr>
+          <p:nvPr>
+            <p:ph type="sldImg" idx="2"/>
+          </p:nvPr>
+        </p:nvSpPr>
+        <p:spPr/>
+      </p:sp>
+      <p:sp>
+        <p:nvSpPr>
+          <p:cNvPr id="3" name="Notes Placeholder 2"/>
+          <p:cNvSpPr>
+            <a:spLocks noGrp="1"/>
+          </p:cNvSpPr>
+          <p:nvPr>
+            <p:ph type="body" idx="3" sz="quarter"/>
+          </p:nvPr>
+        </p:nvSpPr>
+        <p:spPr/>
+        <p:txBody>
+          <a:bodyPr/>
+          <a:lstStyle/>
+          <a:p>
+            <a:r>
+              <a:t>Stay in the kitchen: the line is the cook, the columns are the ingredients. Hand the cook x squared as one more ingredient and the same recipe starts producing curves - no new cook, no new technique. But every extra ingredient is also freedom to cook nonsense that matches noise; Session 3 puts a price on that. Ask the class: what column would you hand the line so it could bend twice?</a:t>
+            </a:r>
+          </a:p>
+        </p:txBody>
+      </p:sp>
+      <p:sp>
+        <p:nvSpPr>
+          <p:cNvPr id="4" name="Slide Number Placeholder 3"/>
+          <p:cNvSpPr>
+            <a:spLocks noGrp="1"/>
+          </p:cNvSpPr>
+          <p:nvPr>
+            <p:ph type="sldNum" idx="5" sz="quarter"/>
+          </p:nvPr>
+        </p:nvSpPr>
+        <p:spPr/>
+      </p:sp>
+    </p:spTree>
+  </p:cSld>
+  <p:clrMapOvr>
+    <a:masterClrMapping/>
+  </p:clrMapOvr>
+</p:notes>
 </file>
 
 <file path=ppt/slideLayouts/slideLayout1.xml><?xml version="1.0" encoding="utf-8"?>
@@ -3622,7 +4532,7 @@
                 </a:solidFill>
                 <a:latin typeface="Arial"/>
               </a:rPr>
-              <a:t>Basis expansion: append transformed copies of the columns you already have - x squared, x cubed, x1 * x2 - as new features</a:t>
+              <a:t>Basis expansion - in plain words: give the line new ingredients (x squared) and it can cook curves</a:t>
             </a:r>
           </a:p>
           <a:p>
@@ -3642,7 +4552,7 @@
                 </a:solidFill>
                 <a:latin typeface="Arial"/>
               </a:rPr>
-              <a:t>Nothing about the fitter changes: it is still a linear model, just reading a wider table - the same math finds the weights</a:t>
+              <a:t>Append transformed copies of columns you already have - x squared, x cubed, x1 * x2 - as new features</a:t>
             </a:r>
           </a:p>
           <a:p>
@@ -3662,7 +4572,7 @@
                 </a:solidFill>
                 <a:latin typeface="Arial"/>
               </a:rPr>
-              <a:t>A line in the expanded coordinates is a curve in the original ones - flexibility bought with features, not with a new algorithm</a:t>
+              <a:t>Nothing about the fitter changes: still a linear model, just reading a wider table</a:t>
             </a:r>
           </a:p>
           <a:p>
@@ -3682,7 +4592,7 @@
                 </a:solidFill>
                 <a:latin typeface="Arial"/>
               </a:rPr>
-              <a:t>XOR's product feature (previous slide) is the same family: powers and products of what you already measured</a:t>
+              <a:t>A line in the new coordinates is a curve in the old ones - flexibility bought with features, not a new algorithm</a:t>
             </a:r>
           </a:p>
           <a:p>
@@ -3702,7 +4612,27 @@
                 </a:solidFill>
                 <a:latin typeface="Arial"/>
               </a:rPr>
-              <a:t>The price: every added column is flexibility the model can spend on noise - Session 3: what too much flexibility costs</a:t>
+              <a:t>XOR's product column (previous slide) is the same family: powers and products of what you measured</a:t>
+            </a:r>
+          </a:p>
+          <a:p>
+            <a:pPr algn="l" indent="-228600" marL="228600">
+              <a:spcAft>
+                <a:spcPts val="800"/>
+              </a:spcAft>
+              <a:buClr>
+                <a:srgbClr val="1E5EF3"/>
+              </a:buClr>
+              <a:buChar char="—"/>
+            </a:pPr>
+            <a:r>
+              <a:rPr sz="1450" b="0">
+                <a:solidFill>
+                  <a:srgbClr val="202B38"/>
+                </a:solidFill>
+                <a:latin typeface="Arial"/>
+              </a:rPr>
+              <a:t>The price: every added column is flexibility the model can spend on noise - Session 3 counts that cost</a:t>
             </a:r>
           </a:p>
         </p:txBody>
@@ -4381,7 +5311,7 @@
                 </a:solidFill>
                 <a:latin typeface="Arial"/>
               </a:rPr>
-              <a:t>SimpleImputer(strategy="median"): fit(train) learns median Age 28.5</a:t>
+              <a:t>SimpleImputer(strategy="median"): fit(train) learns median (the middle value) Age 28.5</a:t>
             </a:r>
           </a:p>
           <a:p>
@@ -6547,7 +7477,7 @@
                 </a:solidFill>
                 <a:latin typeface="Arial"/>
               </a:rPr>
-              <a:t>Regex " ([A-Za-z]+)\." grabs the word before the period - the title</a:t>
+              <a:t>A regex (text-search pattern) " ([A-Za-z]+)\." grabs the word before the period - the title</a:t>
             </a:r>
           </a:p>
           <a:p>
@@ -9127,7 +10057,27 @@
                 </a:solidFill>
                 <a:latin typeface="Arial"/>
               </a:rPr>
-              <a:t>Golden rule restated: the model never sees test data during preparation - anything learned FROM data (an imputation value, a scaler) is part of the model</a:t>
+              <a:t>In exam terms: study on the train rows, pick your strategy with practice tests, sit the final once</a:t>
+            </a:r>
+          </a:p>
+          <a:p>
+            <a:pPr algn="l" indent="-228600" marL="228600">
+              <a:spcAft>
+                <a:spcPts val="800"/>
+              </a:spcAft>
+              <a:buClr>
+                <a:srgbClr val="1E5EF3"/>
+              </a:buClr>
+              <a:buChar char="—"/>
+            </a:pPr>
+            <a:r>
+              <a:rPr sz="1450" b="0">
+                <a:solidFill>
+                  <a:srgbClr val="202B38"/>
+                </a:solidFill>
+                <a:latin typeface="Arial"/>
+              </a:rPr>
+              <a:t>Golden rule restated: anything learned FROM data (a fill-in value, a scaler) is part of the model - so it must never see test rows</a:t>
             </a:r>
           </a:p>
           <a:p>
@@ -9493,7 +10443,7 @@
                 </a:solidFill>
                 <a:latin typeface="Arial"/>
               </a:rPr>
-              <a:t>Before any code: the model only sees the numbers you construct - missing values, encodings, scales, and expanded features are design decisions, not chores</a:t>
+              <a:t>A vector is just a row of numbers. Before any code: the model only sees the numbers you construct - missing values, encodings, scales, and expanded features are design decisions, not chores</a:t>
             </a:r>
           </a:p>
         </p:txBody>
@@ -9846,7 +10796,7 @@
                 </a:solidFill>
                 <a:latin typeface="Arial"/>
               </a:rPr>
-              <a:t>The model never meets a passenger - it meets the row of numbers you built for one; the representation IS its whole world</a:t>
+              <a:t>Representation - in plain words: the row of numbers you choose to describe each passenger with</a:t>
             </a:r>
           </a:p>
           <a:p>
@@ -9866,7 +10816,7 @@
                 </a:solidFill>
                 <a:latin typeface="Arial"/>
               </a:rPr>
-              <a:t>For tabular problems the representation often matters more than the algorithm: a simple model on good features routinely beats a fancy model on raw ones</a:t>
+              <a:t>The model never meets a passenger - it meets that row; the representation IS its whole world</a:t>
             </a:r>
           </a:p>
           <a:p>
@@ -9886,7 +10836,7 @@
                 </a:solidFill>
                 <a:latin typeface="Arial"/>
               </a:rPr>
-              <a:t>The core trick: transform the inputs, keep the model - new coordinates, same line-fitter</a:t>
+              <a:t>Good features beat fancy algorithms: a simple model on good columns routinely wins on tables</a:t>
             </a:r>
           </a:p>
           <a:p>
@@ -9906,7 +10856,7 @@
                 </a:solidFill>
                 <a:latin typeface="Arial"/>
               </a:rPr>
-              <a:t>Change the features, change the geometry: the same points can defeat a line in one coordinate system and line up in another</a:t>
+              <a:t>The core trick: transform the inputs, keep the model - same line-fitter, new coordinates</a:t>
             </a:r>
           </a:p>
           <a:p>
@@ -9926,7 +10876,27 @@
                 </a:solidFill>
                 <a:latin typeface="Arial"/>
               </a:rPr>
-              <a:t>This chapter: the principled moves - missingness, encodings, scaling, expansion - and why each one is honest</a:t>
+              <a:t>Look right: the same points defeat a line on one axis and line up perfectly on another</a:t>
+            </a:r>
+          </a:p>
+          <a:p>
+            <a:pPr algn="l" indent="-228600" marL="228600">
+              <a:spcAft>
+                <a:spcPts val="800"/>
+              </a:spcAft>
+              <a:buClr>
+                <a:srgbClr val="1E5EF3"/>
+              </a:buClr>
+              <a:buChar char="—"/>
+            </a:pPr>
+            <a:r>
+              <a:rPr sz="1450" b="0">
+                <a:solidFill>
+                  <a:srgbClr val="202B38"/>
+                </a:solidFill>
+                <a:latin typeface="Arial"/>
+              </a:rPr>
+              <a:t>This chapter: the principled moves - gaps, encodings, scaling, expansion - and why each is honest</a:t>
             </a:r>
           </a:p>
         </p:txBody>
@@ -11064,7 +12034,7 @@
                 </a:solidFill>
                 <a:latin typeface="Arial"/>
               </a:rPr>
-              <a:t>Three species: MCAR (random holes), MAR (holes explained by other columns), MNAR (holes caused by the hidden value itself)</a:t>
+              <a:t>MCAR - in plain words: holes poked blindfolded; nothing decides where they land</a:t>
             </a:r>
           </a:p>
           <a:p>
@@ -11084,7 +12054,47 @@
                 </a:solidFill>
                 <a:latin typeface="Arial"/>
               </a:rPr>
-              <a:t>The punchline: the deciding variables are unobserved by definition - the data alone can never tell you the type; you must reason about the world</a:t>
+              <a:t>MAR: the chance of a hole depends on OTHER columns you can see (third class recorded less often?)</a:t>
+            </a:r>
+          </a:p>
+          <a:p>
+            <a:pPr algn="l" indent="-228600" marL="228600">
+              <a:spcAft>
+                <a:spcPts val="800"/>
+              </a:spcAft>
+              <a:buClr>
+                <a:srgbClr val="1E5EF3"/>
+              </a:buClr>
+              <a:buChar char="—"/>
+            </a:pPr>
+            <a:r>
+              <a:rPr sz="1450" b="0">
+                <a:solidFill>
+                  <a:srgbClr val="202B38"/>
+                </a:solidFill>
+                <a:latin typeface="Arial"/>
+              </a:rPr>
+              <a:t>MNAR: the hole is caused by the hidden value itself - the nastiest species</a:t>
+            </a:r>
+          </a:p>
+          <a:p>
+            <a:pPr algn="l" indent="-228600" marL="228600">
+              <a:spcAft>
+                <a:spcPts val="800"/>
+              </a:spcAft>
+              <a:buClr>
+                <a:srgbClr val="1E5EF3"/>
+              </a:buClr>
+              <a:buChar char="—"/>
+            </a:pPr>
+            <a:r>
+              <a:rPr sz="1450" b="0">
+                <a:solidFill>
+                  <a:srgbClr val="202B38"/>
+                </a:solidFill>
+                <a:latin typeface="Arial"/>
+              </a:rPr>
+              <a:t>The punchline: the data alone can never tell you which - you must reason about the world</a:t>
             </a:r>
           </a:p>
           <a:p>
@@ -11521,7 +12531,7 @@
                 </a:solidFill>
                 <a:latin typeface="Arial"/>
               </a:rPr>
-              <a:t>No real order (Embarked C/Q/S): one-hot - one 0/1 column per category, exactly one hot; every pair of categories sits at the same distance</a:t>
+              <a:t>Encoding - in plain words: translating the world into the only language the model speaks: numbers - without accidentally lying</a:t>
             </a:r>
           </a:p>
           <a:p>
@@ -11541,7 +12551,7 @@
                 </a:solidFill>
                 <a:latin typeface="Arial"/>
               </a:rPr>
-              <a:t>Real order, unknown spacing (S &lt; M &lt; L): a thermometer / ordinal code keeps the ranking without inventing distances</a:t>
+              <a:t>No real order (Embarked C/Q/S): one-hot - one 0/1 column per category, exactly one switched on</a:t>
             </a:r>
           </a:p>
           <a:p>
@@ -11561,7 +12571,7 @@
                 </a:solidFill>
                 <a:latin typeface="Arial"/>
               </a:rPr>
-              <a:t>True quantities (Age, Fare): keep numeric, then standardize so no column dominates just because of its units</a:t>
+              <a:t>Real order, unknown spacing (S &lt; M &lt; L): a thermometer code keeps the ranking, invents no distances</a:t>
             </a:r>
           </a:p>
           <a:p>
@@ -11581,7 +12591,27 @@
                 </a:solidFill>
                 <a:latin typeface="Arial"/>
               </a:rPr>
-              <a:t>Never arbitrary integers: C=1, Q=2, S=3 claims S is three times C - a fake order lies about distance, and the model learns the lie</a:t>
+              <a:t>True quantities (Age, Fare): keep the number, then standardize = re-express as 'how far from average'</a:t>
+            </a:r>
+          </a:p>
+          <a:p>
+            <a:pPr algn="l" indent="-228600" marL="228600">
+              <a:spcAft>
+                <a:spcPts val="800"/>
+              </a:spcAft>
+              <a:buClr>
+                <a:srgbClr val="1E5EF3"/>
+              </a:buClr>
+              <a:buChar char="—"/>
+            </a:pPr>
+            <a:r>
+              <a:rPr sz="1450" b="0">
+                <a:solidFill>
+                  <a:srgbClr val="202B38"/>
+                </a:solidFill>
+                <a:latin typeface="Arial"/>
+              </a:rPr>
+              <a:t>Never arbitrary integers: C=1, Q=2, S=3 claims S is three times C - the model learns the lie</a:t>
             </a:r>
           </a:p>
           <a:p>
@@ -12018,7 +13048,7 @@
                 </a:solidFill>
                 <a:latin typeface="Arial"/>
               </a:rPr>
-              <a:t>Training walks downhill on the cost surface: nudge the weights in whichever direction lowers the average miss fastest</a:t>
+              <a:t>Recall Session 1: training walks downhill on the cost - the landscape of the average miss</a:t>
             </a:r>
           </a:p>
           <a:p>
@@ -12038,7 +13068,7 @@
                 </a:solidFill>
                 <a:latin typeface="Arial"/>
               </a:rPr>
-              <a:t>With Fare 0-512 next to Age 0-80, the bowl becomes a long skinny valley - the downhill walk zigzags across the narrow direction and crawls</a:t>
+              <a:t>With Fare 0-512 next to Age 0-80, the bowl stretches into a long skinny valley</a:t>
             </a:r>
           </a:p>
           <a:p>
@@ -12058,7 +13088,7 @@
                 </a:solidFill>
                 <a:latin typeface="Arial"/>
               </a:rPr>
-              <a:t>Rescale to comparable ranges and the contours turn nearly circular - the walk heads straight for the minimum</a:t>
+              <a:t>The walk zigzags across the narrow valley and crawls - look left: the dotted path</a:t>
             </a:r>
           </a:p>
           <a:p>
@@ -12078,7 +13108,27 @@
                 </a:solidFill>
                 <a:latin typeface="Arial"/>
               </a:rPr>
-              <a:t>Scaling changes nothing about what the best model predicts - only how fast and reliably you find it: same destination, very different trip</a:t>
+              <a:t>Rescale to comparable ranges and the bowl turns round - the walk heads straight for the star</a:t>
+            </a:r>
+          </a:p>
+          <a:p>
+            <a:pPr algn="l" indent="-228600" marL="228600">
+              <a:spcAft>
+                <a:spcPts val="800"/>
+              </a:spcAft>
+              <a:buClr>
+                <a:srgbClr val="1E5EF3"/>
+              </a:buClr>
+              <a:buChar char="—"/>
+            </a:pPr>
+            <a:r>
+              <a:rPr sz="1450" b="0">
+                <a:solidFill>
+                  <a:srgbClr val="202B38"/>
+                </a:solidFill>
+                <a:latin typeface="Arial"/>
+              </a:rPr>
+              <a:t>Scaling never changes what the best model predicts - only how fast and reliably you find it</a:t>
             </a:r>
           </a:p>
         </p:txBody>
@@ -13050,4 +14100,324 @@
   </a:objectDefaults>
   <a:extraClrSchemeLst/>
 </a:theme>
+</file>
+
+<file path=ppt/theme/theme2.xml><?xml version="1.0" encoding="utf-8"?>
+<a:theme xmlns:a="http://schemas.openxmlformats.org/drawingml/2006/main" name="Office Theme">
+  <a:themeElements>
+    <a:clrScheme name="Office">
+      <a:dk1>
+        <a:sysClr val="windowText" lastClr="000000"/>
+      </a:dk1>
+      <a:lt1>
+        <a:sysClr val="window" lastClr="FFFFFF"/>
+      </a:lt1>
+      <a:dk2>
+        <a:srgbClr val="1F497D"/>
+      </a:dk2>
+      <a:lt2>
+        <a:srgbClr val="EEECE1"/>
+      </a:lt2>
+      <a:accent1>
+        <a:srgbClr val="4F81BD"/>
+      </a:accent1>
+      <a:accent2>
+        <a:srgbClr val="C0504D"/>
+      </a:accent2>
+      <a:accent3>
+        <a:srgbClr val="9BBB59"/>
+      </a:accent3>
+      <a:accent4>
+        <a:srgbClr val="8064A2"/>
+      </a:accent4>
+      <a:accent5>
+        <a:srgbClr val="4BACC6"/>
+      </a:accent5>
+      <a:accent6>
+        <a:srgbClr val="F79646"/>
+      </a:accent6>
+      <a:hlink>
+        <a:srgbClr val="0000FF"/>
+      </a:hlink>
+      <a:folHlink>
+        <a:srgbClr val="800080"/>
+      </a:folHlink>
+    </a:clrScheme>
+    <a:fontScheme name="Office">
+      <a:majorFont>
+        <a:latin typeface="Calibri"/>
+        <a:ea typeface=""/>
+        <a:cs typeface=""/>
+        <a:font script="Jpan" typeface="ＭＳ Ｐゴシック"/>
+        <a:font script="Hang" typeface="맑은 고딕"/>
+        <a:font script="Hans" typeface="宋体"/>
+        <a:font script="Hant" typeface="新細明體"/>
+        <a:font script="Arab" typeface="Times New Roman"/>
+        <a:font script="Hebr" typeface="Times New Roman"/>
+        <a:font script="Thai" typeface="Angsana New"/>
+        <a:font script="Ethi" typeface="Nyala"/>
+        <a:font script="Beng" typeface="Vrinda"/>
+        <a:font script="Gujr" typeface="Shruti"/>
+        <a:font script="Khmr" typeface="MoolBoran"/>
+        <a:font script="Knda" typeface="Tunga"/>
+        <a:font script="Guru" typeface="Raavi"/>
+        <a:font script="Cans" typeface="Euphemia"/>
+        <a:font script="Cher" typeface="Plantagenet Cherokee"/>
+        <a:font script="Yiii" typeface="Microsoft Yi Baiti"/>
+        <a:font script="Tibt" typeface="Microsoft Himalaya"/>
+        <a:font script="Thaa" typeface="MV Boli"/>
+        <a:font script="Deva" typeface="Mangal"/>
+        <a:font script="Telu" typeface="Gautami"/>
+        <a:font script="Taml" typeface="Latha"/>
+        <a:font script="Syrc" typeface="Estrangelo Edessa"/>
+        <a:font script="Orya" typeface="Kalinga"/>
+        <a:font script="Mlym" typeface="Kartika"/>
+        <a:font script="Laoo" typeface="DokChampa"/>
+        <a:font script="Sinh" typeface="Iskoola Pota"/>
+        <a:font script="Mong" typeface="Mongolian Baiti"/>
+        <a:font script="Viet" typeface="Times New Roman"/>
+        <a:font script="Uigh" typeface="Microsoft Uighur"/>
+        <a:font script="Geor" typeface="Sylfaen"/>
+      </a:majorFont>
+      <a:minorFont>
+        <a:latin typeface="Calibri"/>
+        <a:ea typeface=""/>
+        <a:cs typeface=""/>
+        <a:font script="Jpan" typeface="ＭＳ Ｐゴシック"/>
+        <a:font script="Hang" typeface="맑은 고딕"/>
+        <a:font script="Hans" typeface="宋体"/>
+        <a:font script="Hant" typeface="新細明體"/>
+        <a:font script="Arab" typeface="Arial"/>
+        <a:font script="Hebr" typeface="Arial"/>
+        <a:font script="Thai" typeface="Cordia New"/>
+        <a:font script="Ethi" typeface="Nyala"/>
+        <a:font script="Beng" typeface="Vrinda"/>
+        <a:font script="Gujr" typeface="Shruti"/>
+        <a:font script="Khmr" typeface="DaunPenh"/>
+        <a:font script="Knda" typeface="Tunga"/>
+        <a:font script="Guru" typeface="Raavi"/>
+        <a:font script="Cans" typeface="Euphemia"/>
+        <a:font script="Cher" typeface="Plantagenet Cherokee"/>
+        <a:font script="Yiii" typeface="Microsoft Yi Baiti"/>
+        <a:font script="Tibt" typeface="Microsoft Himalaya"/>
+        <a:font script="Thaa" typeface="MV Boli"/>
+        <a:font script="Deva" typeface="Mangal"/>
+        <a:font script="Telu" typeface="Gautami"/>
+        <a:font script="Taml" typeface="Latha"/>
+        <a:font script="Syrc" typeface="Estrangelo Edessa"/>
+        <a:font script="Orya" typeface="Kalinga"/>
+        <a:font script="Mlym" typeface="Kartika"/>
+        <a:font script="Laoo" typeface="DokChampa"/>
+        <a:font script="Sinh" typeface="Iskoola Pota"/>
+        <a:font script="Mong" typeface="Mongolian Baiti"/>
+        <a:font script="Viet" typeface="Arial"/>
+        <a:font script="Uigh" typeface="Microsoft Uighur"/>
+        <a:font script="Geor" typeface="Sylfaen"/>
+      </a:minorFont>
+    </a:fontScheme>
+    <a:fmtScheme name="Office">
+      <a:fillStyleLst>
+        <a:solidFill>
+          <a:schemeClr val="phClr"/>
+        </a:solidFill>
+        <a:gradFill rotWithShape="1">
+          <a:gsLst>
+            <a:gs pos="0">
+              <a:schemeClr val="phClr">
+                <a:tint val="50000"/>
+                <a:satMod val="300000"/>
+              </a:schemeClr>
+            </a:gs>
+            <a:gs pos="35000">
+              <a:schemeClr val="phClr">
+                <a:tint val="37000"/>
+                <a:satMod val="300000"/>
+              </a:schemeClr>
+            </a:gs>
+            <a:gs pos="100000">
+              <a:schemeClr val="phClr">
+                <a:tint val="15000"/>
+                <a:satMod val="350000"/>
+              </a:schemeClr>
+            </a:gs>
+          </a:gsLst>
+          <a:lin ang="16200000" scaled="1"/>
+        </a:gradFill>
+        <a:gradFill rotWithShape="1">
+          <a:gsLst>
+            <a:gs pos="0">
+              <a:schemeClr val="phClr">
+                <a:tint val="100000"/>
+                <a:shade val="100000"/>
+                <a:satMod val="130000"/>
+              </a:schemeClr>
+            </a:gs>
+            <a:gs pos="100000">
+              <a:schemeClr val="phClr">
+                <a:tint val="50000"/>
+                <a:shade val="100000"/>
+                <a:satMod val="350000"/>
+              </a:schemeClr>
+            </a:gs>
+          </a:gsLst>
+          <a:lin ang="16200000" scaled="0"/>
+        </a:gradFill>
+      </a:fillStyleLst>
+      <a:lnStyleLst>
+        <a:ln w="9525" cap="flat" cmpd="sng" algn="ctr">
+          <a:solidFill>
+            <a:schemeClr val="phClr">
+              <a:shade val="95000"/>
+              <a:satMod val="105000"/>
+            </a:schemeClr>
+          </a:solidFill>
+          <a:prstDash val="solid"/>
+        </a:ln>
+        <a:ln w="25400" cap="flat" cmpd="sng" algn="ctr">
+          <a:solidFill>
+            <a:schemeClr val="phClr"/>
+          </a:solidFill>
+          <a:prstDash val="solid"/>
+        </a:ln>
+        <a:ln w="38100" cap="flat" cmpd="sng" algn="ctr">
+          <a:solidFill>
+            <a:schemeClr val="phClr"/>
+          </a:solidFill>
+          <a:prstDash val="solid"/>
+        </a:ln>
+      </a:lnStyleLst>
+      <a:effectStyleLst>
+        <a:effectStyle>
+          <a:effectLst>
+            <a:outerShdw blurRad="40000" dist="20000" dir="5400000" rotWithShape="0">
+              <a:srgbClr val="000000">
+                <a:alpha val="38000"/>
+              </a:srgbClr>
+            </a:outerShdw>
+          </a:effectLst>
+        </a:effectStyle>
+        <a:effectStyle>
+          <a:effectLst>
+            <a:outerShdw blurRad="40000" dist="23000" dir="5400000" rotWithShape="0">
+              <a:srgbClr val="000000">
+                <a:alpha val="35000"/>
+              </a:srgbClr>
+            </a:outerShdw>
+          </a:effectLst>
+        </a:effectStyle>
+        <a:effectStyle>
+          <a:effectLst>
+            <a:outerShdw blurRad="40000" dist="23000" dir="5400000" rotWithShape="0">
+              <a:srgbClr val="000000">
+                <a:alpha val="35000"/>
+              </a:srgbClr>
+            </a:outerShdw>
+          </a:effectLst>
+          <a:scene3d>
+            <a:camera prst="orthographicFront">
+              <a:rot lat="0" lon="0" rev="0"/>
+            </a:camera>
+            <a:lightRig rig="threePt" dir="t">
+              <a:rot lat="0" lon="0" rev="1200000"/>
+            </a:lightRig>
+          </a:scene3d>
+          <a:sp3d>
+            <a:bevelT w="63500" h="25400"/>
+          </a:sp3d>
+        </a:effectStyle>
+      </a:effectStyleLst>
+      <a:bgFillStyleLst>
+        <a:solidFill>
+          <a:schemeClr val="phClr"/>
+        </a:solidFill>
+        <a:gradFill rotWithShape="1">
+          <a:gsLst>
+            <a:gs pos="0">
+              <a:schemeClr val="phClr">
+                <a:tint val="40000"/>
+                <a:satMod val="350000"/>
+              </a:schemeClr>
+            </a:gs>
+            <a:gs pos="40000">
+              <a:schemeClr val="phClr">
+                <a:tint val="45000"/>
+                <a:shade val="99000"/>
+                <a:satMod val="350000"/>
+              </a:schemeClr>
+            </a:gs>
+            <a:gs pos="100000">
+              <a:schemeClr val="phClr">
+                <a:shade val="20000"/>
+                <a:satMod val="255000"/>
+              </a:schemeClr>
+            </a:gs>
+          </a:gsLst>
+          <a:path path="circle">
+            <a:fillToRect l="50000" t="-80000" r="50000" b="180000"/>
+          </a:path>
+        </a:gradFill>
+        <a:gradFill rotWithShape="1">
+          <a:gsLst>
+            <a:gs pos="0">
+              <a:schemeClr val="phClr">
+                <a:tint val="80000"/>
+                <a:satMod val="300000"/>
+              </a:schemeClr>
+            </a:gs>
+            <a:gs pos="100000">
+              <a:schemeClr val="phClr">
+                <a:shade val="30000"/>
+                <a:satMod val="200000"/>
+              </a:schemeClr>
+            </a:gs>
+          </a:gsLst>
+          <a:path path="circle">
+            <a:fillToRect l="50000" t="50000" r="50000" b="50000"/>
+          </a:path>
+        </a:gradFill>
+      </a:bgFillStyleLst>
+    </a:fmtScheme>
+  </a:themeElements>
+  <a:objectDefaults>
+    <a:spDef>
+      <a:spPr/>
+      <a:bodyPr/>
+      <a:lstStyle/>
+      <a:style>
+        <a:lnRef idx="1">
+          <a:schemeClr val="accent1"/>
+        </a:lnRef>
+        <a:fillRef idx="3">
+          <a:schemeClr val="accent1"/>
+        </a:fillRef>
+        <a:effectRef idx="2">
+          <a:schemeClr val="accent1"/>
+        </a:effectRef>
+        <a:fontRef idx="minor">
+          <a:schemeClr val="lt1"/>
+        </a:fontRef>
+      </a:style>
+    </a:spDef>
+    <a:lnDef>
+      <a:spPr/>
+      <a:bodyPr/>
+      <a:lstStyle/>
+      <a:style>
+        <a:lnRef idx="2">
+          <a:schemeClr val="accent1"/>
+        </a:lnRef>
+        <a:fillRef idx="0">
+          <a:schemeClr val="accent1"/>
+        </a:fillRef>
+        <a:effectRef idx="1">
+          <a:schemeClr val="accent1"/>
+        </a:effectRef>
+        <a:fontRef idx="minor">
+          <a:schemeClr val="tx1"/>
+        </a:fontRef>
+      </a:style>
+    </a:lnDef>
+  </a:objectDefaults>
+  <a:extraClrSchemeLst/>
+</a:theme>
 </file>
--- a/presentations/m2-session-2-data-prep-and-feature-engineering.pptx
+++ b/presentations/m2-session-2-data-prep-and-feature-engineering.pptx
@@ -520,7 +520,427 @@
           <a:lstStyle/>
           <a:p>
             <a:r>
-              <a:t>Re-anchor the exam metaphor before anything new: train rows are the study material, validation is the practice tests, the test set is the final you sit exactly once. Today never leaves the study material - every value we compute comes from the 712 training rows. Ask the class: why does even an average count as 'part of the model'?</a:t>
+              <a:t>Teach the bar itself before the rules: the pale band is the 712 training rows, the dark block is the 179 test rows kept sealed, and the hatched stripe inside training is validation - the practice tests we build in Session 3. Then the exam metaphor: study on train, pick your strategy with practice tests, sit the final once. Today never leaves the study material - every value we compute comes from the 712 training rows. Ask the class: why does even an average count as 'part of the model'?</a:t>
+            </a:r>
+          </a:p>
+        </p:txBody>
+      </p:sp>
+      <p:sp>
+        <p:nvSpPr>
+          <p:cNvPr id="4" name="Slide Number Placeholder 3"/>
+          <p:cNvSpPr>
+            <a:spLocks noGrp="1"/>
+          </p:cNvSpPr>
+          <p:nvPr>
+            <p:ph type="sldNum" idx="5" sz="quarter"/>
+          </p:nvPr>
+        </p:nvSpPr>
+        <p:spPr/>
+      </p:sp>
+    </p:spTree>
+  </p:cSld>
+  <p:clrMapOvr>
+    <a:masterClrMapping/>
+  </p:clrMapOvr>
+</p:notes>
+</file>
+
+<file path=ppt/notesSlides/notesSlide10.xml><?xml version="1.0" encoding="utf-8"?>
+<p:notes xmlns:a="http://schemas.openxmlformats.org/drawingml/2006/main" xmlns:p="http://schemas.openxmlformats.org/presentationml/2006/main" xmlns:r="http://schemas.openxmlformats.org/officeDocument/2006/relationships">
+  <p:cSld>
+    <p:spTree>
+      <p:nvGrpSpPr>
+        <p:cNvPr id="1" name=""/>
+        <p:cNvGrpSpPr/>
+        <p:nvPr/>
+      </p:nvGrpSpPr>
+      <p:grpSpPr>
+        <a:xfrm>
+          <a:off x="0" y="0"/>
+          <a:ext cx="0" cy="0"/>
+          <a:chOff x="0" y="0"/>
+          <a:chExt cx="0" cy="0"/>
+        </a:xfrm>
+      </p:grpSpPr>
+      <p:sp>
+        <p:nvSpPr>
+          <p:cNvPr id="2" name="Slide Image Placeholder 1"/>
+          <p:cNvSpPr>
+            <a:spLocks noGrp="1"/>
+          </p:cNvSpPr>
+          <p:nvPr>
+            <p:ph type="sldImg" idx="2"/>
+          </p:nvPr>
+        </p:nvSpPr>
+        <p:spPr/>
+      </p:sp>
+      <p:sp>
+        <p:nvSpPr>
+          <p:cNvPr id="3" name="Notes Placeholder 2"/>
+          <p:cNvSpPr>
+            <a:spLocks noGrp="1"/>
+          </p:cNvSpPr>
+          <p:nvPr>
+            <p:ph type="body" idx="3" sz="quarter"/>
+          </p:nvPr>
+        </p:nvSpPr>
+        <p:spPr/>
+        <p:txBody>
+          <a:bodyPr/>
+          <a:lstStyle/>
+          <a:p>
+            <a:r>
+              <a:t>Read one row of the table aloud: Passenger 2 boarded at C, so the C column gets the 1 and the others get 0 - that lone 1 is why it is called one-hot. No order, no distance is invented; Part 1's menu chose this because Embarked has no real order. Then the trap: pd.get_dummies rebuilds columns from whatever data it sees, so train and test can drift apart; the sklearn encoder fixes the layout at fit(train) and reproduces it forever. Ask the class: what should happen to a port the training set never saw?</a:t>
+            </a:r>
+          </a:p>
+        </p:txBody>
+      </p:sp>
+      <p:sp>
+        <p:nvSpPr>
+          <p:cNvPr id="4" name="Slide Number Placeholder 3"/>
+          <p:cNvSpPr>
+            <a:spLocks noGrp="1"/>
+          </p:cNvSpPr>
+          <p:nvPr>
+            <p:ph type="sldNum" idx="5" sz="quarter"/>
+          </p:nvPr>
+        </p:nvSpPr>
+        <p:spPr/>
+      </p:sp>
+    </p:spTree>
+  </p:cSld>
+  <p:clrMapOvr>
+    <a:masterClrMapping/>
+  </p:clrMapOvr>
+</p:notes>
+</file>
+
+<file path=ppt/notesSlides/notesSlide11.xml><?xml version="1.0" encoding="utf-8"?>
+<p:notes xmlns:a="http://schemas.openxmlformats.org/drawingml/2006/main" xmlns:p="http://schemas.openxmlformats.org/presentationml/2006/main" xmlns:r="http://schemas.openxmlformats.org/officeDocument/2006/relationships">
+  <p:cSld>
+    <p:spTree>
+      <p:nvGrpSpPr>
+        <p:cNvPr id="1" name=""/>
+        <p:cNvGrpSpPr/>
+        <p:nvPr/>
+      </p:nvGrpSpPr>
+      <p:grpSpPr>
+        <a:xfrm>
+          <a:off x="0" y="0"/>
+          <a:ext cx="0" cy="0"/>
+          <a:chOff x="0" y="0"/>
+          <a:chExt cx="0" cy="0"/>
+        </a:xfrm>
+      </p:grpSpPr>
+      <p:sp>
+        <p:nvSpPr>
+          <p:cNvPr id="2" name="Slide Image Placeholder 1"/>
+          <p:cNvSpPr>
+            <a:spLocks noGrp="1"/>
+          </p:cNvSpPr>
+          <p:nvPr>
+            <p:ph type="sldImg" idx="2"/>
+          </p:nvPr>
+        </p:nvSpPr>
+        <p:spPr/>
+      </p:sp>
+      <p:sp>
+        <p:nvSpPr>
+          <p:cNvPr id="3" name="Notes Placeholder 2"/>
+          <p:cNvSpPr>
+            <a:spLocks noGrp="1"/>
+          </p:cNvSpPr>
+          <p:nvPr>
+            <p:ph type="body" idx="3" sz="quarter"/>
+          </p:nvPr>
+        </p:nvSpPr>
+        <p:spPr/>
+        <p:txBody>
+          <a:bodyPr/>
+          <a:lstStyle/>
+          <a:p>
+            <a:r>
+              <a:t>Same grounding as Part 1: Fare shouts (0-512), Age whispers (0-80) - the chart makes the mismatch physical. Models that measure distances or weigh sums (KNN, Logistic Regression) hear only the loud axis; trees just ask yes/no questions like 'is Fare &gt; 30?', so they never notice. StandardScaler re-expresses each value as 'how far from average'; MinMaxScaler squeezes into 0-1. Either way the histogram's shape is untouched - only the ruler's labels change. Ask the class: which of our six models from the next session will care?</a:t>
+            </a:r>
+          </a:p>
+        </p:txBody>
+      </p:sp>
+      <p:sp>
+        <p:nvSpPr>
+          <p:cNvPr id="4" name="Slide Number Placeholder 3"/>
+          <p:cNvSpPr>
+            <a:spLocks noGrp="1"/>
+          </p:cNvSpPr>
+          <p:nvPr>
+            <p:ph type="sldNum" idx="5" sz="quarter"/>
+          </p:nvPr>
+        </p:nvSpPr>
+        <p:spPr/>
+      </p:sp>
+    </p:spTree>
+  </p:cSld>
+  <p:clrMapOvr>
+    <a:masterClrMapping/>
+  </p:clrMapOvr>
+</p:notes>
+</file>
+
+<file path=ppt/notesSlides/notesSlide12.xml><?xml version="1.0" encoding="utf-8"?>
+<p:notes xmlns:a="http://schemas.openxmlformats.org/drawingml/2006/main" xmlns:p="http://schemas.openxmlformats.org/presentationml/2006/main" xmlns:r="http://schemas.openxmlformats.org/officeDocument/2006/relationships">
+  <p:cSld>
+    <p:spTree>
+      <p:nvGrpSpPr>
+        <p:cNvPr id="1" name=""/>
+        <p:cNvGrpSpPr/>
+        <p:nvPr/>
+      </p:nvGrpSpPr>
+      <p:grpSpPr>
+        <a:xfrm>
+          <a:off x="0" y="0"/>
+          <a:ext cx="0" cy="0"/>
+          <a:chOff x="0" y="0"/>
+          <a:chExt cx="0" cy="0"/>
+        </a:xfrm>
+      </p:grpSpPr>
+      <p:sp>
+        <p:nvSpPr>
+          <p:cNvPr id="2" name="Slide Image Placeholder 1"/>
+          <p:cNvSpPr>
+            <a:spLocks noGrp="1"/>
+          </p:cNvSpPr>
+          <p:nvPr>
+            <p:ph type="sldImg" idx="2"/>
+          </p:nvPr>
+        </p:nvSpPr>
+        <p:spPr/>
+      </p:sp>
+      <p:sp>
+        <p:nvSpPr>
+          <p:cNvPr id="3" name="Notes Placeholder 2"/>
+          <p:cNvSpPr>
+            <a:spLocks noGrp="1"/>
+          </p:cNvSpPr>
+          <p:nvPr>
+            <p:ph type="body" idx="3" sz="quarter"/>
+          </p:nvPr>
+        </p:nvSpPr>
+        <p:spPr/>
+        <p:txBody>
+          <a:bodyPr/>
+          <a:lstStyle/>
+          <a:p>
+            <a:r>
+              <a:t>Start from a real name: 'Cumings, Mrs. John Bradley' - the title Mrs is sitting right there in the text. The regex just grabs the word before the period; 14 raw titles collapse into five buckets. The payoff is Master, the old-fashioned title for a young boy: to the Sex column, Owen (22) and Frankie (9) are both simply 'male', but Title tells the man from the boy - which mattered a lot on a sinking ship. Signal check before keeping any new column: Mrs and Miss survived far more often than Mr, and Master sits well above adult men.</a:t>
+            </a:r>
+          </a:p>
+        </p:txBody>
+      </p:sp>
+      <p:sp>
+        <p:nvSpPr>
+          <p:cNvPr id="4" name="Slide Number Placeholder 3"/>
+          <p:cNvSpPr>
+            <a:spLocks noGrp="1"/>
+          </p:cNvSpPr>
+          <p:nvPr>
+            <p:ph type="sldNum" idx="5" sz="quarter"/>
+          </p:nvPr>
+        </p:nvSpPr>
+        <p:spPr/>
+      </p:sp>
+    </p:spTree>
+  </p:cSld>
+  <p:clrMapOvr>
+    <a:masterClrMapping/>
+  </p:clrMapOvr>
+</p:notes>
+</file>
+
+<file path=ppt/notesSlides/notesSlide13.xml><?xml version="1.0" encoding="utf-8"?>
+<p:notes xmlns:a="http://schemas.openxmlformats.org/drawingml/2006/main" xmlns:p="http://schemas.openxmlformats.org/presentationml/2006/main" xmlns:r="http://schemas.openxmlformats.org/officeDocument/2006/relationships">
+  <p:cSld>
+    <p:spTree>
+      <p:nvGrpSpPr>
+        <p:cNvPr id="1" name=""/>
+        <p:cNvGrpSpPr/>
+        <p:nvPr/>
+      </p:nvGrpSpPr>
+      <p:grpSpPr>
+        <a:xfrm>
+          <a:off x="0" y="0"/>
+          <a:ext cx="0" cy="0"/>
+          <a:chOff x="0" y="0"/>
+          <a:chExt cx="0" cy="0"/>
+        </a:xfrm>
+      </p:grpSpPr>
+      <p:sp>
+        <p:nvSpPr>
+          <p:cNvPr id="2" name="Slide Image Placeholder 1"/>
+          <p:cNvSpPr>
+            <a:spLocks noGrp="1"/>
+          </p:cNvSpPr>
+          <p:nvPr>
+            <p:ph type="sldImg" idx="2"/>
+          </p:nvPr>
+        </p:nvSpPr>
+        <p:spPr/>
+      </p:sp>
+      <p:sp>
+        <p:nvSpPr>
+          <p:cNvPr id="3" name="Notes Placeholder 2"/>
+          <p:cNvSpPr>
+            <a:spLocks noGrp="1"/>
+          </p:cNvSpPr>
+          <p:nvPr>
+            <p:ph type="body" idx="3" sz="quarter"/>
+          </p:nvPr>
+        </p:nvSpPr>
+        <p:spPr/>
+        <p:txBody>
+          <a:bodyPr/>
+          <a:lstStyle/>
+          <a:p>
+            <a:r>
+              <a:t>One addition, one new column: siblings/spouses plus parents/children plus yourself. Work the two passengers: Owen has a sibling aboard, so 1+0+1 = 2; Frankie has two parents aboard, so 0+2+1 = 3. IsAlone flags the 434 solo travelers - more than half the training set. On the chart, the blue bars (sizes 2-4) are the families that fared best; solo travelers and the very large families fared badly. Close with the discipline: a new column earns its place only if it carries signal.</a:t>
+            </a:r>
+          </a:p>
+        </p:txBody>
+      </p:sp>
+      <p:sp>
+        <p:nvSpPr>
+          <p:cNvPr id="4" name="Slide Number Placeholder 3"/>
+          <p:cNvSpPr>
+            <a:spLocks noGrp="1"/>
+          </p:cNvSpPr>
+          <p:nvPr>
+            <p:ph type="sldNum" idx="5" sz="quarter"/>
+          </p:nvPr>
+        </p:nvSpPr>
+        <p:spPr/>
+      </p:sp>
+    </p:spTree>
+  </p:cSld>
+  <p:clrMapOvr>
+    <a:masterClrMapping/>
+  </p:clrMapOvr>
+</p:notes>
+</file>
+
+<file path=ppt/notesSlides/notesSlide14.xml><?xml version="1.0" encoding="utf-8"?>
+<p:notes xmlns:a="http://schemas.openxmlformats.org/drawingml/2006/main" xmlns:p="http://schemas.openxmlformats.org/presentationml/2006/main" xmlns:r="http://schemas.openxmlformats.org/officeDocument/2006/relationships">
+  <p:cSld>
+    <p:spTree>
+      <p:nvGrpSpPr>
+        <p:cNvPr id="1" name=""/>
+        <p:cNvGrpSpPr/>
+        <p:nvPr/>
+      </p:nvGrpSpPr>
+      <p:grpSpPr>
+        <a:xfrm>
+          <a:off x="0" y="0"/>
+          <a:ext cx="0" cy="0"/>
+          <a:chOff x="0" y="0"/>
+          <a:chExt cx="0" cy="0"/>
+        </a:xfrm>
+      </p:grpSpPr>
+      <p:sp>
+        <p:nvSpPr>
+          <p:cNvPr id="2" name="Slide Image Placeholder 1"/>
+          <p:cNvSpPr>
+            <a:spLocks noGrp="1"/>
+          </p:cNvSpPr>
+          <p:nvPr>
+            <p:ph type="sldImg" idx="2"/>
+          </p:nvPr>
+        </p:nvSpPr>
+        <p:spPr/>
+      </p:sp>
+      <p:sp>
+        <p:nvSpPr>
+          <p:cNvPr id="3" name="Notes Placeholder 2"/>
+          <p:cNvSpPr>
+            <a:spLocks noGrp="1"/>
+          </p:cNvSpPr>
+          <p:nvPr>
+            <p:ph type="body" idx="3" sz="quarter"/>
+          </p:nvPr>
+        </p:nvSpPr>
+        <p:spPr/>
+        <p:txBody>
+          <a:bodyPr/>
+          <a:lstStyle/>
+          <a:p>
+            <a:r>
+              <a:t>Ng's own example, in plain terms: a house lot has a width facing the street (the 'frontage') and a depth. Multiply them and you get the area - one new column, often more predictive than either raw one, and no new data collected. Then mirror it on the Titanic: SibSp + Parch + 1 became FamilySize, and Name became Title. Same rule both times: use knowledge about the problem to design new columns. Ask the class: what other Titanic column pair might multiply into something useful?</a:t>
+            </a:r>
+          </a:p>
+        </p:txBody>
+      </p:sp>
+      <p:sp>
+        <p:nvSpPr>
+          <p:cNvPr id="4" name="Slide Number Placeholder 3"/>
+          <p:cNvSpPr>
+            <a:spLocks noGrp="1"/>
+          </p:cNvSpPr>
+          <p:nvPr>
+            <p:ph type="sldNum" idx="5" sz="quarter"/>
+          </p:nvPr>
+        </p:nvSpPr>
+        <p:spPr/>
+      </p:sp>
+    </p:spTree>
+  </p:cSld>
+  <p:clrMapOvr>
+    <a:masterClrMapping/>
+  </p:clrMapOvr>
+</p:notes>
+</file>
+
+<file path=ppt/notesSlides/notesSlide15.xml><?xml version="1.0" encoding="utf-8"?>
+<p:notes xmlns:a="http://schemas.openxmlformats.org/drawingml/2006/main" xmlns:p="http://schemas.openxmlformats.org/presentationml/2006/main" xmlns:r="http://schemas.openxmlformats.org/officeDocument/2006/relationships">
+  <p:cSld>
+    <p:spTree>
+      <p:nvGrpSpPr>
+        <p:cNvPr id="1" name=""/>
+        <p:cNvGrpSpPr/>
+        <p:nvPr/>
+      </p:nvGrpSpPr>
+      <p:grpSpPr>
+        <a:xfrm>
+          <a:off x="0" y="0"/>
+          <a:ext cx="0" cy="0"/>
+          <a:chOff x="0" y="0"/>
+          <a:chExt cx="0" cy="0"/>
+        </a:xfrm>
+      </p:grpSpPr>
+      <p:sp>
+        <p:nvSpPr>
+          <p:cNvPr id="2" name="Slide Image Placeholder 1"/>
+          <p:cNvSpPr>
+            <a:spLocks noGrp="1"/>
+          </p:cNvSpPr>
+          <p:nvPr>
+            <p:ph type="sldImg" idx="2"/>
+          </p:nvPr>
+        </p:nvSpPr>
+        <p:spPr/>
+      </p:sp>
+      <p:sp>
+        <p:nvSpPr>
+          <p:cNvPr id="3" name="Notes Placeholder 2"/>
+          <p:cNvSpPr>
+            <a:spLocks noGrp="1"/>
+          </p:cNvSpPr>
+          <p:nvPr>
+            <p:ph type="body" idx="3" sz="quarter"/>
+          </p:nvPr>
+        </p:nvSpPr>
+        <p:spPr/>
+        <p:txBody>
+          <a:bodyPr/>
+          <a:lstStyle/>
+          <a:p>
+            <a:r>
+              <a:t>Give the reading order out loud: top lane first - one real boy, Frankie, PassengerId 166, raw row on the left, 18 numbers on the right. Then the bottom lane: the three machines that do it - impute, encode, scale - and the dotted link showing the top lane's last arrow IS that machinery. Hammer the verbs once more: fit_transform on train learns the values, transform on test only applies them. One Pipeline means no leakage, no forgotten steps, and the whole thing travels as a single object - Sessions 3 and 4 reuse it verbatim. Note IsAlone: computed, but dropped by the ColumnTransformer.</a:t>
             </a:r>
           </a:p>
         </p:txBody>
@@ -730,7 +1150,7 @@
           <a:lstStyle/>
           <a:p>
             <a:r>
-              <a:t>Harvard's device: MCAR is poking holes in the table blindfolded - annoying but fair. MAR holes cluster where another visible column points, so ignoring them biases you. MNAR holes are caused by the very value that is missing - no fill can see that. The deciding information is missing by definition, so the table cannot settle it. Run the discussion: which species are our 177 missing ages? Any argued answer beats a certain one.</a:t>
+              <a:t>Ground it first: 177 of our 891 ages are simply blank - the question is WHY. Walk the cards left to right; each card gives the meaning, a plausible Titanic story, the risk, the fix. Harvard's device: MCAR is poking holes in the table blindfolded - annoying but fair. MAR holes cluster where another visible column points, so ignoring them biases you. MNAR holes are caused by the very value that is missing - no fill can see that. The deciding information is missing by definition, so the table cannot settle it. Run the discussion: which species are our 177 missing ages? Any argued answer beats a certain one.</a:t>
             </a:r>
           </a:p>
         </p:txBody>
@@ -800,7 +1220,7 @@
           <a:lstStyle/>
           <a:p>
             <a:r>
-              <a:t>Frame encoding as translation into the only language the model speaks - numbers - and honesty as translating without adding claims. Coding red=1, blue=2 quietly tells the model blue is twice red; it will believe you. One-hot claims nothing, the thermometer claims only order, keeping a real number claims real distances. Ask the class: is T-shirt size S/M/L more like Embarked or more like Age?</a:t>
+              <a:t>Start concrete: the manifest literally says 'S' in the Embarked column, and the model cannot eat letters. Walk the three cards left to right, then the navy strip at the bottom - the forbidden move. Frame encoding as translation into the only language the model speaks - numbers - and honesty as translating without adding claims. Coding red=1, blue=2 quietly tells the model blue is twice red; it will believe you. One-hot claims nothing, the thermometer claims only order, keeping a real number claims real distances. Ask the class: is T-shirt size S/M/L more like Embarked or more like Age?</a:t>
             </a:r>
           </a:p>
         </p:txBody>
@@ -870,7 +1290,7 @@
           <a:lstStyle/>
           <a:p>
             <a:r>
-              <a:t>Ng's contour story: the downhill walk from Session 1 happens on a landscape, and unequal scales stretch that landscape into a skinny valley - the walker zigzags and crawls. Rescale and the valley becomes a round bowl: straight to the bottom. The destination never moves, only the trip changes. Ask the class: which of our columns stretches the valley worst, Fare or Age?</a:t>
+              <a:t>Ground it first: Fare runs 0-512 and Age 0-80, so to the model Fare shouts and Age whispers. Then teach the picture before the moral: each panel is a map of the search for the best settings - one ring joins settings that score the same, the star is the best setting, the dotted trail is training's steps from the 'start' marker. Unscaled, the map is a skinny valley: the walk zigzags and crawls. Scaled, it is a round bowl: straight to the star. The destination never moves - only the trip changes. Ask the class: which of our columns stretches the valley worst?</a:t>
             </a:r>
           </a:p>
         </p:txBody>
@@ -940,7 +1360,7 @@
           <a:lstStyle/>
           <a:p>
             <a:r>
-              <a:t>Walk the picture slowly: four corner points, diagonal corners share a class, and no straight line will ever split them - let students try. Then multiply the two coordinates into one new column and the four points sort themselves onto two spots a single threshold separates. We never touched the model - we changed what it looks at. Ask the class: did the model get smarter, or did the world get simpler?</a:t>
+              <a:t>Walk the picture slowly: four corner points - blue circles are one class, dark squares the other - and diagonal corners share a class, so no straight line will ever split them; let students try (the gray dashed lines are failed tries). Then multiply the two coordinates into one new column and the four points sort themselves onto two spots a single threshold separates. We never touched the model - we changed what it looks at. Ask the class: did the model get smarter, or did the world get simpler?</a:t>
             </a:r>
           </a:p>
         </p:txBody>
@@ -1010,7 +1430,77 @@
           <a:lstStyle/>
           <a:p>
             <a:r>
-              <a:t>Stay in the kitchen: the line is the cook, the columns are the ingredients. Hand the cook x squared as one more ingredient and the same recipe starts producing curves - no new cook, no new technique. But every extra ingredient is also freedom to cook nonsense that matches noise; Session 3 puts a price on that. Ask the class: what column would you hand the line so it could bend twice?</a:t>
+              <a:t>Point at the dots first: they rise and then fall, and a ruler cannot follow that - the dashed line on the left proves it. Then the kitchen: the line is the cook, the columns are the ingredients. Hand the cook x squared as one more ingredient and the same recipe starts producing curves - no new cook, no new technique. But every extra ingredient is also freedom to cook nonsense that matches noise; Session 3 puts a price on that. Ask the class: what column would you hand the line so it could bend twice?</a:t>
+            </a:r>
+          </a:p>
+        </p:txBody>
+      </p:sp>
+      <p:sp>
+        <p:nvSpPr>
+          <p:cNvPr id="4" name="Slide Number Placeholder 3"/>
+          <p:cNvSpPr>
+            <a:spLocks noGrp="1"/>
+          </p:cNvSpPr>
+          <p:nvPr>
+            <p:ph type="sldNum" idx="5" sz="quarter"/>
+          </p:nvPr>
+        </p:nvSpPr>
+        <p:spPr/>
+      </p:sp>
+    </p:spTree>
+  </p:cSld>
+  <p:clrMapOvr>
+    <a:masterClrMapping/>
+  </p:clrMapOvr>
+</p:notes>
+</file>
+
+<file path=ppt/notesSlides/notesSlide9.xml><?xml version="1.0" encoding="utf-8"?>
+<p:notes xmlns:a="http://schemas.openxmlformats.org/drawingml/2006/main" xmlns:p="http://schemas.openxmlformats.org/presentationml/2006/main" xmlns:r="http://schemas.openxmlformats.org/officeDocument/2006/relationships">
+  <p:cSld>
+    <p:spTree>
+      <p:nvGrpSpPr>
+        <p:cNvPr id="1" name=""/>
+        <p:cNvGrpSpPr/>
+        <p:nvPr/>
+      </p:nvGrpSpPr>
+      <p:grpSpPr>
+        <a:xfrm>
+          <a:off x="0" y="0"/>
+          <a:ext cx="0" cy="0"/>
+          <a:chOff x="0" y="0"/>
+          <a:chExt cx="0" cy="0"/>
+        </a:xfrm>
+      </p:grpSpPr>
+      <p:sp>
+        <p:nvSpPr>
+          <p:cNvPr id="2" name="Slide Image Placeholder 1"/>
+          <p:cNvSpPr>
+            <a:spLocks noGrp="1"/>
+          </p:cNvSpPr>
+          <p:nvPr>
+            <p:ph type="sldImg" idx="2"/>
+          </p:nvPr>
+        </p:nvSpPr>
+        <p:spPr/>
+      </p:sp>
+      <p:sp>
+        <p:nvSpPr>
+          <p:cNvPr id="3" name="Notes Placeholder 2"/>
+          <p:cNvSpPr>
+            <a:spLocks noGrp="1"/>
+          </p:cNvSpPr>
+          <p:nvPr>
+            <p:ph type="body" idx="3" sz="quarter"/>
+          </p:nvPr>
+        </p:nvSpPr>
+        <p:spPr/>
+        <p:txBody>
+          <a:bodyPr/>
+          <a:lstStyle/>
+          <a:p>
+            <a:r>
+              <a:t>Ground it in the chart: 137 blank ages in train, 40 in test. The median is just the middle value, and only the 712 training rows may vote: they say 28.5, and that one number fills every gap in both halves. The test rows' own median, 27.0, is exactly the information we refuse to use - the test set is the future, and you cannot compute statistics on data you have not seen yet. Same rule for Embarked's 2 gaps: most_frequent learns 'S' from train. Ask the class: what would be wrong with filling test gaps with 27.0?</a:t>
             </a:r>
           </a:p>
         </p:txBody>
@@ -4219,7 +4709,7 @@
                 </a:solidFill>
                 <a:latin typeface="Arial"/>
               </a:rPr>
-              <a:t>The manifest is messy: 177 missing ages, titles buried inside names, scales that disagree. Today we turn passengers into signals - without cheating.</a:t>
+              <a:t>The manifest - the ship's passenger list - is messy: 177 missing ages, titles buried inside names, scales that disagree. Today we turn passengers into signals - without cheating.</a:t>
             </a:r>
           </a:p>
         </p:txBody>
@@ -4445,7 +4935,7 @@
                 </a:solidFill>
                 <a:latin typeface="Arial"/>
               </a:rPr>
-              <a:t>Give a line x-squared as a column and it learns curves - flexibility bought with features</a:t>
+              <a:t>Add an x-squared column and the straight line learns to curve</a:t>
             </a:r>
           </a:p>
         </p:txBody>
@@ -4532,7 +5022,7 @@
                 </a:solidFill>
                 <a:latin typeface="Arial"/>
               </a:rPr>
-              <a:t>Basis expansion - in plain words: give the line new ingredients (x squared) and it can cook curves</a:t>
+              <a:t>These dots rise, then fall - one straight line cannot follow that</a:t>
             </a:r>
           </a:p>
           <a:p>
@@ -4552,7 +5042,7 @@
                 </a:solidFill>
                 <a:latin typeface="Arial"/>
               </a:rPr>
-              <a:t>Append transformed copies of columns you already have - x squared, x cubed, x1 * x2 - as new features</a:t>
+              <a:t>How to read: the same dots in both panels; left, the model sees only the column x</a:t>
             </a:r>
           </a:p>
           <a:p>
@@ -4572,7 +5062,7 @@
                 </a:solidFill>
                 <a:latin typeface="Arial"/>
               </a:rPr>
-              <a:t>Nothing about the fitter changes: still a linear model, just reading a wider table</a:t>
+              <a:t>Right: append ONE new column, x squared - the same fitter now bends</a:t>
             </a:r>
           </a:p>
           <a:p>
@@ -4592,7 +5082,7 @@
                 </a:solidFill>
                 <a:latin typeface="Arial"/>
               </a:rPr>
-              <a:t>A line in the new coordinates is a curve in the old ones - flexibility bought with features, not a new algorithm</a:t>
+              <a:t>Kitchen terms: same cook, one extra ingredient - now it can cook curves</a:t>
             </a:r>
           </a:p>
           <a:p>
@@ -4612,7 +5102,7 @@
                 </a:solidFill>
                 <a:latin typeface="Arial"/>
               </a:rPr>
-              <a:t>XOR's product column (previous slide) is the same family: powers and products of what you measured</a:t>
+              <a:t>This is basis expansion: add powers and products of columns you already have (XOR's x1 times x2 is the same family)</a:t>
             </a:r>
           </a:p>
           <a:p>
@@ -4632,7 +5122,7 @@
                 </a:solidFill>
                 <a:latin typeface="Arial"/>
               </a:rPr>
-              <a:t>The price: every added column is flexibility the model can spend on noise - Session 3 counts that cost</a:t>
+              <a:t>The price: every extra column can chase noise - Session 3 counts that cost</a:t>
             </a:r>
           </a:p>
         </p:txBody>
@@ -5224,7 +5714,7 @@
                 </a:solidFill>
                 <a:latin typeface="Arial"/>
               </a:rPr>
-              <a:t>Fit the imputer on train only - the test median is information we refuse to use</a:t>
+              <a:t>Fill gaps with a value learned from train only - the test median stays untouched</a:t>
             </a:r>
           </a:p>
         </p:txBody>
@@ -5311,7 +5801,7 @@
                 </a:solidFill>
                 <a:latin typeface="Arial"/>
               </a:rPr>
-              <a:t>SimpleImputer(strategy="median"): fit(train) learns median (the middle value) Age 28.5</a:t>
+              <a:t>Age is blank in 137 train rows and 40 test rows (left chart)</a:t>
             </a:r>
           </a:p>
           <a:p>
@@ -5331,7 +5821,7 @@
                 </a:solidFill>
                 <a:latin typeface="Arial"/>
               </a:rPr>
-              <a:t>transform(train) and transform(test) both fill gaps with that same 28.5</a:t>
+              <a:t>Median = the middle value. The 712 train rows say: median Age 28.5</a:t>
             </a:r>
           </a:p>
           <a:p>
@@ -5351,7 +5841,7 @@
                 </a:solidFill>
                 <a:latin typeface="Arial"/>
               </a:rPr>
-              <a:t>The test-only median (27.0) is "exactly the information we refuse to use"</a:t>
+              <a:t>That one number, 28.5, fills every gap - in train AND in test</a:t>
             </a:r>
           </a:p>
           <a:p>
@@ -5371,7 +5861,7 @@
                 </a:solidFill>
                 <a:latin typeface="Arial"/>
               </a:rPr>
-              <a:t>Never call fit on the test set - treat it like the future</a:t>
+              <a:t>The test-only median, 27.0, is "exactly the information we refuse to use"</a:t>
             </a:r>
           </a:p>
           <a:p>
@@ -5391,7 +5881,27 @@
                 </a:solidFill>
                 <a:latin typeface="Arial"/>
               </a:rPr>
-              <a:t>Embarked (2 gaps): strategy="most_frequent" learns "S" from train</a:t>
+              <a:t>In code: SimpleImputer(strategy="median") - fit on train, transform both</a:t>
+            </a:r>
+          </a:p>
+          <a:p>
+            <a:pPr algn="l" indent="-228600" marL="228600">
+              <a:spcAft>
+                <a:spcPts val="800"/>
+              </a:spcAft>
+              <a:buClr>
+                <a:srgbClr val="1E5EF3"/>
+              </a:buClr>
+              <a:buChar char="—"/>
+            </a:pPr>
+            <a:r>
+              <a:rPr sz="1450" b="0">
+                <a:solidFill>
+                  <a:srgbClr val="202B38"/>
+                </a:solidFill>
+                <a:latin typeface="Arial"/>
+              </a:rPr>
+              <a:t>Embarked, 2 gaps: strategy="most_frequent" learns "S" from train</a:t>
             </a:r>
           </a:p>
         </p:txBody>
@@ -5455,7 +5965,7 @@
                 </a:solidFill>
                 <a:latin typeface="Arial"/>
               </a:rPr>
-              <a:t>Missing Age rows and learned medians. Module 2, notebook 1.</a:t>
+              <a:t>Left: rows with Age blank. Right: each half's median - only train's is ever used. Module 2, notebook 1.</a:t>
             </a:r>
           </a:p>
         </p:txBody>
@@ -6558,7 +7068,7 @@
         <p:spPr>
           <a:xfrm>
             <a:off x="548640" y="4279392"/>
-            <a:ext cx="11091672" cy="1097280"/>
+            <a:ext cx="11091672" cy="1463040"/>
           </a:xfrm>
           <a:prstGeom prst="rect">
             <a:avLst/>
@@ -6587,7 +7097,27 @@
                 </a:solidFill>
                 <a:latin typeface="Arial"/>
               </a:rPr>
-              <a:t>fit(train) memorizes the exact column layout; transform(test) always reproduces those same columns</a:t>
+              <a:t>Read one row: Passenger 2 boarded at C, so Embarked_C is 1 and the other two are 0 - exactly one column is 'hot' per row</a:t>
+            </a:r>
+          </a:p>
+          <a:p>
+            <a:pPr algn="l" indent="-228600" marL="228600">
+              <a:spcAft>
+                <a:spcPts val="600"/>
+              </a:spcAft>
+              <a:buClr>
+                <a:srgbClr val="1E5EF3"/>
+              </a:buClr>
+              <a:buChar char="—"/>
+            </a:pPr>
+            <a:r>
+              <a:rPr sz="1350" b="0">
+                <a:solidFill>
+                  <a:srgbClr val="202B38"/>
+                </a:solidFill>
+                <a:latin typeface="Arial"/>
+              </a:rPr>
+              <a:t>fit(train) fixes the column layout once; transform(test) always reproduces those same columns</a:t>
             </a:r>
           </a:p>
           <a:p>
@@ -6980,7 +7510,7 @@
                 </a:solidFill>
                 <a:latin typeface="Arial"/>
               </a:rPr>
-              <a:t>Geometry first: each passenger is a point in space, one axis per feature - scaling makes the axes comparable</a:t>
+              <a:t>Look right: Fare runs 0 to 512, Age 0 to 80 - Fare shouts, Age whispers</a:t>
             </a:r>
           </a:p>
           <a:p>
@@ -7000,7 +7530,7 @@
                 </a:solidFill>
                 <a:latin typeface="Arial"/>
               </a:rPr>
-              <a:t>Distance and equation models (KNN, Logistic Regression) let the big-number axis dominate: raw Fare gaps drown out Age gaps</a:t>
+              <a:t>Distance and equation models (KNN, Logistic Regression) hear only the shouting axis: raw Fare gaps drown out Age gaps</a:t>
             </a:r>
           </a:p>
           <a:p>
@@ -7020,7 +7550,7 @@
                 </a:solidFill>
                 <a:latin typeface="Arial"/>
               </a:rPr>
-              <a:t>Trees only ask questions like "is Fare &gt; 30?" - scale never matters</a:t>
+              <a:t>Trees only ask yes/no questions - "is Fare &gt; 30?" - so scale never matters to them</a:t>
             </a:r>
           </a:p>
           <a:p>
@@ -7040,7 +7570,7 @@
                 </a:solidFill>
                 <a:latin typeface="Arial"/>
               </a:rPr>
-              <a:t>StandardScaler: Fare becomes mean -0.00, std 1.00. MinMaxScaler: Fare squeezed into 0.0 to 1.0</a:t>
+              <a:t>StandardScaler re-expresses values as 'how far from average': Fare becomes mean -0.00, std 1.00</a:t>
             </a:r>
           </a:p>
           <a:p>
@@ -7060,7 +7590,27 @@
                 </a:solidFill>
                 <a:latin typeface="Arial"/>
               </a:rPr>
-              <a:t>The histogram shape does not change - only the numbers on the axis do; Part 1's skinny valley is why equation models still care</a:t>
+              <a:t>MinMaxScaler instead squeezes Fare into 0.0 to 1.0</a:t>
+            </a:r>
+          </a:p>
+          <a:p>
+            <a:pPr algn="l" indent="-228600" marL="228600">
+              <a:spcAft>
+                <a:spcPts val="800"/>
+              </a:spcAft>
+              <a:buClr>
+                <a:srgbClr val="1E5EF3"/>
+              </a:buClr>
+              <a:buChar char="—"/>
+            </a:pPr>
+            <a:r>
+              <a:rPr sz="1450" b="0">
+                <a:solidFill>
+                  <a:srgbClr val="202B38"/>
+                </a:solidFill>
+                <a:latin typeface="Arial"/>
+              </a:rPr>
+              <a:t>The histogram's shape never changes - scaling only re-labels the ruler</a:t>
             </a:r>
           </a:p>
         </p:txBody>
@@ -7124,7 +7674,7 @@
                 </a:solidFill>
                 <a:latin typeface="Arial"/>
               </a:rPr>
-              <a:t>Raw training ranges: Age 0 to 80, Fare 0 to 512.3. Module 2, notebook 1.</a:t>
+              <a:t>Each bar = one column's raw range in the training set. Module 2, notebook 1.</a:t>
             </a:r>
           </a:p>
         </p:txBody>
@@ -7477,7 +8027,7 @@
                 </a:solidFill>
                 <a:latin typeface="Arial"/>
               </a:rPr>
-              <a:t>A regex (text-search pattern) " ([A-Za-z]+)\." grabs the word before the period - the title</a:t>
+              <a:t>Every Name hides a title: "Cumings, Mrs. John Bradley" contains Mrs</a:t>
             </a:r>
           </a:p>
           <a:p>
@@ -7497,7 +8047,7 @@
                 </a:solidFill>
                 <a:latin typeface="Arial"/>
               </a:rPr>
-              <a:t>"Cumings, Mrs. John Bradley" yields Mrs for Florence; 14 raw titles group into 5 buckets: Mr, Miss, Mrs, Master, Rare</a:t>
+              <a:t>A regex (a text-search pattern), " ([A-Za-z]+)\.", grabs the word before the period</a:t>
             </a:r>
           </a:p>
           <a:p>
@@ -7517,7 +8067,7 @@
                 </a:solidFill>
                 <a:latin typeface="Arial"/>
               </a:rPr>
-              <a:t>Frankie, age 9, is a "Master" - the old title for young boys, secretly encoding "male child"</a:t>
+              <a:t>14 raw titles group into 5 buckets: Mr, Miss, Mrs, Master, Rare - the chart counts them</a:t>
             </a:r>
           </a:p>
           <a:p>
@@ -7537,7 +8087,27 @@
                 </a:solidFill>
                 <a:latin typeface="Arial"/>
               </a:rPr>
-              <a:t>To the Sex column, Owen (22) and Frankie (9) are both just male - Title tells the man from the boy</a:t>
+              <a:t>Frankie, age 9, is a "Master" - the old title for a young boy</a:t>
+            </a:r>
+          </a:p>
+          <a:p>
+            <a:pPr algn="l" indent="-228600" marL="228600">
+              <a:spcAft>
+                <a:spcPts val="800"/>
+              </a:spcAft>
+              <a:buClr>
+                <a:srgbClr val="1E5EF3"/>
+              </a:buClr>
+              <a:buChar char="—"/>
+            </a:pPr>
+            <a:r>
+              <a:rPr sz="1450" b="0">
+                <a:solidFill>
+                  <a:srgbClr val="202B38"/>
+                </a:solidFill>
+                <a:latin typeface="Arial"/>
+              </a:rPr>
+              <a:t>Sex alone calls Owen (22) and Frankie (9) both male - Title tells the man from the boy</a:t>
             </a:r>
           </a:p>
           <a:p>
@@ -7621,7 +8191,7 @@
                 </a:solidFill>
                 <a:latin typeface="Arial"/>
               </a:rPr>
-              <a:t>Grouped Title counts, training set (712 rows). Module 2, notebook 1.</a:t>
+              <a:t>Grouped Title counts, training set (712 rows). Master highlighted: the boys the Sex column hides. Module 2, notebook 1.</a:t>
             </a:r>
           </a:p>
         </p:txBody>
@@ -7974,7 +8544,7 @@
                 </a:solidFill>
                 <a:latin typeface="Arial"/>
               </a:rPr>
-              <a:t>FamilySize = SibSp + Parch + 1: everyone counts themselves</a:t>
+              <a:t>FamilySize = SibSp (siblings/spouses) + Parch (parents/children) + 1: you count yourself</a:t>
             </a:r>
           </a:p>
           <a:p>
@@ -7994,7 +8564,7 @@
                 </a:solidFill>
                 <a:latin typeface="Arial"/>
               </a:rPr>
-              <a:t>Owen: SibSp 1, Parch 0 -&gt; FamilySize 2. Frankie: SibSp 0, Parch 2 -&gt; FamilySize 3</a:t>
+              <a:t>Owen: 1 + 0 + himself = 2. Frankie: 0 + 2 + himself = 3</a:t>
             </a:r>
           </a:p>
           <a:p>
@@ -8014,7 +8584,7 @@
                 </a:solidFill>
                 <a:latin typeface="Arial"/>
               </a:rPr>
-              <a:t>IsAlone = 1 when FamilySize is 1: 434 of 712 training passengers - none of our three</a:t>
+              <a:t>IsAlone = 1 when FamilySize is 1 - true for 434 of 712 training passengers</a:t>
             </a:r>
           </a:p>
           <a:p>
@@ -8034,7 +8604,27 @@
                 </a:solidFill>
                 <a:latin typeface="Arial"/>
               </a:rPr>
-              <a:t>Notebook charts: solo travelers and very large families fared badly; small families of 2 to 4 did best</a:t>
+              <a:t>Chart: one bar per family size, counting passengers; the blue bars are sizes 2 to 4</a:t>
+            </a:r>
+          </a:p>
+          <a:p>
+            <a:pPr algn="l" indent="-228600" marL="228600">
+              <a:spcAft>
+                <a:spcPts val="800"/>
+              </a:spcAft>
+              <a:buClr>
+                <a:srgbClr val="1E5EF3"/>
+              </a:buClr>
+              <a:buChar char="—"/>
+            </a:pPr>
+            <a:r>
+              <a:rPr sz="1450" b="0">
+                <a:solidFill>
+                  <a:srgbClr val="202B38"/>
+                </a:solidFill>
+                <a:latin typeface="Arial"/>
+              </a:rPr>
+              <a:t>Those small families fared best; solo travelers and very large families fared badly</a:t>
             </a:r>
           </a:p>
           <a:p>
@@ -8118,7 +8708,7 @@
                 </a:solidFill>
                 <a:latin typeface="Arial"/>
               </a:rPr>
-              <a:t>FamilySize distribution, training set. Module 2, notebook 1.</a:t>
+              <a:t>FamilySize distribution, training set. Blue bars: the sizes that fared best. Module 2, notebook 1.</a:t>
             </a:r>
           </a:p>
         </p:txBody>
@@ -8555,7 +9145,7 @@
                 </a:solidFill>
                 <a:latin typeface="Arial"/>
               </a:rPr>
-              <a:t>A house lot has frontage (x1) and depth (x2)</a:t>
+              <a:t>A house lot has a street-facing width (x1, the 'frontage') and a depth (x2)</a:t>
             </a:r>
           </a:p>
           <a:p>
@@ -8575,7 +9165,7 @@
                 </a:solidFill>
                 <a:latin typeface="Arial"/>
               </a:rPr>
-              <a:t>New feature: x3 = x1 * x2 = lot area - exactly Part 1's x1 * x2 move, in Ng's own example</a:t>
+              <a:t>New feature: x3 = x1 * x2 = the lot's area</a:t>
             </a:r>
           </a:p>
           <a:p>
@@ -8595,7 +9185,27 @@
                 </a:solidFill>
                 <a:latin typeface="Arial"/>
               </a:rPr>
-              <a:t>Area is often more predictive than either raw column</a:t>
+              <a:t>Exactly Part 1's x1 * x2 move, in Ng's own example</a:t>
+            </a:r>
+          </a:p>
+          <a:p>
+            <a:pPr algn="l" indent="-228600" marL="228600">
+              <a:spcAft>
+                <a:spcPts val="600"/>
+              </a:spcAft>
+              <a:buClr>
+                <a:srgbClr val="1E5EF3"/>
+              </a:buClr>
+              <a:buChar char="—"/>
+            </a:pPr>
+            <a:r>
+              <a:rPr sz="1300" b="0">
+                <a:solidFill>
+                  <a:srgbClr val="202B38"/>
+                </a:solidFill>
+                <a:latin typeface="Arial"/>
+              </a:rPr>
+              <a:t>Area often predicts price better than width or depth alone</a:t>
             </a:r>
           </a:p>
           <a:p>
@@ -9195,7 +9805,7 @@
                 </a:solidFill>
                 <a:latin typeface="Arial"/>
               </a:rPr>
-              <a:t>fit_transform(train) learns every step's values; transform(test) only applies them</a:t>
+              <a:t>Read the top lane first: Frankie's one raw row becomes 18 numbers, left to right</a:t>
             </a:r>
           </a:p>
           <a:p>
@@ -9215,7 +9825,7 @@
                 </a:solidFill>
                 <a:latin typeface="Arial"/>
               </a:rPr>
-              <a:t>Numeric: impute median, then scale. Categorical: impute most frequent, then one-hot with handle_unknown="ignore"</a:t>
+              <a:t>Then the bottom lane: the machinery - impute gaps, encode categories, scale numbers</a:t>
             </a:r>
           </a:p>
           <a:p>
@@ -9235,7 +9845,7 @@
                 </a:solidFill>
                 <a:latin typeface="Arial"/>
               </a:rPr>
-              <a:t>Three reasons for a Pipeline: no leakage, no forgotten steps, portability</a:t>
+              <a:t>The dotted link: the top lane's last arrow IS the bottom lane</a:t>
             </a:r>
           </a:p>
           <a:p>
@@ -9255,7 +9865,47 @@
                 </a:solidFill>
                 <a:latin typeface="Arial"/>
               </a:rPr>
-              <a:t>IsAlone is computed for every row but not on the model's feature list - the ColumnTransformer keeps only listed columns</a:t>
+              <a:t>fit_transform(train) learns every step's values; transform(test) only applies them</a:t>
+            </a:r>
+          </a:p>
+          <a:p>
+            <a:pPr algn="l" indent="-228600" marL="228600">
+              <a:spcAft>
+                <a:spcPts val="800"/>
+              </a:spcAft>
+              <a:buClr>
+                <a:srgbClr val="1E5EF3"/>
+              </a:buClr>
+              <a:buChar char="—"/>
+            </a:pPr>
+            <a:r>
+              <a:rPr sz="1450" b="0">
+                <a:solidFill>
+                  <a:srgbClr val="202B38"/>
+                </a:solidFill>
+                <a:latin typeface="Arial"/>
+              </a:rPr>
+              <a:t>One Pipeline: no leakage, no forgotten steps, portable</a:t>
+            </a:r>
+          </a:p>
+          <a:p>
+            <a:pPr algn="l" indent="-228600" marL="228600">
+              <a:spcAft>
+                <a:spcPts val="800"/>
+              </a:spcAft>
+              <a:buClr>
+                <a:srgbClr val="1E5EF3"/>
+              </a:buClr>
+              <a:buChar char="—"/>
+            </a:pPr>
+            <a:r>
+              <a:rPr sz="1450" b="0">
+                <a:solidFill>
+                  <a:srgbClr val="202B38"/>
+                </a:solidFill>
+                <a:latin typeface="Arial"/>
+              </a:rPr>
+              <a:t>IsAlone is computed but not on the feature lists - the ColumnTransformer drops it</a:t>
             </a:r>
           </a:p>
         </p:txBody>
@@ -9544,7 +10194,7 @@
                 </a:solidFill>
                 <a:latin typeface="Arial"/>
               </a:rPr>
-              <a:t>Part 1, the theory: the model only sees the numbers you construct - representation comes first (MIT)</a:t>
+              <a:t>Part 1, the theory: the model only sees the numbers you construct (MIT)</a:t>
             </a:r>
           </a:p>
           <a:p>
@@ -9564,7 +10214,7 @@
                 </a:solidFill>
                 <a:latin typeface="Arial"/>
               </a:rPr>
-              <a:t>Missingness has species - MCAR, MAR, MNAR - and the data can't tell you which</a:t>
+              <a:t>Missing values have species - MCAR, MAR, MNAR - and the data cannot tell you which</a:t>
             </a:r>
           </a:p>
           <a:p>
@@ -9604,7 +10254,7 @@
                 </a:solidFill>
                 <a:latin typeface="Arial"/>
               </a:rPr>
-              <a:t>Part 2, the practice: split first (80/20, seed 42, stratified); fit on train only - imputers, encoders, and scalers learn from the 712 training rows; Pipelines always</a:t>
+              <a:t>Part 2, the practice: split first (80/20, seed 42, stratified); fit on train only; Pipelines always</a:t>
             </a:r>
           </a:p>
           <a:p>
@@ -9624,7 +10274,7 @@
                 </a:solidFill>
                 <a:latin typeface="Arial"/>
               </a:rPr>
-              <a:t>Proof it works: a plain Logistic Regression scores 0.838 on the 179 unseen passengers - train 0.829, no memorization gap; choosing the best model is Session 3's whole job</a:t>
+              <a:t>Proof it works: a plain Logistic Regression scores 0.838 on the 179 unseen passengers - train 0.829, no memorization gap</a:t>
             </a:r>
           </a:p>
           <a:p>
@@ -9644,7 +10294,7 @@
                 </a:solidFill>
                 <a:latin typeface="Arial"/>
               </a:rPr>
-              <a:t>Practice now: notebook 01-data-prep-and-feature-engineering in Colab</a:t>
+              <a:t>Choosing the best model is Session 3's job. Practice now: notebook 01-data-prep-and-feature-engineering in Colab</a:t>
             </a:r>
           </a:p>
         </p:txBody>
@@ -10037,7 +10687,7 @@
                 </a:solidFill>
                 <a:latin typeface="Arial"/>
               </a:rPr>
-              <a:t>Where we left off: 891 manifest rows, split 80/20 into 712 train / 179 test - stratified, seed 42</a:t>
+              <a:t>Last time: 891 passenger rows, split 80/20 - 712 train, 179 test (stratified, seed 42)</a:t>
             </a:r>
           </a:p>
           <a:p>
@@ -10057,7 +10707,7 @@
                 </a:solidFill>
                 <a:latin typeface="Arial"/>
               </a:rPr>
-              <a:t>In exam terms: study on the train rows, pick your strategy with practice tests, sit the final once</a:t>
+              <a:t>How to read the bar: pale band = the 712 training rows; dark block = the 179 test rows, sealed</a:t>
             </a:r>
           </a:p>
           <a:p>
@@ -10077,7 +10727,7 @@
                 </a:solidFill>
                 <a:latin typeface="Arial"/>
               </a:rPr>
-              <a:t>Golden rule restated: anything learned FROM data (a fill-in value, a scaler) is part of the model - so it must never see test rows</a:t>
+              <a:t>The hatched stripe sits INSIDE training: validation - practice tests, built in Session 3</a:t>
             </a:r>
           </a:p>
           <a:p>
@@ -10097,7 +10747,7 @@
                 </a:solidFill>
                 <a:latin typeface="Arial"/>
               </a:rPr>
-              <a:t>The bar: FIT on the training band; CHOOSE models and settings in a validation band; REPORT on the test band, opened once</a:t>
+              <a:t>Exam terms: study on train, pick your strategy with practice tests, sit the final once</a:t>
             </a:r>
           </a:p>
           <a:p>
@@ -10117,7 +10767,27 @@
                 </a:solidFill>
                 <a:latin typeface="Arial"/>
               </a:rPr>
-              <a:t>Everything today happens inside the FIT band only</a:t>
+              <a:t>Anything learned FROM data - a fill-in value, a scaler - is part of the model</a:t>
+            </a:r>
+          </a:p>
+          <a:p>
+            <a:pPr algn="l" indent="-228600" marL="228600">
+              <a:spcAft>
+                <a:spcPts val="800"/>
+              </a:spcAft>
+              <a:buClr>
+                <a:srgbClr val="1E5EF3"/>
+              </a:buClr>
+              <a:buChar char="—"/>
+            </a:pPr>
+            <a:r>
+              <a:rPr sz="1450" b="0">
+                <a:solidFill>
+                  <a:srgbClr val="202B38"/>
+                </a:solidFill>
+                <a:latin typeface="Arial"/>
+              </a:rPr>
+              <a:t>So it must never see the test rows. Today lives entirely in the FIT band</a:t>
             </a:r>
           </a:p>
         </p:txBody>
@@ -10403,7 +11073,7 @@
                 </a:solidFill>
                 <a:latin typeface="Arial"/>
               </a:rPr>
-              <a:t>Part 1 - The theory: turning the world into vectors</a:t>
+              <a:t>Part 1 - The theory: turning passengers into rows of numbers</a:t>
             </a:r>
           </a:p>
         </p:txBody>
@@ -10443,7 +11113,7 @@
                 </a:solidFill>
                 <a:latin typeface="Arial"/>
               </a:rPr>
-              <a:t>A vector is just a row of numbers. Before any code: the model only sees the numbers you construct - missing values, encodings, scales, and expanded features are design decisions, not chores</a:t>
+              <a:t>A row of numbers is called a vector. Before any code: the model only sees the numbers you construct - gaps, encodings, scales, and new columns are design decisions, not chores</a:t>
             </a:r>
           </a:p>
         </p:txBody>
@@ -10796,7 +11466,7 @@
                 </a:solidFill>
                 <a:latin typeface="Arial"/>
               </a:rPr>
-              <a:t>Representation - in plain words: the row of numbers you choose to describe each passenger with</a:t>
+              <a:t>The model never meets a passenger - it meets a row of numbers built to stand for one</a:t>
             </a:r>
           </a:p>
           <a:p>
@@ -10816,7 +11486,7 @@
                 </a:solidFill>
                 <a:latin typeface="Arial"/>
               </a:rPr>
-              <a:t>The model never meets a passenger - it meets that row; the representation IS its whole world</a:t>
+              <a:t>That row is the representation: the numbers you choose to describe each passenger</a:t>
             </a:r>
           </a:p>
           <a:p>
@@ -10836,7 +11506,7 @@
                 </a:solidFill>
                 <a:latin typeface="Arial"/>
               </a:rPr>
-              <a:t>Good features beat fancy algorithms: a simple model on good columns routinely wins on tables</a:t>
+              <a:t>How to read the charts: each dot is one example; the line is the best straight line</a:t>
             </a:r>
           </a:p>
           <a:p>
@@ -10856,7 +11526,7 @@
                 </a:solidFill>
                 <a:latin typeface="Arial"/>
               </a:rPr>
-              <a:t>The core trick: transform the inputs, keep the model - same line-fitter, new coordinates</a:t>
+              <a:t>Left: plotted against x, no straight line fits the dots</a:t>
             </a:r>
           </a:p>
           <a:p>
@@ -10876,7 +11546,7 @@
                 </a:solidFill>
                 <a:latin typeface="Arial"/>
               </a:rPr>
-              <a:t>Look right: the same points defeat a line on one axis and line up perfectly on another</a:t>
+              <a:t>Right: the SAME dots against x squared - now they line up</a:t>
             </a:r>
           </a:p>
           <a:p>
@@ -10896,7 +11566,7 @@
                 </a:solidFill>
                 <a:latin typeface="Arial"/>
               </a:rPr>
-              <a:t>This chapter: the principled moves - gaps, encodings, scaling, expansion - and why each is honest</a:t>
+              <a:t>The dots never move; only the axis changes - good columns beat fancy algorithms</a:t>
             </a:r>
           </a:p>
         </p:txBody>
@@ -10960,7 +11630,7 @@
                 </a:solidFill>
                 <a:latin typeface="Arial"/>
               </a:rPr>
-              <a:t>Illustration - same synthetic points, two coordinate systems. MIT 6.390, ch. 5 "Feature representation".</a:t>
+              <a:t>Same 26 synthetic dots in both panels; only the horizontal axis changes. MIT 6.390, ch. 5 "Feature representation".</a:t>
             </a:r>
           </a:p>
         </p:txBody>
@@ -11603,7 +12273,7 @@
                           </a:solidFill>
                           <a:latin typeface="Arial"/>
                         </a:rPr>
-                        <a:t>Age runs 0 to 80 while Fare runs 0 to 512</a:t>
+                        <a:t>Age runs 0 to 80 while Fare runs 0 to 512 - Fare shouts, Age whispers</a:t>
                       </a:r>
                     </a:p>
                   </a:txBody>
@@ -12034,7 +12704,7 @@
                 </a:solidFill>
                 <a:latin typeface="Arial"/>
               </a:rPr>
-              <a:t>MCAR - in plain words: holes poked blindfolded; nothing decides where they land</a:t>
+              <a:t>Our table is missing 177 of 891 ages. WHY a hole exists matters</a:t>
             </a:r>
           </a:p>
           <a:p>
@@ -12054,7 +12724,7 @@
                 </a:solidFill>
                 <a:latin typeface="Arial"/>
               </a:rPr>
-              <a:t>MAR: the chance of a hole depends on OTHER columns you can see (third class recorded less often?)</a:t>
+              <a:t>How to read: one card per species - meaning, a Titanic story, the risk, the fix</a:t>
             </a:r>
           </a:p>
           <a:p>
@@ -12074,7 +12744,7 @@
                 </a:solidFill>
                 <a:latin typeface="Arial"/>
               </a:rPr>
-              <a:t>MNAR: the hole is caused by the hidden value itself - the nastiest species</a:t>
+              <a:t>MCAR: holes poked blindfolded - nothing decides where they land</a:t>
             </a:r>
           </a:p>
           <a:p>
@@ -12094,7 +12764,7 @@
                 </a:solidFill>
                 <a:latin typeface="Arial"/>
               </a:rPr>
-              <a:t>The punchline: the data alone can never tell you which - you must reason about the world</a:t>
+              <a:t>MAR: holes cluster by ANOTHER column you can see (class, say)</a:t>
             </a:r>
           </a:p>
           <a:p>
@@ -12114,7 +12784,27 @@
                 </a:solidFill>
                 <a:latin typeface="Arial"/>
               </a:rPr>
-              <a:t>Discuss: which species could the Titanic's 177 missing ages be? Argue it - the table cannot</a:t>
+              <a:t>MNAR: the hidden value itself caused the hole - the nastiest kind</a:t>
+            </a:r>
+          </a:p>
+          <a:p>
+            <a:pPr algn="l" indent="-228600" marL="228600">
+              <a:spcAft>
+                <a:spcPts val="800"/>
+              </a:spcAft>
+              <a:buClr>
+                <a:srgbClr val="1E5EF3"/>
+              </a:buClr>
+              <a:buChar char="—"/>
+            </a:pPr>
+            <a:r>
+              <a:rPr sz="1450" b="0">
+                <a:solidFill>
+                  <a:srgbClr val="202B38"/>
+                </a:solidFill>
+                <a:latin typeface="Arial"/>
+              </a:rPr>
+              <a:t>The data alone cannot tell you which. Discuss: which are our 177?</a:t>
             </a:r>
           </a:p>
         </p:txBody>
@@ -12531,7 +13221,7 @@
                 </a:solidFill>
                 <a:latin typeface="Arial"/>
               </a:rPr>
-              <a:t>Encoding - in plain words: translating the world into the only language the model speaks: numbers - without accidentally lying</a:t>
+              <a:t>The manifest says Embarked = S. The model needs numbers, not letters</a:t>
             </a:r>
           </a:p>
           <a:p>
@@ -12551,7 +13241,7 @@
                 </a:solidFill>
                 <a:latin typeface="Arial"/>
               </a:rPr>
-              <a:t>No real order (Embarked C/Q/S): one-hot - one 0/1 column per category, exactly one switched on</a:t>
+              <a:t>Encoding = translating categories into numbers, without inventing facts</a:t>
             </a:r>
           </a:p>
           <a:p>
@@ -12571,7 +13261,7 @@
                 </a:solidFill>
                 <a:latin typeface="Arial"/>
               </a:rPr>
-              <a:t>Real order, unknown spacing (S &lt; M &lt; L): a thermometer code keeps the ranking, invents no distances</a:t>
+              <a:t>How to read: one card per code - when it applies, the translation, why it is honest</a:t>
             </a:r>
           </a:p>
           <a:p>
@@ -12591,7 +13281,7 @@
                 </a:solidFill>
                 <a:latin typeface="Arial"/>
               </a:rPr>
-              <a:t>True quantities (Age, Fare): keep the number, then standardize = re-express as 'how far from average'</a:t>
+              <a:t>One-hot (no real order): each category gets its own 0/1 column</a:t>
             </a:r>
           </a:p>
           <a:p>
@@ -12611,7 +13301,7 @@
                 </a:solidFill>
                 <a:latin typeface="Arial"/>
               </a:rPr>
-              <a:t>Never arbitrary integers: C=1, Q=2, S=3 claims S is three times C - the model learns the lie</a:t>
+              <a:t>Thermometer (order, no spacing): keeps the ranking S &lt; M &lt; L, nothing more</a:t>
             </a:r>
           </a:p>
           <a:p>
@@ -12631,7 +13321,27 @@
                 </a:solidFill>
                 <a:latin typeface="Arial"/>
               </a:rPr>
-              <a:t>The honesty test: an encoding may claim only the structure the category really has</a:t>
+              <a:t>Keep-numeric (true quantities): Age and Fare stay numbers</a:t>
+            </a:r>
+          </a:p>
+          <a:p>
+            <a:pPr algn="l" indent="-228600" marL="228600">
+              <a:spcAft>
+                <a:spcPts val="800"/>
+              </a:spcAft>
+              <a:buClr>
+                <a:srgbClr val="1E5EF3"/>
+              </a:buClr>
+              <a:buChar char="—"/>
+            </a:pPr>
+            <a:r>
+              <a:rPr sz="1450" b="0">
+                <a:solidFill>
+                  <a:srgbClr val="202B38"/>
+                </a:solidFill>
+                <a:latin typeface="Arial"/>
+              </a:rPr>
+              <a:t>The navy strip is the trap: C=1, Q=2, S=3 claims S is three times C</a:t>
             </a:r>
           </a:p>
         </p:txBody>
@@ -13048,7 +13758,7 @@
                 </a:solidFill>
                 <a:latin typeface="Arial"/>
               </a:rPr>
-              <a:t>Recall Session 1: training walks downhill on the cost - the landscape of the average miss</a:t>
+              <a:t>Fare runs 0 to 512, Age 0 to 80 - to the model, Fare shouts and Age whispers</a:t>
             </a:r>
           </a:p>
           <a:p>
@@ -13068,7 +13778,7 @@
                 </a:solidFill>
                 <a:latin typeface="Arial"/>
               </a:rPr>
-              <a:t>With Fare 0-512 next to Age 0-80, the bowl stretches into a long skinny valley</a:t>
+              <a:t>Each picture is a map of the search for the best settings: every ring = settings scoring the same; the star = the best; the dots = training's steps</a:t>
             </a:r>
           </a:p>
           <a:p>
@@ -13088,7 +13798,7 @@
                 </a:solidFill>
                 <a:latin typeface="Arial"/>
               </a:rPr>
-              <a:t>The walk zigzags across the narrow valley and crawls - look left: the dotted path</a:t>
+              <a:t>Unscaled: the map is a long skinny valley - the search zigzags and crawls</a:t>
             </a:r>
           </a:p>
           <a:p>
@@ -13108,7 +13818,7 @@
                 </a:solidFill>
                 <a:latin typeface="Arial"/>
               </a:rPr>
-              <a:t>Rescale to comparable ranges and the bowl turns round - the walk heads straight for the star</a:t>
+              <a:t>Scaled: the map turns round - the search walks straight to the star</a:t>
             </a:r>
           </a:p>
           <a:p>
@@ -13128,7 +13838,7 @@
                 </a:solidFill>
                 <a:latin typeface="Arial"/>
               </a:rPr>
-              <a:t>Scaling never changes what the best model predicts - only how fast and reliably you find it</a:t>
+              <a:t>Scaling never changes the answer - only how fast and surely you find it</a:t>
             </a:r>
           </a:p>
         </p:txBody>
@@ -13150,7 +13860,7 @@
         <p:spPr>
           <a:xfrm>
             <a:off x="5120640" y="1874519"/>
-            <a:ext cx="6492240" cy="3417199"/>
+            <a:ext cx="6492240" cy="3414892"/>
           </a:xfrm>
           <a:prstGeom prst="rect">
             <a:avLst/>
@@ -13192,7 +13902,7 @@
                 </a:solidFill>
                 <a:latin typeface="Arial"/>
               </a:rPr>
-              <a:t>Illustration - schematic cost surface, not course data. Ng, Machine Learning Specialization C1W2.</a:t>
+              <a:t>Illustration - a schematic map of the search, not course data. Ng, Machine Learning Specialization C1W2.</a:t>
             </a:r>
           </a:p>
         </p:txBody>
@@ -13458,7 +14168,7 @@
                 </a:solidFill>
                 <a:latin typeface="Arial"/>
               </a:rPr>
-              <a:t>New features bend the space: four points no line can split become splittable</a:t>
+              <a:t>One engineered column, x1 times x2, splits four points no line ever could</a:t>
             </a:r>
           </a:p>
         </p:txBody>
@@ -13545,7 +14255,7 @@
                 </a:solidFill>
                 <a:latin typeface="Arial"/>
               </a:rPr>
-              <a:t>Four points at (+1 or -1, +1 or -1); diagonal corners share a class - no straight line can separate them, ever</a:t>
+              <a:t>Four points, two facts each (x1, x2) - every value +1 or -1</a:t>
             </a:r>
           </a:p>
           <a:p>
@@ -13565,7 +14275,7 @@
                 </a:solidFill>
                 <a:latin typeface="Arial"/>
               </a:rPr>
-              <a:t>Add one engineered column, x1 * x2: it is +1 for one class and -1 for the other - a single threshold now separates them perfectly</a:t>
+              <a:t>How to read: blue circles = one class, dark squares = the other</a:t>
             </a:r>
           </a:p>
           <a:p>
@@ -13585,7 +14295,7 @@
                 </a:solidFill>
                 <a:latin typeface="Arial"/>
               </a:rPr>
-              <a:t>We did not change the model; we changed the space it looks at</a:t>
+              <a:t>Left: the gray dashed lines are failed tries - no straight line can split circles from squares</a:t>
             </a:r>
           </a:p>
           <a:p>
@@ -13605,7 +14315,7 @@
                 </a:solidFill>
                 <a:latin typeface="Arial"/>
               </a:rPr>
-              <a:t>Preview of Part 2: Title and FamilySize will be the manifest's engineered axes - patterns the raw columns only hint at become linearly visible</a:t>
+              <a:t>Right: re-plot each point by ONE new number, x1 times x2, on a number line</a:t>
             </a:r>
           </a:p>
           <a:p>
@@ -13625,7 +14335,47 @@
                 </a:solidFill>
                 <a:latin typeface="Arial"/>
               </a:rPr>
-              <a:t>A linear model on transformed features is a non-linear model in the original space - feature engineering IS model power</a:t>
+              <a:t>Circles land at +1, squares at -1 - one cut separates them</a:t>
+            </a:r>
+          </a:p>
+          <a:p>
+            <a:pPr algn="l" indent="-228600" marL="228600">
+              <a:spcAft>
+                <a:spcPts val="800"/>
+              </a:spcAft>
+              <a:buClr>
+                <a:srgbClr val="1E5EF3"/>
+              </a:buClr>
+              <a:buChar char="—"/>
+            </a:pPr>
+            <a:r>
+              <a:rPr sz="1450" b="0">
+                <a:solidFill>
+                  <a:srgbClr val="202B38"/>
+                </a:solidFill>
+                <a:latin typeface="Arial"/>
+              </a:rPr>
+              <a:t>We never changed the model - we changed the space it looks at</a:t>
+            </a:r>
+          </a:p>
+          <a:p>
+            <a:pPr algn="l" indent="-228600" marL="228600">
+              <a:spcAft>
+                <a:spcPts val="800"/>
+              </a:spcAft>
+              <a:buClr>
+                <a:srgbClr val="1E5EF3"/>
+              </a:buClr>
+              <a:buChar char="—"/>
+            </a:pPr>
+            <a:r>
+              <a:rPr sz="1450" b="0">
+                <a:solidFill>
+                  <a:srgbClr val="202B38"/>
+                </a:solidFill>
+                <a:latin typeface="Arial"/>
+              </a:rPr>
+              <a:t>Part 2 repeats the move on the manifest: Title and FamilySize</a:t>
             </a:r>
           </a:p>
         </p:txBody>
